--- a/docs/common/marketing/DRP-resumen.pptx
+++ b/docs/common/marketing/DRP-resumen.pptx
@@ -1413,7 +1413,7 @@
           <a:p>
             <a:r>
               <a:rPr lang="en-US" dirty="0"/>
-              <a:t>README §6 y ADR-001 a ADR-004.</a:t>
+              <a:t>README §6 y ADR-001 a ADR-005.</a:t>
             </a:r>
             <a:endParaRPr lang="en-US" dirty="0"/>
           </a:p>
@@ -2029,7 +2029,7 @@
           <a:p>
             <a:r>
               <a:rPr lang="en-US" dirty="0"/>
-              <a:t>README §4.1.1: naturaleza DURADERO / CONSUMIBLE y alcance deliberado del core.</a:t>
+              <a:t>README §4.1.1: naturaleza DURABLE / CONSUMABLE y alcance deliberado del core.</a:t>
             </a:r>
             <a:endParaRPr lang="en-US" dirty="0"/>
           </a:p>
@@ -2117,7 +2117,7 @@
           <a:p>
             <a:r>
               <a:rPr lang="en-US" dirty="0"/>
-              <a:t>README §4.1.1: artículo y existencia; RegistrarEntradaConsumible y FusionarExistencias.</a:t>
+              <a:t>README §4.1.1: artículo y existencia; RegisterConsumableIntake y MergeStockItems.</a:t>
             </a:r>
             <a:endParaRPr lang="en-US" dirty="0"/>
           </a:p>
@@ -3602,7 +3602,7 @@
                 <a:ea typeface="Calibri" pitchFamily="34" charset="-122"/>
                 <a:cs typeface="Calibri" pitchFamily="34" charset="-120"/>
               </a:rPr>
-              <a:t>DISPONIBLE</a:t>
+              <a:t>ACTIVE</a:t>
             </a:r>
             <a:endParaRPr lang="en-US" sz="1600" dirty="0"/>
           </a:p>
@@ -3617,6 +3617,79 @@
         <p:spPr>
           <a:xfrm>
             <a:off x="4617720" y="1572768"/>
+            <a:ext cx="2926080" cy="868680"/>
+          </a:xfrm>
+          <a:prstGeom prst="roundRect">
+            <a:avLst>
+              <a:gd name="adj" fmla="val 9474"/>
+            </a:avLst>
+          </a:prstGeom>
+          <a:solidFill>
+            <a:srgbClr val="C25A32"/>
+          </a:solidFill>
+          <a:ln w="6350">
+            <a:solidFill>
+              <a:srgbClr val="C25A32"/>
+            </a:solidFill>
+            <a:prstDash val="solid"/>
+          </a:ln>
+          <a:effectLst>
+            <a:outerShdw sx="100000" sy="100000" kx="0" ky="0" algn="bl" rotWithShape="0" blurRad="127000" dist="25400" dir="5400000">
+              <a:srgbClr val="0B1F1E">
+                <a:alpha val="10000"/>
+              </a:srgbClr>
+            </a:outerShdw>
+          </a:effectLst>
+        </p:spPr>
+      </p:sp>
+      <p:sp>
+        <p:nvSpPr>
+          <p:cNvPr id="7" name="Text 5"/>
+          <p:cNvSpPr/>
+          <p:nvPr/>
+        </p:nvSpPr>
+        <p:spPr>
+          <a:xfrm>
+            <a:off x="4617720" y="1572768"/>
+            <a:ext cx="2926080" cy="868680"/>
+          </a:xfrm>
+          <a:prstGeom prst="rect">
+            <a:avLst/>
+          </a:prstGeom>
+          <a:noFill/>
+          <a:ln/>
+        </p:spPr>
+        <p:txBody>
+          <a:bodyPr wrap="square" lIns="0" tIns="0" rIns="0" bIns="0" rtlCol="0" anchor="ctr"/>
+          <a:lstStyle/>
+          <a:p>
+            <a:pPr algn="ctr" indent="0" marL="0">
+              <a:buNone/>
+            </a:pPr>
+            <a:r>
+              <a:rPr lang="en-US" sz="1600" b="1" spc="100" kern="0" dirty="0">
+                <a:solidFill>
+                  <a:srgbClr val="FFFFFF"/>
+                </a:solidFill>
+                <a:latin typeface="Calibri" pitchFamily="34" charset="0"/>
+                <a:ea typeface="Calibri" pitchFamily="34" charset="-122"/>
+                <a:cs typeface="Calibri" pitchFamily="34" charset="-120"/>
+              </a:rPr>
+              <a:t>OVERDUE</a:t>
+            </a:r>
+            <a:endParaRPr lang="en-US" sz="1600" dirty="0"/>
+          </a:p>
+        </p:txBody>
+      </p:sp>
+      <p:sp>
+        <p:nvSpPr>
+          <p:cNvPr id="8" name="Shape 6"/>
+          <p:cNvSpPr/>
+          <p:nvPr/>
+        </p:nvSpPr>
+        <p:spPr>
+          <a:xfrm>
+            <a:off x="8412480" y="1572768"/>
             <a:ext cx="2926080" cy="868680"/>
           </a:xfrm>
           <a:prstGeom prst="roundRect">
@@ -3644,46 +3717,7 @@
       </p:sp>
       <p:sp>
         <p:nvSpPr>
-          <p:cNvPr id="7" name="Text 5"/>
-          <p:cNvSpPr/>
-          <p:nvPr/>
-        </p:nvSpPr>
-        <p:spPr>
-          <a:xfrm>
-            <a:off x="4617720" y="1572768"/>
-            <a:ext cx="2926080" cy="868680"/>
-          </a:xfrm>
-          <a:prstGeom prst="rect">
-            <a:avLst/>
-          </a:prstGeom>
-          <a:noFill/>
-          <a:ln/>
-        </p:spPr>
-        <p:txBody>
-          <a:bodyPr wrap="square" lIns="0" tIns="0" rIns="0" bIns="0" rtlCol="0" anchor="ctr"/>
-          <a:lstStyle/>
-          <a:p>
-            <a:pPr algn="ctr" indent="0" marL="0">
-              <a:buNone/>
-            </a:pPr>
-            <a:r>
-              <a:rPr lang="en-US" sz="1600" b="1" spc="100" kern="0" dirty="0">
-                <a:solidFill>
-                  <a:srgbClr val="FFFFFF"/>
-                </a:solidFill>
-                <a:latin typeface="Calibri" pitchFamily="34" charset="0"/>
-                <a:ea typeface="Calibri" pitchFamily="34" charset="-122"/>
-                <a:cs typeface="Calibri" pitchFamily="34" charset="-120"/>
-              </a:rPr>
-              <a:t>PRESTADO</a:t>
-            </a:r>
-            <a:endParaRPr lang="en-US" sz="1600" dirty="0"/>
-          </a:p>
-        </p:txBody>
-      </p:sp>
-      <p:sp>
-        <p:nvSpPr>
-          <p:cNvPr id="8" name="Shape 6"/>
+          <p:cNvPr id="9" name="Text 7"/>
           <p:cNvSpPr/>
           <p:nvPr/>
         </p:nvSpPr>
@@ -3692,40 +3726,6 @@
             <a:off x="8412480" y="1572768"/>
             <a:ext cx="2926080" cy="868680"/>
           </a:xfrm>
-          <a:prstGeom prst="roundRect">
-            <a:avLst>
-              <a:gd name="adj" fmla="val 9474"/>
-            </a:avLst>
-          </a:prstGeom>
-          <a:solidFill>
-            <a:srgbClr val="C25A32"/>
-          </a:solidFill>
-          <a:ln w="6350">
-            <a:solidFill>
-              <a:srgbClr val="C25A32"/>
-            </a:solidFill>
-            <a:prstDash val="solid"/>
-          </a:ln>
-          <a:effectLst>
-            <a:outerShdw sx="100000" sy="100000" kx="0" ky="0" algn="bl" rotWithShape="0" blurRad="127000" dist="25400" dir="5400000">
-              <a:srgbClr val="0B1F1E">
-                <a:alpha val="10000"/>
-              </a:srgbClr>
-            </a:outerShdw>
-          </a:effectLst>
-        </p:spPr>
-      </p:sp>
-      <p:sp>
-        <p:nvSpPr>
-          <p:cNvPr id="9" name="Text 7"/>
-          <p:cNvSpPr/>
-          <p:nvPr/>
-        </p:nvSpPr>
-        <p:spPr>
-          <a:xfrm>
-            <a:off x="8412480" y="1572768"/>
-            <a:ext cx="2926080" cy="868680"/>
-          </a:xfrm>
           <a:prstGeom prst="rect">
             <a:avLst/>
           </a:prstGeom>
@@ -3748,7 +3748,7 @@
                 <a:ea typeface="Calibri" pitchFamily="34" charset="-122"/>
                 <a:cs typeface="Calibri" pitchFamily="34" charset="-120"/>
               </a:rPr>
-              <a:t>VENCIDO</a:t>
+              <a:t>RETURNED</a:t>
             </a:r>
             <a:endParaRPr lang="en-US" sz="1600" dirty="0"/>
           </a:p>
@@ -3787,20 +3787,23 @@
         </p:nvSpPr>
         <p:spPr>
           <a:xfrm>
-            <a:off x="3200400" y="2505456"/>
-            <a:ext cx="1920240" cy="256032"/>
-          </a:xfrm>
-          <a:prstGeom prst="rect">
-            <a:avLst/>
-          </a:prstGeom>
-          <a:noFill/>
-          <a:ln/>
-        </p:spPr>
-        <p:txBody>
-          <a:bodyPr wrap="square" lIns="0" tIns="0" rIns="0" bIns="0" rtlCol="0" anchor="ctr"/>
+            <a:off x="2971800" y="2468880"/>
+            <a:ext cx="2377440" cy="384048"/>
+          </a:xfrm>
+          <a:prstGeom prst="rect">
+            <a:avLst/>
+          </a:prstGeom>
+          <a:noFill/>
+          <a:ln/>
+        </p:spPr>
+        <p:txBody>
+          <a:bodyPr wrap="square" lIns="0" tIns="0" rIns="0" bIns="0" rtlCol="0" anchor="t"/>
           <a:lstStyle/>
           <a:p>
             <a:pPr algn="ctr" indent="0" marL="0">
+              <a:lnSpc>
+                <a:spcPts val="1300"/>
+              </a:lnSpc>
               <a:buNone/>
             </a:pPr>
             <a:r>
@@ -3812,7 +3815,7 @@
                 <a:ea typeface="Calibri" pitchFamily="34" charset="-122"/>
                 <a:cs typeface="Calibri" pitchFamily="34" charset="-120"/>
               </a:rPr>
-              <a:t>se inicia un préstamo</a:t>
+              <a:t>el proceso diario ve la fecha superada</a:t>
             </a:r>
             <a:endParaRPr lang="en-US" sz="1000" dirty="0"/>
           </a:p>
@@ -3851,20 +3854,23 @@
         </p:nvSpPr>
         <p:spPr>
           <a:xfrm>
-            <a:off x="6995160" y="2505456"/>
-            <a:ext cx="1920240" cy="256032"/>
-          </a:xfrm>
-          <a:prstGeom prst="rect">
-            <a:avLst/>
-          </a:prstGeom>
-          <a:noFill/>
-          <a:ln/>
-        </p:spPr>
-        <p:txBody>
-          <a:bodyPr wrap="square" lIns="0" tIns="0" rIns="0" bIns="0" rtlCol="0" anchor="ctr"/>
+            <a:off x="6766560" y="2468880"/>
+            <a:ext cx="2377440" cy="384048"/>
+          </a:xfrm>
+          <a:prstGeom prst="rect">
+            <a:avLst/>
+          </a:prstGeom>
+          <a:noFill/>
+          <a:ln/>
+        </p:spPr>
+        <p:txBody>
+          <a:bodyPr wrap="square" lIns="0" tIns="0" rIns="0" bIns="0" rtlCol="0" anchor="t"/>
           <a:lstStyle/>
           <a:p>
             <a:pPr algn="ctr" indent="0" marL="0">
+              <a:lnSpc>
+                <a:spcPts val="1300"/>
+              </a:lnSpc>
               <a:buNone/>
             </a:pPr>
             <a:r>
@@ -3876,7 +3882,7 @@
                 <a:ea typeface="Calibri" pitchFamily="34" charset="-122"/>
                 <a:cs typeface="Calibri" pitchFamily="34" charset="-120"/>
               </a:rPr>
-              <a:t>supera la fecha prevista</a:t>
+              <a:t>devolución confirmada</a:t>
             </a:r>
             <a:endParaRPr lang="en-US" sz="1000" dirty="0"/>
           </a:p>
@@ -3893,13 +3899,15 @@
             <a:off x="822960" y="2889504"/>
             <a:ext cx="10515600" cy="384048"/>
           </a:xfrm>
-          <a:prstGeom prst="leftArrow">
-            <a:avLst/>
+          <a:prstGeom prst="roundRect">
+            <a:avLst>
+              <a:gd name="adj" fmla="val 21429"/>
+            </a:avLst>
           </a:prstGeom>
           <a:solidFill>
             <a:srgbClr val="E3EDEA"/>
           </a:solidFill>
-          <a:ln w="9525">
+          <a:ln w="12700">
             <a:solidFill>
               <a:srgbClr val="C3D2CF"/>
             </a:solidFill>
@@ -3915,8 +3923,8 @@
         </p:nvSpPr>
         <p:spPr>
           <a:xfrm>
-            <a:off x="1280160" y="2889504"/>
-            <a:ext cx="9601200" cy="384048"/>
+            <a:off x="914400" y="2889504"/>
+            <a:ext cx="10332720" cy="384048"/>
           </a:xfrm>
           <a:prstGeom prst="rect">
             <a:avLst/>
@@ -3940,7 +3948,7 @@
                 <a:ea typeface="Calibri" pitchFamily="34" charset="-122"/>
                 <a:cs typeface="Calibri" pitchFamily="34" charset="-120"/>
               </a:rPr>
-              <a:t>devolución confirmada — desde PRESTADO o desde VENCIDO</a:t>
+              <a:t>Un ACTIVE también se devuelve sin pasar por OVERDUE · el asset acompaña: LENT mientras el préstamo está abierto, AVAILABLE al devolverlo</a:t>
             </a:r>
             <a:endParaRPr lang="en-US" sz="1150" dirty="0"/>
           </a:p>
@@ -4131,7 +4139,7 @@
                 <a:ea typeface="Calibri" pitchFamily="34" charset="-122"/>
                 <a:cs typeface="Calibri" pitchFamily="34" charset="-120"/>
               </a:rPr>
-              <a:t>Estado: ACTIVO, DEVUELTO o VENCIDO</a:t>
+              <a:t>Estado: ACTIVE, RETURNED u OVERDUE</a:t>
             </a:r>
             <a:endParaRPr lang="en-US" sz="1250" dirty="0"/>
           </a:p>
@@ -4250,7 +4258,7 @@
                 <a:ea typeface="Calibri" pitchFamily="34" charset="-122"/>
                 <a:cs typeface="Calibri" pitchFamily="34" charset="-120"/>
               </a:rPr>
-              <a:t>Un solo préstamo ACTIVO por asset (índice único parcial)</a:t>
+              <a:t>Un solo préstamo abierto por asset: un OVERDUE sigue ocupándolo</a:t>
             </a:r>
             <a:endParaRPr lang="en-US" sz="1250" dirty="0"/>
           </a:p>
@@ -4274,7 +4282,7 @@
                 <a:ea typeface="Calibri" pitchFamily="34" charset="-122"/>
                 <a:cs typeface="Calibri" pitchFamily="34" charset="-120"/>
               </a:rPr>
-              <a:t>Solo se prestan assets DURADERO</a:t>
+              <a:t>Solo se prestan assets DURABLE</a:t>
             </a:r>
             <a:endParaRPr lang="en-US" sz="1250" dirty="0"/>
           </a:p>
@@ -4298,7 +4306,7 @@
                 <a:ea typeface="Calibri" pitchFamily="34" charset="-122"/>
                 <a:cs typeface="Calibri" pitchFamily="34" charset="-120"/>
               </a:rPr>
-              <a:t>Ceder un consumible es un AjustarCantidadAsset, no un préstamo</a:t>
+              <a:t>Ceder un consumible es un AdjustAssetQuantity, no un préstamo</a:t>
             </a:r>
             <a:endParaRPr lang="en-US" sz="1250" dirty="0"/>
           </a:p>
@@ -7352,7 +7360,7 @@
                 <a:ea typeface="Cambria" pitchFamily="34" charset="-122"/>
                 <a:cs typeface="Cambria" pitchFamily="34" charset="-120"/>
               </a:rPr>
-              <a:t>Un contrato y nueve eventos</a:t>
+              <a:t>Un contrato y trece eventos</a:t>
             </a:r>
             <a:endParaRPr lang="en-US" sz="3200" dirty="0"/>
           </a:p>
@@ -7792,8 +7800,8 @@
         </p:nvSpPr>
         <p:spPr>
           <a:xfrm>
-            <a:off x="5422392" y="2295144"/>
-            <a:ext cx="128016" cy="128016"/>
+            <a:off x="5422392" y="2221992"/>
+            <a:ext cx="118872" cy="118872"/>
           </a:xfrm>
           <a:prstGeom prst="ellipse">
             <a:avLst/>
@@ -7817,24 +7825,24 @@
         </p:nvSpPr>
         <p:spPr>
           <a:xfrm>
-            <a:off x="5678424" y="2176272"/>
-            <a:ext cx="2377440" cy="365760"/>
-          </a:xfrm>
-          <a:prstGeom prst="rect">
-            <a:avLst/>
-          </a:prstGeom>
-          <a:noFill/>
-          <a:ln/>
-        </p:spPr>
-        <p:txBody>
-          <a:bodyPr wrap="square" lIns="0" tIns="0" rIns="0" bIns="0" rtlCol="0" anchor="ctr"/>
-          <a:lstStyle/>
-          <a:p>
-            <a:pPr indent="0" marL="0">
-              <a:buNone/>
-            </a:pPr>
-            <a:r>
-              <a:rPr lang="en-US" sz="1150" b="1" dirty="0">
+            <a:off x="5660136" y="2139696"/>
+            <a:ext cx="2148840" cy="283464"/>
+          </a:xfrm>
+          <a:prstGeom prst="rect">
+            <a:avLst/>
+          </a:prstGeom>
+          <a:noFill/>
+          <a:ln/>
+        </p:spPr>
+        <p:txBody>
+          <a:bodyPr wrap="square" lIns="0" tIns="0" rIns="0" bIns="0" rtlCol="0" anchor="ctr"/>
+          <a:lstStyle/>
+          <a:p>
+            <a:pPr indent="0" marL="0">
+              <a:buNone/>
+            </a:pPr>
+            <a:r>
+              <a:rPr lang="en-US" sz="1050" b="1" dirty="0">
                 <a:solidFill>
                   <a:srgbClr val="12312F"/>
                 </a:solidFill>
@@ -7842,9 +7850,9 @@
                 <a:ea typeface="Courier New" pitchFamily="34" charset="-122"/>
                 <a:cs typeface="Courier New" pitchFamily="34" charset="-120"/>
               </a:rPr>
-              <a:t>CatalogItemCreated</a:t>
-            </a:r>
-            <a:endParaRPr lang="en-US" sz="1150" dirty="0"/>
+              <a:t>HouseholdCreated</a:t>
+            </a:r>
+            <a:endParaRPr lang="en-US" sz="1050" dirty="0"/>
           </a:p>
         </p:txBody>
       </p:sp>
@@ -7856,24 +7864,24 @@
         </p:nvSpPr>
         <p:spPr>
           <a:xfrm>
-            <a:off x="8092440" y="2176272"/>
-            <a:ext cx="3184855" cy="365760"/>
-          </a:xfrm>
-          <a:prstGeom prst="rect">
-            <a:avLst/>
-          </a:prstGeom>
-          <a:noFill/>
-          <a:ln/>
-        </p:spPr>
-        <p:txBody>
-          <a:bodyPr wrap="square" lIns="0" tIns="0" rIns="0" bIns="0" rtlCol="0" anchor="ctr"/>
-          <a:lstStyle/>
-          <a:p>
-            <a:pPr indent="0" marL="0">
-              <a:buNone/>
-            </a:pPr>
-            <a:r>
-              <a:rPr lang="en-US" sz="1150" dirty="0">
+            <a:off x="7836408" y="2139696"/>
+            <a:ext cx="3440887" cy="283464"/>
+          </a:xfrm>
+          <a:prstGeom prst="rect">
+            <a:avLst/>
+          </a:prstGeom>
+          <a:noFill/>
+          <a:ln/>
+        </p:spPr>
+        <p:txBody>
+          <a:bodyPr wrap="square" lIns="0" tIns="0" rIns="0" bIns="0" rtlCol="0" anchor="ctr"/>
+          <a:lstStyle/>
+          <a:p>
+            <a:pPr indent="0" marL="0">
+              <a:buNone/>
+            </a:pPr>
+            <a:r>
+              <a:rPr lang="en-US" sz="1050" dirty="0">
                 <a:solidFill>
                   <a:srgbClr val="5F706E"/>
                 </a:solidFill>
@@ -7881,9 +7889,9 @@
                 <a:ea typeface="Calibri" pitchFamily="34" charset="-122"/>
                 <a:cs typeface="Calibri" pitchFamily="34" charset="-120"/>
               </a:rPr>
-              <a:t>· se crea un artículo en el catálogo del hogar</a:t>
-            </a:r>
-            <a:endParaRPr lang="en-US" sz="1150" dirty="0"/>
+              <a:t>· un hogar queda verificado y utilizable</a:t>
+            </a:r>
+            <a:endParaRPr lang="en-US" sz="1050" dirty="0"/>
           </a:p>
         </p:txBody>
       </p:sp>
@@ -7895,8 +7903,8 @@
         </p:nvSpPr>
         <p:spPr>
           <a:xfrm>
-            <a:off x="5422392" y="2706624"/>
-            <a:ext cx="128016" cy="128016"/>
+            <a:off x="5422392" y="2505456"/>
+            <a:ext cx="118872" cy="118872"/>
           </a:xfrm>
           <a:prstGeom prst="ellipse">
             <a:avLst/>
@@ -7920,24 +7928,24 @@
         </p:nvSpPr>
         <p:spPr>
           <a:xfrm>
-            <a:off x="5678424" y="2587752"/>
-            <a:ext cx="2377440" cy="365760"/>
-          </a:xfrm>
-          <a:prstGeom prst="rect">
-            <a:avLst/>
-          </a:prstGeom>
-          <a:noFill/>
-          <a:ln/>
-        </p:spPr>
-        <p:txBody>
-          <a:bodyPr wrap="square" lIns="0" tIns="0" rIns="0" bIns="0" rtlCol="0" anchor="ctr"/>
-          <a:lstStyle/>
-          <a:p>
-            <a:pPr indent="0" marL="0">
-              <a:buNone/>
-            </a:pPr>
-            <a:r>
-              <a:rPr lang="en-US" sz="1150" b="1" dirty="0">
+            <a:off x="5660136" y="2423160"/>
+            <a:ext cx="2148840" cy="283464"/>
+          </a:xfrm>
+          <a:prstGeom prst="rect">
+            <a:avLst/>
+          </a:prstGeom>
+          <a:noFill/>
+          <a:ln/>
+        </p:spPr>
+        <p:txBody>
+          <a:bodyPr wrap="square" lIns="0" tIns="0" rIns="0" bIns="0" rtlCol="0" anchor="ctr"/>
+          <a:lstStyle/>
+          <a:p>
+            <a:pPr indent="0" marL="0">
+              <a:buNone/>
+            </a:pPr>
+            <a:r>
+              <a:rPr lang="en-US" sz="1050" b="1" dirty="0">
                 <a:solidFill>
                   <a:srgbClr val="12312F"/>
                 </a:solidFill>
@@ -7945,9 +7953,9 @@
                 <a:ea typeface="Courier New" pitchFamily="34" charset="-122"/>
                 <a:cs typeface="Courier New" pitchFamily="34" charset="-120"/>
               </a:rPr>
-              <a:t>AssetCreated</a:t>
-            </a:r>
-            <a:endParaRPr lang="en-US" sz="1150" dirty="0"/>
+              <a:t>ArticleCreated</a:t>
+            </a:r>
+            <a:endParaRPr lang="en-US" sz="1050" dirty="0"/>
           </a:p>
         </p:txBody>
       </p:sp>
@@ -7959,24 +7967,24 @@
         </p:nvSpPr>
         <p:spPr>
           <a:xfrm>
-            <a:off x="8092440" y="2587752"/>
-            <a:ext cx="3184855" cy="365760"/>
-          </a:xfrm>
-          <a:prstGeom prst="rect">
-            <a:avLst/>
-          </a:prstGeom>
-          <a:noFill/>
-          <a:ln/>
-        </p:spPr>
-        <p:txBody>
-          <a:bodyPr wrap="square" lIns="0" tIns="0" rIns="0" bIns="0" rtlCol="0" anchor="ctr"/>
-          <a:lstStyle/>
-          <a:p>
-            <a:pPr indent="0" marL="0">
-              <a:buNone/>
-            </a:pPr>
-            <a:r>
-              <a:rPr lang="en-US" sz="1150" dirty="0">
+            <a:off x="7836408" y="2423160"/>
+            <a:ext cx="3440887" cy="283464"/>
+          </a:xfrm>
+          <a:prstGeom prst="rect">
+            <a:avLst/>
+          </a:prstGeom>
+          <a:noFill/>
+          <a:ln/>
+        </p:spPr>
+        <p:txBody>
+          <a:bodyPr wrap="square" lIns="0" tIns="0" rIns="0" bIns="0" rtlCol="0" anchor="ctr"/>
+          <a:lstStyle/>
+          <a:p>
+            <a:pPr indent="0" marL="0">
+              <a:buNone/>
+            </a:pPr>
+            <a:r>
+              <a:rPr lang="en-US" sz="1050" dirty="0">
                 <a:solidFill>
                   <a:srgbClr val="5F706E"/>
                 </a:solidFill>
@@ -7984,9 +7992,9 @@
                 <a:ea typeface="Calibri" pitchFamily="34" charset="-122"/>
                 <a:cs typeface="Calibri" pitchFamily="34" charset="-120"/>
               </a:rPr>
-              <a:t>· se da de alta un asset o la primera existencia</a:t>
-            </a:r>
-            <a:endParaRPr lang="en-US" sz="1150" dirty="0"/>
+              <a:t>· se crea un artículo en el catálogo</a:t>
+            </a:r>
+            <a:endParaRPr lang="en-US" sz="1050" dirty="0"/>
           </a:p>
         </p:txBody>
       </p:sp>
@@ -7998,8 +8006,8 @@
         </p:nvSpPr>
         <p:spPr>
           <a:xfrm>
-            <a:off x="5422392" y="3118104"/>
-            <a:ext cx="128016" cy="128016"/>
+            <a:off x="5422392" y="2788920"/>
+            <a:ext cx="118872" cy="118872"/>
           </a:xfrm>
           <a:prstGeom prst="ellipse">
             <a:avLst/>
@@ -8023,24 +8031,24 @@
         </p:nvSpPr>
         <p:spPr>
           <a:xfrm>
-            <a:off x="5678424" y="2999232"/>
-            <a:ext cx="2377440" cy="365760"/>
-          </a:xfrm>
-          <a:prstGeom prst="rect">
-            <a:avLst/>
-          </a:prstGeom>
-          <a:noFill/>
-          <a:ln/>
-        </p:spPr>
-        <p:txBody>
-          <a:bodyPr wrap="square" lIns="0" tIns="0" rIns="0" bIns="0" rtlCol="0" anchor="ctr"/>
-          <a:lstStyle/>
-          <a:p>
-            <a:pPr indent="0" marL="0">
-              <a:buNone/>
-            </a:pPr>
-            <a:r>
-              <a:rPr lang="en-US" sz="1150" b="1" dirty="0">
+            <a:off x="5660136" y="2706624"/>
+            <a:ext cx="2148840" cy="283464"/>
+          </a:xfrm>
+          <a:prstGeom prst="rect">
+            <a:avLst/>
+          </a:prstGeom>
+          <a:noFill/>
+          <a:ln/>
+        </p:spPr>
+        <p:txBody>
+          <a:bodyPr wrap="square" lIns="0" tIns="0" rIns="0" bIns="0" rtlCol="0" anchor="ctr"/>
+          <a:lstStyle/>
+          <a:p>
+            <a:pPr indent="0" marL="0">
+              <a:buNone/>
+            </a:pPr>
+            <a:r>
+              <a:rPr lang="en-US" sz="1050" b="1" dirty="0">
                 <a:solidFill>
                   <a:srgbClr val="12312F"/>
                 </a:solidFill>
@@ -8048,9 +8056,9 @@
                 <a:ea typeface="Courier New" pitchFamily="34" charset="-122"/>
                 <a:cs typeface="Courier New" pitchFamily="34" charset="-120"/>
               </a:rPr>
-              <a:t>AssetMoved</a:t>
-            </a:r>
-            <a:endParaRPr lang="en-US" sz="1150" dirty="0"/>
+              <a:t>AssetCreated</a:t>
+            </a:r>
+            <a:endParaRPr lang="en-US" sz="1050" dirty="0"/>
           </a:p>
         </p:txBody>
       </p:sp>
@@ -8062,24 +8070,24 @@
         </p:nvSpPr>
         <p:spPr>
           <a:xfrm>
-            <a:off x="8092440" y="2999232"/>
-            <a:ext cx="3184855" cy="365760"/>
-          </a:xfrm>
-          <a:prstGeom prst="rect">
-            <a:avLst/>
-          </a:prstGeom>
-          <a:noFill/>
-          <a:ln/>
-        </p:spPr>
-        <p:txBody>
-          <a:bodyPr wrap="square" lIns="0" tIns="0" rIns="0" bIns="0" rtlCol="0" anchor="ctr"/>
-          <a:lstStyle/>
-          <a:p>
-            <a:pPr indent="0" marL="0">
-              <a:buNone/>
-            </a:pPr>
-            <a:r>
-              <a:rPr lang="en-US" sz="1150" dirty="0">
+            <a:off x="7836408" y="2706624"/>
+            <a:ext cx="3440887" cy="283464"/>
+          </a:xfrm>
+          <a:prstGeom prst="rect">
+            <a:avLst/>
+          </a:prstGeom>
+          <a:noFill/>
+          <a:ln/>
+        </p:spPr>
+        <p:txBody>
+          <a:bodyPr wrap="square" lIns="0" tIns="0" rIns="0" bIns="0" rtlCol="0" anchor="ctr"/>
+          <a:lstStyle/>
+          <a:p>
+            <a:pPr indent="0" marL="0">
+              <a:buNone/>
+            </a:pPr>
+            <a:r>
+              <a:rPr lang="en-US" sz="1050" dirty="0">
                 <a:solidFill>
                   <a:srgbClr val="5F706E"/>
                 </a:solidFill>
@@ -8087,9 +8095,9 @@
                 <a:ea typeface="Calibri" pitchFamily="34" charset="-122"/>
                 <a:cs typeface="Calibri" pitchFamily="34" charset="-120"/>
               </a:rPr>
-              <a:t>· cambia la ubicación de un asset</a:t>
-            </a:r>
-            <a:endParaRPr lang="en-US" sz="1150" dirty="0"/>
+              <a:t>· se da de alta un asset o la primera existencia</a:t>
+            </a:r>
+            <a:endParaRPr lang="en-US" sz="1050" dirty="0"/>
           </a:p>
         </p:txBody>
       </p:sp>
@@ -8101,8 +8109,8 @@
         </p:nvSpPr>
         <p:spPr>
           <a:xfrm>
-            <a:off x="5422392" y="3529584"/>
-            <a:ext cx="128016" cy="128016"/>
+            <a:off x="5422392" y="3072384"/>
+            <a:ext cx="118872" cy="118872"/>
           </a:xfrm>
           <a:prstGeom prst="ellipse">
             <a:avLst/>
@@ -8126,24 +8134,24 @@
         </p:nvSpPr>
         <p:spPr>
           <a:xfrm>
-            <a:off x="5678424" y="3410712"/>
-            <a:ext cx="2377440" cy="365760"/>
-          </a:xfrm>
-          <a:prstGeom prst="rect">
-            <a:avLst/>
-          </a:prstGeom>
-          <a:noFill/>
-          <a:ln/>
-        </p:spPr>
-        <p:txBody>
-          <a:bodyPr wrap="square" lIns="0" tIns="0" rIns="0" bIns="0" rtlCol="0" anchor="ctr"/>
-          <a:lstStyle/>
-          <a:p>
-            <a:pPr indent="0" marL="0">
-              <a:buNone/>
-            </a:pPr>
-            <a:r>
-              <a:rPr lang="en-US" sz="1150" b="1" dirty="0">
+            <a:off x="5660136" y="2990088"/>
+            <a:ext cx="2148840" cy="283464"/>
+          </a:xfrm>
+          <a:prstGeom prst="rect">
+            <a:avLst/>
+          </a:prstGeom>
+          <a:noFill/>
+          <a:ln/>
+        </p:spPr>
+        <p:txBody>
+          <a:bodyPr wrap="square" lIns="0" tIns="0" rIns="0" bIns="0" rtlCol="0" anchor="ctr"/>
+          <a:lstStyle/>
+          <a:p>
+            <a:pPr indent="0" marL="0">
+              <a:buNone/>
+            </a:pPr>
+            <a:r>
+              <a:rPr lang="en-US" sz="1050" b="1" dirty="0">
                 <a:solidFill>
                   <a:srgbClr val="12312F"/>
                 </a:solidFill>
@@ -8151,9 +8159,9 @@
                 <a:ea typeface="Courier New" pitchFamily="34" charset="-122"/>
                 <a:cs typeface="Courier New" pitchFamily="34" charset="-120"/>
               </a:rPr>
-              <a:t>AssetHierarchyChanged</a:t>
-            </a:r>
-            <a:endParaRPr lang="en-US" sz="1150" dirty="0"/>
+              <a:t>AssetMoved</a:t>
+            </a:r>
+            <a:endParaRPr lang="en-US" sz="1050" dirty="0"/>
           </a:p>
         </p:txBody>
       </p:sp>
@@ -8165,24 +8173,24 @@
         </p:nvSpPr>
         <p:spPr>
           <a:xfrm>
-            <a:off x="8092440" y="3410712"/>
-            <a:ext cx="3184855" cy="365760"/>
-          </a:xfrm>
-          <a:prstGeom prst="rect">
-            <a:avLst/>
-          </a:prstGeom>
-          <a:noFill/>
-          <a:ln/>
-        </p:spPr>
-        <p:txBody>
-          <a:bodyPr wrap="square" lIns="0" tIns="0" rIns="0" bIns="0" rtlCol="0" anchor="ctr"/>
-          <a:lstStyle/>
-          <a:p>
-            <a:pPr indent="0" marL="0">
-              <a:buNone/>
-            </a:pPr>
-            <a:r>
-              <a:rPr lang="en-US" sz="1150" dirty="0">
+            <a:off x="7836408" y="2990088"/>
+            <a:ext cx="3440887" cy="283464"/>
+          </a:xfrm>
+          <a:prstGeom prst="rect">
+            <a:avLst/>
+          </a:prstGeom>
+          <a:noFill/>
+          <a:ln/>
+        </p:spPr>
+        <p:txBody>
+          <a:bodyPr wrap="square" lIns="0" tIns="0" rIns="0" bIns="0" rtlCol="0" anchor="ctr"/>
+          <a:lstStyle/>
+          <a:p>
+            <a:pPr indent="0" marL="0">
+              <a:buNone/>
+            </a:pPr>
+            <a:r>
+              <a:rPr lang="en-US" sz="1050" dirty="0">
                 <a:solidFill>
                   <a:srgbClr val="5F706E"/>
                 </a:solidFill>
@@ -8190,9 +8198,9 @@
                 <a:ea typeface="Calibri" pitchFamily="34" charset="-122"/>
                 <a:cs typeface="Calibri" pitchFamily="34" charset="-120"/>
               </a:rPr>
-              <a:t>· cambia el asset padre o la composición</a:t>
-            </a:r>
-            <a:endParaRPr lang="en-US" sz="1150" dirty="0"/>
+              <a:t>· cambia la ubicación de un asset</a:t>
+            </a:r>
+            <a:endParaRPr lang="en-US" sz="1050" dirty="0"/>
           </a:p>
         </p:txBody>
       </p:sp>
@@ -8204,8 +8212,8 @@
         </p:nvSpPr>
         <p:spPr>
           <a:xfrm>
-            <a:off x="5422392" y="3941064"/>
-            <a:ext cx="128016" cy="128016"/>
+            <a:off x="5422392" y="3355848"/>
+            <a:ext cx="118872" cy="118872"/>
           </a:xfrm>
           <a:prstGeom prst="ellipse">
             <a:avLst/>
@@ -8229,24 +8237,24 @@
         </p:nvSpPr>
         <p:spPr>
           <a:xfrm>
-            <a:off x="5678424" y="3822192"/>
-            <a:ext cx="2377440" cy="365760"/>
-          </a:xfrm>
-          <a:prstGeom prst="rect">
-            <a:avLst/>
-          </a:prstGeom>
-          <a:noFill/>
-          <a:ln/>
-        </p:spPr>
-        <p:txBody>
-          <a:bodyPr wrap="square" lIns="0" tIns="0" rIns="0" bIns="0" rtlCol="0" anchor="ctr"/>
-          <a:lstStyle/>
-          <a:p>
-            <a:pPr indent="0" marL="0">
-              <a:buNone/>
-            </a:pPr>
-            <a:r>
-              <a:rPr lang="en-US" sz="1150" b="1" dirty="0">
+            <a:off x="5660136" y="3273552"/>
+            <a:ext cx="2148840" cy="283464"/>
+          </a:xfrm>
+          <a:prstGeom prst="rect">
+            <a:avLst/>
+          </a:prstGeom>
+          <a:noFill/>
+          <a:ln/>
+        </p:spPr>
+        <p:txBody>
+          <a:bodyPr wrap="square" lIns="0" tIns="0" rIns="0" bIns="0" rtlCol="0" anchor="ctr"/>
+          <a:lstStyle/>
+          <a:p>
+            <a:pPr indent="0" marL="0">
+              <a:buNone/>
+            </a:pPr>
+            <a:r>
+              <a:rPr lang="en-US" sz="1050" b="1" dirty="0">
                 <a:solidFill>
                   <a:srgbClr val="12312F"/>
                 </a:solidFill>
@@ -8254,9 +8262,9 @@
                 <a:ea typeface="Courier New" pitchFamily="34" charset="-122"/>
                 <a:cs typeface="Courier New" pitchFamily="34" charset="-120"/>
               </a:rPr>
-              <a:t>AssetQuantityChanged</a:t>
-            </a:r>
-            <a:endParaRPr lang="en-US" sz="1150" dirty="0"/>
+              <a:t>AssetHierarchyChanged</a:t>
+            </a:r>
+            <a:endParaRPr lang="en-US" sz="1050" dirty="0"/>
           </a:p>
         </p:txBody>
       </p:sp>
@@ -8268,24 +8276,24 @@
         </p:nvSpPr>
         <p:spPr>
           <a:xfrm>
-            <a:off x="8092440" y="3822192"/>
-            <a:ext cx="3184855" cy="365760"/>
-          </a:xfrm>
-          <a:prstGeom prst="rect">
-            <a:avLst/>
-          </a:prstGeom>
-          <a:noFill/>
-          <a:ln/>
-        </p:spPr>
-        <p:txBody>
-          <a:bodyPr wrap="square" lIns="0" tIns="0" rIns="0" bIns="0" rtlCol="0" anchor="ctr"/>
-          <a:lstStyle/>
-          <a:p>
-            <a:pPr indent="0" marL="0">
-              <a:buNone/>
-            </a:pPr>
-            <a:r>
-              <a:rPr lang="en-US" sz="1150" dirty="0">
+            <a:off x="7836408" y="3273552"/>
+            <a:ext cx="3440887" cy="283464"/>
+          </a:xfrm>
+          <a:prstGeom prst="rect">
+            <a:avLst/>
+          </a:prstGeom>
+          <a:noFill/>
+          <a:ln/>
+        </p:spPr>
+        <p:txBody>
+          <a:bodyPr wrap="square" lIns="0" tIns="0" rIns="0" bIns="0" rtlCol="0" anchor="ctr"/>
+          <a:lstStyle/>
+          <a:p>
+            <a:pPr indent="0" marL="0">
+              <a:buNone/>
+            </a:pPr>
+            <a:r>
+              <a:rPr lang="en-US" sz="1050" dirty="0">
                 <a:solidFill>
                   <a:srgbClr val="5F706E"/>
                 </a:solidFill>
@@ -8293,9 +8301,9 @@
                 <a:ea typeface="Calibri" pitchFamily="34" charset="-122"/>
                 <a:cs typeface="Calibri" pitchFamily="34" charset="-120"/>
               </a:rPr>
-              <a:t>· cambia la cantidad de un CONSUMIBLE</a:t>
-            </a:r>
-            <a:endParaRPr lang="en-US" sz="1150" dirty="0"/>
+              <a:t>· cambia el asset padre o la composición</a:t>
+            </a:r>
+            <a:endParaRPr lang="en-US" sz="1050" dirty="0"/>
           </a:p>
         </p:txBody>
       </p:sp>
@@ -8307,8 +8315,8 @@
         </p:nvSpPr>
         <p:spPr>
           <a:xfrm>
-            <a:off x="5422392" y="4352544"/>
-            <a:ext cx="128016" cy="128016"/>
+            <a:off x="5422392" y="3639312"/>
+            <a:ext cx="118872" cy="118872"/>
           </a:xfrm>
           <a:prstGeom prst="ellipse">
             <a:avLst/>
@@ -8332,24 +8340,24 @@
         </p:nvSpPr>
         <p:spPr>
           <a:xfrm>
-            <a:off x="5678424" y="4233672"/>
-            <a:ext cx="2377440" cy="365760"/>
-          </a:xfrm>
-          <a:prstGeom prst="rect">
-            <a:avLst/>
-          </a:prstGeom>
-          <a:noFill/>
-          <a:ln/>
-        </p:spPr>
-        <p:txBody>
-          <a:bodyPr wrap="square" lIns="0" tIns="0" rIns="0" bIns="0" rtlCol="0" anchor="ctr"/>
-          <a:lstStyle/>
-          <a:p>
-            <a:pPr indent="0" marL="0">
-              <a:buNone/>
-            </a:pPr>
-            <a:r>
-              <a:rPr lang="en-US" sz="1150" b="1" dirty="0">
+            <a:off x="5660136" y="3557016"/>
+            <a:ext cx="2148840" cy="283464"/>
+          </a:xfrm>
+          <a:prstGeom prst="rect">
+            <a:avLst/>
+          </a:prstGeom>
+          <a:noFill/>
+          <a:ln/>
+        </p:spPr>
+        <p:txBody>
+          <a:bodyPr wrap="square" lIns="0" tIns="0" rIns="0" bIns="0" rtlCol="0" anchor="ctr"/>
+          <a:lstStyle/>
+          <a:p>
+            <a:pPr indent="0" marL="0">
+              <a:buNone/>
+            </a:pPr>
+            <a:r>
+              <a:rPr lang="en-US" sz="1050" b="1" dirty="0">
                 <a:solidFill>
                   <a:srgbClr val="12312F"/>
                 </a:solidFill>
@@ -8357,9 +8365,9 @@
                 <a:ea typeface="Courier New" pitchFamily="34" charset="-122"/>
                 <a:cs typeface="Courier New" pitchFamily="34" charset="-120"/>
               </a:rPr>
-              <a:t>AssetDeactivated</a:t>
-            </a:r>
-            <a:endParaRPr lang="en-US" sz="1150" dirty="0"/>
+              <a:t>AssetQuantityChanged</a:t>
+            </a:r>
+            <a:endParaRPr lang="en-US" sz="1050" dirty="0"/>
           </a:p>
         </p:txBody>
       </p:sp>
@@ -8371,24 +8379,24 @@
         </p:nvSpPr>
         <p:spPr>
           <a:xfrm>
-            <a:off x="8092440" y="4233672"/>
-            <a:ext cx="3184855" cy="365760"/>
-          </a:xfrm>
-          <a:prstGeom prst="rect">
-            <a:avLst/>
-          </a:prstGeom>
-          <a:noFill/>
-          <a:ln/>
-        </p:spPr>
-        <p:txBody>
-          <a:bodyPr wrap="square" lIns="0" tIns="0" rIns="0" bIns="0" rtlCol="0" anchor="ctr"/>
-          <a:lstStyle/>
-          <a:p>
-            <a:pPr indent="0" marL="0">
-              <a:buNone/>
-            </a:pPr>
-            <a:r>
-              <a:rPr lang="en-US" sz="1150" dirty="0">
+            <a:off x="7836408" y="3557016"/>
+            <a:ext cx="3440887" cy="283464"/>
+          </a:xfrm>
+          <a:prstGeom prst="rect">
+            <a:avLst/>
+          </a:prstGeom>
+          <a:noFill/>
+          <a:ln/>
+        </p:spPr>
+        <p:txBody>
+          <a:bodyPr wrap="square" lIns="0" tIns="0" rIns="0" bIns="0" rtlCol="0" anchor="ctr"/>
+          <a:lstStyle/>
+          <a:p>
+            <a:pPr indent="0" marL="0">
+              <a:buNone/>
+            </a:pPr>
+            <a:r>
+              <a:rPr lang="en-US" sz="1050" dirty="0">
                 <a:solidFill>
                   <a:srgbClr val="5F706E"/>
                 </a:solidFill>
@@ -8396,9 +8404,9 @@
                 <a:ea typeface="Calibri" pitchFamily="34" charset="-122"/>
                 <a:cs typeface="Calibri" pitchFamily="34" charset="-120"/>
               </a:rPr>
-              <a:t>· se da de baja un asset o se fusiona una existencia</a:t>
-            </a:r>
-            <a:endParaRPr lang="en-US" sz="1150" dirty="0"/>
+              <a:t>· cambia la cantidad de un CONSUMABLE</a:t>
+            </a:r>
+            <a:endParaRPr lang="en-US" sz="1050" dirty="0"/>
           </a:p>
         </p:txBody>
       </p:sp>
@@ -8410,8 +8418,8 @@
         </p:nvSpPr>
         <p:spPr>
           <a:xfrm>
-            <a:off x="5422392" y="4764024"/>
-            <a:ext cx="128016" cy="128016"/>
+            <a:off x="5422392" y="3922776"/>
+            <a:ext cx="118872" cy="118872"/>
           </a:xfrm>
           <a:prstGeom prst="ellipse">
             <a:avLst/>
@@ -8435,24 +8443,24 @@
         </p:nvSpPr>
         <p:spPr>
           <a:xfrm>
-            <a:off x="5678424" y="4645152"/>
-            <a:ext cx="2377440" cy="365760"/>
-          </a:xfrm>
-          <a:prstGeom prst="rect">
-            <a:avLst/>
-          </a:prstGeom>
-          <a:noFill/>
-          <a:ln/>
-        </p:spPr>
-        <p:txBody>
-          <a:bodyPr wrap="square" lIns="0" tIns="0" rIns="0" bIns="0" rtlCol="0" anchor="ctr"/>
-          <a:lstStyle/>
-          <a:p>
-            <a:pPr indent="0" marL="0">
-              <a:buNone/>
-            </a:pPr>
-            <a:r>
-              <a:rPr lang="en-US" sz="1150" b="1" dirty="0">
+            <a:off x="5660136" y="3840480"/>
+            <a:ext cx="2148840" cy="283464"/>
+          </a:xfrm>
+          <a:prstGeom prst="rect">
+            <a:avLst/>
+          </a:prstGeom>
+          <a:noFill/>
+          <a:ln/>
+        </p:spPr>
+        <p:txBody>
+          <a:bodyPr wrap="square" lIns="0" tIns="0" rIns="0" bIns="0" rtlCol="0" anchor="ctr"/>
+          <a:lstStyle/>
+          <a:p>
+            <a:pPr indent="0" marL="0">
+              <a:buNone/>
+            </a:pPr>
+            <a:r>
+              <a:rPr lang="en-US" sz="1050" b="1" dirty="0">
                 <a:solidFill>
                   <a:srgbClr val="12312F"/>
                 </a:solidFill>
@@ -8460,9 +8468,9 @@
                 <a:ea typeface="Courier New" pitchFamily="34" charset="-122"/>
                 <a:cs typeface="Courier New" pitchFamily="34" charset="-120"/>
               </a:rPr>
-              <a:t>LocationCreated</a:t>
-            </a:r>
-            <a:endParaRPr lang="en-US" sz="1150" dirty="0"/>
+              <a:t>AssetDeactivated</a:t>
+            </a:r>
+            <a:endParaRPr lang="en-US" sz="1050" dirty="0"/>
           </a:p>
         </p:txBody>
       </p:sp>
@@ -8474,24 +8482,24 @@
         </p:nvSpPr>
         <p:spPr>
           <a:xfrm>
-            <a:off x="8092440" y="4645152"/>
-            <a:ext cx="3184855" cy="365760"/>
-          </a:xfrm>
-          <a:prstGeom prst="rect">
-            <a:avLst/>
-          </a:prstGeom>
-          <a:noFill/>
-          <a:ln/>
-        </p:spPr>
-        <p:txBody>
-          <a:bodyPr wrap="square" lIns="0" tIns="0" rIns="0" bIns="0" rtlCol="0" anchor="ctr"/>
-          <a:lstStyle/>
-          <a:p>
-            <a:pPr indent="0" marL="0">
-              <a:buNone/>
-            </a:pPr>
-            <a:r>
-              <a:rPr lang="en-US" sz="1150" dirty="0">
+            <a:off x="7836408" y="3840480"/>
+            <a:ext cx="3440887" cy="283464"/>
+          </a:xfrm>
+          <a:prstGeom prst="rect">
+            <a:avLst/>
+          </a:prstGeom>
+          <a:noFill/>
+          <a:ln/>
+        </p:spPr>
+        <p:txBody>
+          <a:bodyPr wrap="square" lIns="0" tIns="0" rIns="0" bIns="0" rtlCol="0" anchor="ctr"/>
+          <a:lstStyle/>
+          <a:p>
+            <a:pPr indent="0" marL="0">
+              <a:buNone/>
+            </a:pPr>
+            <a:r>
+              <a:rPr lang="en-US" sz="1050" dirty="0">
                 <a:solidFill>
                   <a:srgbClr val="5F706E"/>
                 </a:solidFill>
@@ -8499,9 +8507,9 @@
                 <a:ea typeface="Calibri" pitchFamily="34" charset="-122"/>
                 <a:cs typeface="Calibri" pitchFamily="34" charset="-120"/>
               </a:rPr>
-              <a:t>· se crea una ubicación</a:t>
-            </a:r>
-            <a:endParaRPr lang="en-US" sz="1150" dirty="0"/>
+              <a:t>· se da de baja un asset o se fusiona</a:t>
+            </a:r>
+            <a:endParaRPr lang="en-US" sz="1050" dirty="0"/>
           </a:p>
         </p:txBody>
       </p:sp>
@@ -8513,8 +8521,8 @@
         </p:nvSpPr>
         <p:spPr>
           <a:xfrm>
-            <a:off x="5422392" y="5175504"/>
-            <a:ext cx="128016" cy="128016"/>
+            <a:off x="5422392" y="4206240"/>
+            <a:ext cx="118872" cy="118872"/>
           </a:xfrm>
           <a:prstGeom prst="ellipse">
             <a:avLst/>
@@ -8538,24 +8546,24 @@
         </p:nvSpPr>
         <p:spPr>
           <a:xfrm>
-            <a:off x="5678424" y="5056632"/>
-            <a:ext cx="2377440" cy="365760"/>
-          </a:xfrm>
-          <a:prstGeom prst="rect">
-            <a:avLst/>
-          </a:prstGeom>
-          <a:noFill/>
-          <a:ln/>
-        </p:spPr>
-        <p:txBody>
-          <a:bodyPr wrap="square" lIns="0" tIns="0" rIns="0" bIns="0" rtlCol="0" anchor="ctr"/>
-          <a:lstStyle/>
-          <a:p>
-            <a:pPr indent="0" marL="0">
-              <a:buNone/>
-            </a:pPr>
-            <a:r>
-              <a:rPr lang="en-US" sz="1150" b="1" dirty="0">
+            <a:off x="5660136" y="4123944"/>
+            <a:ext cx="2148840" cy="283464"/>
+          </a:xfrm>
+          <a:prstGeom prst="rect">
+            <a:avLst/>
+          </a:prstGeom>
+          <a:noFill/>
+          <a:ln/>
+        </p:spPr>
+        <p:txBody>
+          <a:bodyPr wrap="square" lIns="0" tIns="0" rIns="0" bIns="0" rtlCol="0" anchor="ctr"/>
+          <a:lstStyle/>
+          <a:p>
+            <a:pPr indent="0" marL="0">
+              <a:buNone/>
+            </a:pPr>
+            <a:r>
+              <a:rPr lang="en-US" sz="1050" b="1" dirty="0">
                 <a:solidFill>
                   <a:srgbClr val="12312F"/>
                 </a:solidFill>
@@ -8563,9 +8571,9 @@
                 <a:ea typeface="Courier New" pitchFamily="34" charset="-122"/>
                 <a:cs typeface="Courier New" pitchFamily="34" charset="-120"/>
               </a:rPr>
-              <a:t>LoanStarted</a:t>
-            </a:r>
-            <a:endParaRPr lang="en-US" sz="1150" dirty="0"/>
+              <a:t>LocationCreated</a:t>
+            </a:r>
+            <a:endParaRPr lang="en-US" sz="1050" dirty="0"/>
           </a:p>
         </p:txBody>
       </p:sp>
@@ -8577,24 +8585,24 @@
         </p:nvSpPr>
         <p:spPr>
           <a:xfrm>
-            <a:off x="8092440" y="5056632"/>
-            <a:ext cx="3184855" cy="365760"/>
-          </a:xfrm>
-          <a:prstGeom prst="rect">
-            <a:avLst/>
-          </a:prstGeom>
-          <a:noFill/>
-          <a:ln/>
-        </p:spPr>
-        <p:txBody>
-          <a:bodyPr wrap="square" lIns="0" tIns="0" rIns="0" bIns="0" rtlCol="0" anchor="ctr"/>
-          <a:lstStyle/>
-          <a:p>
-            <a:pPr indent="0" marL="0">
-              <a:buNone/>
-            </a:pPr>
-            <a:r>
-              <a:rPr lang="en-US" sz="1150" dirty="0">
+            <a:off x="7836408" y="4123944"/>
+            <a:ext cx="3440887" cy="283464"/>
+          </a:xfrm>
+          <a:prstGeom prst="rect">
+            <a:avLst/>
+          </a:prstGeom>
+          <a:noFill/>
+          <a:ln/>
+        </p:spPr>
+        <p:txBody>
+          <a:bodyPr wrap="square" lIns="0" tIns="0" rIns="0" bIns="0" rtlCol="0" anchor="ctr"/>
+          <a:lstStyle/>
+          <a:p>
+            <a:pPr indent="0" marL="0">
+              <a:buNone/>
+            </a:pPr>
+            <a:r>
+              <a:rPr lang="en-US" sz="1050" dirty="0">
                 <a:solidFill>
                   <a:srgbClr val="5F706E"/>
                 </a:solidFill>
@@ -8602,9 +8610,9 @@
                 <a:ea typeface="Calibri" pitchFamily="34" charset="-122"/>
                 <a:cs typeface="Calibri" pitchFamily="34" charset="-120"/>
               </a:rPr>
-              <a:t>· se inicia un préstamo</a:t>
-            </a:r>
-            <a:endParaRPr lang="en-US" sz="1150" dirty="0"/>
+              <a:t>· se crea una ubicación</a:t>
+            </a:r>
+            <a:endParaRPr lang="en-US" sz="1050" dirty="0"/>
           </a:p>
         </p:txBody>
       </p:sp>
@@ -8616,8 +8624,8 @@
         </p:nvSpPr>
         <p:spPr>
           <a:xfrm>
-            <a:off x="5422392" y="5586984"/>
-            <a:ext cx="128016" cy="128016"/>
+            <a:off x="5422392" y="4489704"/>
+            <a:ext cx="118872" cy="118872"/>
           </a:xfrm>
           <a:prstGeom prst="ellipse">
             <a:avLst/>
@@ -8641,24 +8649,24 @@
         </p:nvSpPr>
         <p:spPr>
           <a:xfrm>
-            <a:off x="5678424" y="5468112"/>
-            <a:ext cx="2377440" cy="365760"/>
-          </a:xfrm>
-          <a:prstGeom prst="rect">
-            <a:avLst/>
-          </a:prstGeom>
-          <a:noFill/>
-          <a:ln/>
-        </p:spPr>
-        <p:txBody>
-          <a:bodyPr wrap="square" lIns="0" tIns="0" rIns="0" bIns="0" rtlCol="0" anchor="ctr"/>
-          <a:lstStyle/>
-          <a:p>
-            <a:pPr indent="0" marL="0">
-              <a:buNone/>
-            </a:pPr>
-            <a:r>
-              <a:rPr lang="en-US" sz="1150" b="1" dirty="0">
+            <a:off x="5660136" y="4407408"/>
+            <a:ext cx="2148840" cy="283464"/>
+          </a:xfrm>
+          <a:prstGeom prst="rect">
+            <a:avLst/>
+          </a:prstGeom>
+          <a:noFill/>
+          <a:ln/>
+        </p:spPr>
+        <p:txBody>
+          <a:bodyPr wrap="square" lIns="0" tIns="0" rIns="0" bIns="0" rtlCol="0" anchor="ctr"/>
+          <a:lstStyle/>
+          <a:p>
+            <a:pPr indent="0" marL="0">
+              <a:buNone/>
+            </a:pPr>
+            <a:r>
+              <a:rPr lang="en-US" sz="1050" b="1" dirty="0">
                 <a:solidFill>
                   <a:srgbClr val="12312F"/>
                 </a:solidFill>
@@ -8666,38 +8674,450 @@
                 <a:ea typeface="Courier New" pitchFamily="34" charset="-122"/>
                 <a:cs typeface="Courier New" pitchFamily="34" charset="-120"/>
               </a:rPr>
+              <a:t>DocumentAttached</a:t>
+            </a:r>
+            <a:endParaRPr lang="en-US" sz="1050" dirty="0"/>
+          </a:p>
+        </p:txBody>
+      </p:sp>
+      <p:sp>
+        <p:nvSpPr>
+          <p:cNvPr id="37" name="Text 35"/>
+          <p:cNvSpPr/>
+          <p:nvPr/>
+        </p:nvSpPr>
+        <p:spPr>
+          <a:xfrm>
+            <a:off x="7836408" y="4407408"/>
+            <a:ext cx="3440887" cy="283464"/>
+          </a:xfrm>
+          <a:prstGeom prst="rect">
+            <a:avLst/>
+          </a:prstGeom>
+          <a:noFill/>
+          <a:ln/>
+        </p:spPr>
+        <p:txBody>
+          <a:bodyPr wrap="square" lIns="0" tIns="0" rIns="0" bIns="0" rtlCol="0" anchor="ctr"/>
+          <a:lstStyle/>
+          <a:p>
+            <a:pPr indent="0" marL="0">
+              <a:buNone/>
+            </a:pPr>
+            <a:r>
+              <a:rPr lang="en-US" sz="1050" dirty="0">
+                <a:solidFill>
+                  <a:srgbClr val="5F706E"/>
+                </a:solidFill>
+                <a:latin typeface="Calibri" pitchFamily="34" charset="0"/>
+                <a:ea typeface="Calibri" pitchFamily="34" charset="-122"/>
+                <a:cs typeface="Calibri" pitchFamily="34" charset="-120"/>
+              </a:rPr>
+              <a:t>· se adjunta un documento a un asset o artículo</a:t>
+            </a:r>
+            <a:endParaRPr lang="en-US" sz="1050" dirty="0"/>
+          </a:p>
+        </p:txBody>
+      </p:sp>
+      <p:sp>
+        <p:nvSpPr>
+          <p:cNvPr id="38" name="Shape 36"/>
+          <p:cNvSpPr/>
+          <p:nvPr/>
+        </p:nvSpPr>
+        <p:spPr>
+          <a:xfrm>
+            <a:off x="5422392" y="4773168"/>
+            <a:ext cx="118872" cy="118872"/>
+          </a:xfrm>
+          <a:prstGeom prst="ellipse">
+            <a:avLst/>
+          </a:prstGeom>
+          <a:solidFill>
+            <a:srgbClr val="2E7B72"/>
+          </a:solidFill>
+          <a:ln w="6350">
+            <a:solidFill>
+              <a:srgbClr val="2E7B72"/>
+            </a:solidFill>
+            <a:prstDash val="solid"/>
+          </a:ln>
+        </p:spPr>
+      </p:sp>
+      <p:sp>
+        <p:nvSpPr>
+          <p:cNvPr id="39" name="Text 37"/>
+          <p:cNvSpPr/>
+          <p:nvPr/>
+        </p:nvSpPr>
+        <p:spPr>
+          <a:xfrm>
+            <a:off x="5660136" y="4690872"/>
+            <a:ext cx="2148840" cy="283464"/>
+          </a:xfrm>
+          <a:prstGeom prst="rect">
+            <a:avLst/>
+          </a:prstGeom>
+          <a:noFill/>
+          <a:ln/>
+        </p:spPr>
+        <p:txBody>
+          <a:bodyPr wrap="square" lIns="0" tIns="0" rIns="0" bIns="0" rtlCol="0" anchor="ctr"/>
+          <a:lstStyle/>
+          <a:p>
+            <a:pPr indent="0" marL="0">
+              <a:buNone/>
+            </a:pPr>
+            <a:r>
+              <a:rPr lang="en-US" sz="1050" b="1" dirty="0">
+                <a:solidFill>
+                  <a:srgbClr val="12312F"/>
+                </a:solidFill>
+                <a:latin typeface="Courier New" pitchFamily="34" charset="0"/>
+                <a:ea typeface="Courier New" pitchFamily="34" charset="-122"/>
+                <a:cs typeface="Courier New" pitchFamily="34" charset="-120"/>
+              </a:rPr>
+              <a:t>UserDeactivated</a:t>
+            </a:r>
+            <a:endParaRPr lang="en-US" sz="1050" dirty="0"/>
+          </a:p>
+        </p:txBody>
+      </p:sp>
+      <p:sp>
+        <p:nvSpPr>
+          <p:cNvPr id="40" name="Text 38"/>
+          <p:cNvSpPr/>
+          <p:nvPr/>
+        </p:nvSpPr>
+        <p:spPr>
+          <a:xfrm>
+            <a:off x="7836408" y="4690872"/>
+            <a:ext cx="3440887" cy="283464"/>
+          </a:xfrm>
+          <a:prstGeom prst="rect">
+            <a:avLst/>
+          </a:prstGeom>
+          <a:noFill/>
+          <a:ln/>
+        </p:spPr>
+        <p:txBody>
+          <a:bodyPr wrap="square" lIns="0" tIns="0" rIns="0" bIns="0" rtlCol="0" anchor="ctr"/>
+          <a:lstStyle/>
+          <a:p>
+            <a:pPr indent="0" marL="0">
+              <a:buNone/>
+            </a:pPr>
+            <a:r>
+              <a:rPr lang="en-US" sz="1050" dirty="0">
+                <a:solidFill>
+                  <a:srgbClr val="5F706E"/>
+                </a:solidFill>
+                <a:latin typeface="Calibri" pitchFamily="34" charset="0"/>
+                <a:ea typeface="Calibri" pitchFamily="34" charset="-122"/>
+                <a:cs typeface="Calibri" pitchFamily="34" charset="-120"/>
+              </a:rPr>
+              <a:t>· alguien deja el hogar, no su cuenta</a:t>
+            </a:r>
+            <a:endParaRPr lang="en-US" sz="1050" dirty="0"/>
+          </a:p>
+        </p:txBody>
+      </p:sp>
+      <p:sp>
+        <p:nvSpPr>
+          <p:cNvPr id="41" name="Shape 39"/>
+          <p:cNvSpPr/>
+          <p:nvPr/>
+        </p:nvSpPr>
+        <p:spPr>
+          <a:xfrm>
+            <a:off x="5422392" y="5056632"/>
+            <a:ext cx="118872" cy="118872"/>
+          </a:xfrm>
+          <a:prstGeom prst="ellipse">
+            <a:avLst/>
+          </a:prstGeom>
+          <a:solidFill>
+            <a:srgbClr val="2E7B72"/>
+          </a:solidFill>
+          <a:ln w="6350">
+            <a:solidFill>
+              <a:srgbClr val="2E7B72"/>
+            </a:solidFill>
+            <a:prstDash val="solid"/>
+          </a:ln>
+        </p:spPr>
+      </p:sp>
+      <p:sp>
+        <p:nvSpPr>
+          <p:cNvPr id="42" name="Text 40"/>
+          <p:cNvSpPr/>
+          <p:nvPr/>
+        </p:nvSpPr>
+        <p:spPr>
+          <a:xfrm>
+            <a:off x="5660136" y="4974336"/>
+            <a:ext cx="2148840" cy="283464"/>
+          </a:xfrm>
+          <a:prstGeom prst="rect">
+            <a:avLst/>
+          </a:prstGeom>
+          <a:noFill/>
+          <a:ln/>
+        </p:spPr>
+        <p:txBody>
+          <a:bodyPr wrap="square" lIns="0" tIns="0" rIns="0" bIns="0" rtlCol="0" anchor="ctr"/>
+          <a:lstStyle/>
+          <a:p>
+            <a:pPr indent="0" marL="0">
+              <a:buNone/>
+            </a:pPr>
+            <a:r>
+              <a:rPr lang="en-US" sz="1050" b="1" dirty="0">
+                <a:solidFill>
+                  <a:srgbClr val="12312F"/>
+                </a:solidFill>
+                <a:latin typeface="Courier New" pitchFamily="34" charset="0"/>
+                <a:ea typeface="Courier New" pitchFamily="34" charset="-122"/>
+                <a:cs typeface="Courier New" pitchFamily="34" charset="-120"/>
+              </a:rPr>
+              <a:t>LoanStarted</a:t>
+            </a:r>
+            <a:endParaRPr lang="en-US" sz="1050" dirty="0"/>
+          </a:p>
+        </p:txBody>
+      </p:sp>
+      <p:sp>
+        <p:nvSpPr>
+          <p:cNvPr id="43" name="Text 41"/>
+          <p:cNvSpPr/>
+          <p:nvPr/>
+        </p:nvSpPr>
+        <p:spPr>
+          <a:xfrm>
+            <a:off x="7836408" y="4974336"/>
+            <a:ext cx="3440887" cy="283464"/>
+          </a:xfrm>
+          <a:prstGeom prst="rect">
+            <a:avLst/>
+          </a:prstGeom>
+          <a:noFill/>
+          <a:ln/>
+        </p:spPr>
+        <p:txBody>
+          <a:bodyPr wrap="square" lIns="0" tIns="0" rIns="0" bIns="0" rtlCol="0" anchor="ctr"/>
+          <a:lstStyle/>
+          <a:p>
+            <a:pPr indent="0" marL="0">
+              <a:buNone/>
+            </a:pPr>
+            <a:r>
+              <a:rPr lang="en-US" sz="1050" dirty="0">
+                <a:solidFill>
+                  <a:srgbClr val="5F706E"/>
+                </a:solidFill>
+                <a:latin typeface="Calibri" pitchFamily="34" charset="0"/>
+                <a:ea typeface="Calibri" pitchFamily="34" charset="-122"/>
+                <a:cs typeface="Calibri" pitchFamily="34" charset="-120"/>
+              </a:rPr>
+              <a:t>· se inicia un préstamo</a:t>
+            </a:r>
+            <a:endParaRPr lang="en-US" sz="1050" dirty="0"/>
+          </a:p>
+        </p:txBody>
+      </p:sp>
+      <p:sp>
+        <p:nvSpPr>
+          <p:cNvPr id="44" name="Shape 42"/>
+          <p:cNvSpPr/>
+          <p:nvPr/>
+        </p:nvSpPr>
+        <p:spPr>
+          <a:xfrm>
+            <a:off x="5422392" y="5340096"/>
+            <a:ext cx="118872" cy="118872"/>
+          </a:xfrm>
+          <a:prstGeom prst="ellipse">
+            <a:avLst/>
+          </a:prstGeom>
+          <a:solidFill>
+            <a:srgbClr val="2E7B72"/>
+          </a:solidFill>
+          <a:ln w="6350">
+            <a:solidFill>
+              <a:srgbClr val="2E7B72"/>
+            </a:solidFill>
+            <a:prstDash val="solid"/>
+          </a:ln>
+        </p:spPr>
+      </p:sp>
+      <p:sp>
+        <p:nvSpPr>
+          <p:cNvPr id="45" name="Text 43"/>
+          <p:cNvSpPr/>
+          <p:nvPr/>
+        </p:nvSpPr>
+        <p:spPr>
+          <a:xfrm>
+            <a:off x="5660136" y="5257800"/>
+            <a:ext cx="2148840" cy="283464"/>
+          </a:xfrm>
+          <a:prstGeom prst="rect">
+            <a:avLst/>
+          </a:prstGeom>
+          <a:noFill/>
+          <a:ln/>
+        </p:spPr>
+        <p:txBody>
+          <a:bodyPr wrap="square" lIns="0" tIns="0" rIns="0" bIns="0" rtlCol="0" anchor="ctr"/>
+          <a:lstStyle/>
+          <a:p>
+            <a:pPr indent="0" marL="0">
+              <a:buNone/>
+            </a:pPr>
+            <a:r>
+              <a:rPr lang="en-US" sz="1050" b="1" dirty="0">
+                <a:solidFill>
+                  <a:srgbClr val="12312F"/>
+                </a:solidFill>
+                <a:latin typeface="Courier New" pitchFamily="34" charset="0"/>
+                <a:ea typeface="Courier New" pitchFamily="34" charset="-122"/>
+                <a:cs typeface="Courier New" pitchFamily="34" charset="-120"/>
+              </a:rPr>
+              <a:t>LoanOverdue</a:t>
+            </a:r>
+            <a:endParaRPr lang="en-US" sz="1050" dirty="0"/>
+          </a:p>
+        </p:txBody>
+      </p:sp>
+      <p:sp>
+        <p:nvSpPr>
+          <p:cNvPr id="46" name="Text 44"/>
+          <p:cNvSpPr/>
+          <p:nvPr/>
+        </p:nvSpPr>
+        <p:spPr>
+          <a:xfrm>
+            <a:off x="7836408" y="5257800"/>
+            <a:ext cx="3440887" cy="283464"/>
+          </a:xfrm>
+          <a:prstGeom prst="rect">
+            <a:avLst/>
+          </a:prstGeom>
+          <a:noFill/>
+          <a:ln/>
+        </p:spPr>
+        <p:txBody>
+          <a:bodyPr wrap="square" lIns="0" tIns="0" rIns="0" bIns="0" rtlCol="0" anchor="ctr"/>
+          <a:lstStyle/>
+          <a:p>
+            <a:pPr indent="0" marL="0">
+              <a:buNone/>
+            </a:pPr>
+            <a:r>
+              <a:rPr lang="en-US" sz="1050" dirty="0">
+                <a:solidFill>
+                  <a:srgbClr val="5F706E"/>
+                </a:solidFill>
+                <a:latin typeface="Calibri" pitchFamily="34" charset="0"/>
+                <a:ea typeface="Calibri" pitchFamily="34" charset="-122"/>
+                <a:cs typeface="Calibri" pitchFamily="34" charset="-120"/>
+              </a:rPr>
+              <a:t>· el proceso diario ve la fecha superada</a:t>
+            </a:r>
+            <a:endParaRPr lang="en-US" sz="1050" dirty="0"/>
+          </a:p>
+        </p:txBody>
+      </p:sp>
+      <p:sp>
+        <p:nvSpPr>
+          <p:cNvPr id="47" name="Shape 45"/>
+          <p:cNvSpPr/>
+          <p:nvPr/>
+        </p:nvSpPr>
+        <p:spPr>
+          <a:xfrm>
+            <a:off x="5422392" y="5623560"/>
+            <a:ext cx="118872" cy="118872"/>
+          </a:xfrm>
+          <a:prstGeom prst="ellipse">
+            <a:avLst/>
+          </a:prstGeom>
+          <a:solidFill>
+            <a:srgbClr val="2E7B72"/>
+          </a:solidFill>
+          <a:ln w="6350">
+            <a:solidFill>
+              <a:srgbClr val="2E7B72"/>
+            </a:solidFill>
+            <a:prstDash val="solid"/>
+          </a:ln>
+        </p:spPr>
+      </p:sp>
+      <p:sp>
+        <p:nvSpPr>
+          <p:cNvPr id="48" name="Text 46"/>
+          <p:cNvSpPr/>
+          <p:nvPr/>
+        </p:nvSpPr>
+        <p:spPr>
+          <a:xfrm>
+            <a:off x="5660136" y="5541264"/>
+            <a:ext cx="2148840" cy="283464"/>
+          </a:xfrm>
+          <a:prstGeom prst="rect">
+            <a:avLst/>
+          </a:prstGeom>
+          <a:noFill/>
+          <a:ln/>
+        </p:spPr>
+        <p:txBody>
+          <a:bodyPr wrap="square" lIns="0" tIns="0" rIns="0" bIns="0" rtlCol="0" anchor="ctr"/>
+          <a:lstStyle/>
+          <a:p>
+            <a:pPr indent="0" marL="0">
+              <a:buNone/>
+            </a:pPr>
+            <a:r>
+              <a:rPr lang="en-US" sz="1050" b="1" dirty="0">
+                <a:solidFill>
+                  <a:srgbClr val="12312F"/>
+                </a:solidFill>
+                <a:latin typeface="Courier New" pitchFamily="34" charset="0"/>
+                <a:ea typeface="Courier New" pitchFamily="34" charset="-122"/>
+                <a:cs typeface="Courier New" pitchFamily="34" charset="-120"/>
+              </a:rPr>
               <a:t>LoanReturned</a:t>
             </a:r>
-            <a:endParaRPr lang="en-US" sz="1150" dirty="0"/>
-          </a:p>
-        </p:txBody>
-      </p:sp>
-      <p:sp>
-        <p:nvSpPr>
-          <p:cNvPr id="37" name="Text 35"/>
-          <p:cNvSpPr/>
-          <p:nvPr/>
-        </p:nvSpPr>
-        <p:spPr>
-          <a:xfrm>
-            <a:off x="8092440" y="5468112"/>
-            <a:ext cx="3184855" cy="365760"/>
-          </a:xfrm>
-          <a:prstGeom prst="rect">
-            <a:avLst/>
-          </a:prstGeom>
-          <a:noFill/>
-          <a:ln/>
-        </p:spPr>
-        <p:txBody>
-          <a:bodyPr wrap="square" lIns="0" tIns="0" rIns="0" bIns="0" rtlCol="0" anchor="ctr"/>
-          <a:lstStyle/>
-          <a:p>
-            <a:pPr indent="0" marL="0">
-              <a:buNone/>
-            </a:pPr>
-            <a:r>
-              <a:rPr lang="en-US" sz="1150" dirty="0">
+            <a:endParaRPr lang="en-US" sz="1050" dirty="0"/>
+          </a:p>
+        </p:txBody>
+      </p:sp>
+      <p:sp>
+        <p:nvSpPr>
+          <p:cNvPr id="49" name="Text 47"/>
+          <p:cNvSpPr/>
+          <p:nvPr/>
+        </p:nvSpPr>
+        <p:spPr>
+          <a:xfrm>
+            <a:off x="7836408" y="5541264"/>
+            <a:ext cx="3440887" cy="283464"/>
+          </a:xfrm>
+          <a:prstGeom prst="rect">
+            <a:avLst/>
+          </a:prstGeom>
+          <a:noFill/>
+          <a:ln/>
+        </p:spPr>
+        <p:txBody>
+          <a:bodyPr wrap="square" lIns="0" tIns="0" rIns="0" bIns="0" rtlCol="0" anchor="ctr"/>
+          <a:lstStyle/>
+          <a:p>
+            <a:pPr indent="0" marL="0">
+              <a:buNone/>
+            </a:pPr>
+            <a:r>
+              <a:rPr lang="en-US" sz="1050" dirty="0">
                 <a:solidFill>
                   <a:srgbClr val="5F706E"/>
                 </a:solidFill>
@@ -8707,13 +9127,13 @@
               </a:rPr>
               <a:t>· se confirma la devolución</a:t>
             </a:r>
-            <a:endParaRPr lang="en-US" sz="1150" dirty="0"/>
-          </a:p>
-        </p:txBody>
-      </p:sp>
-      <p:sp>
-        <p:nvSpPr>
-          <p:cNvPr id="38" name="Text 36"/>
+            <a:endParaRPr lang="en-US" sz="1050" dirty="0"/>
+          </a:p>
+        </p:txBody>
+      </p:sp>
+      <p:sp>
+        <p:nvSpPr>
+          <p:cNvPr id="50" name="Text 48"/>
           <p:cNvSpPr/>
           <p:nvPr/>
         </p:nvSpPr>
@@ -8752,7 +9172,7 @@
       </p:sp>
       <p:sp>
         <p:nvSpPr>
-          <p:cNvPr id="39" name="Text 37"/>
+          <p:cNvPr id="51" name="Text 49"/>
           <p:cNvSpPr/>
           <p:nvPr/>
         </p:nvSpPr>
@@ -9867,7 +10287,7 @@
                 <a:ea typeface="Cambria" pitchFamily="34" charset="-122"/>
                 <a:cs typeface="Cambria" pitchFamily="34" charset="-120"/>
               </a:rPr>
-              <a:t>Comandos · 14</a:t>
+              <a:t>Comandos · 30</a:t>
             </a:r>
             <a:endParaRPr lang="en-US" sz="1800" dirty="0"/>
           </a:p>
@@ -9920,18 +10340,768 @@
         </p:nvSpPr>
         <p:spPr>
           <a:xfrm>
-            <a:off x="896112" y="2505456"/>
-            <a:ext cx="118872" cy="118872"/>
-          </a:xfrm>
-          <a:prstGeom prst="ellipse">
-            <a:avLst/>
+            <a:off x="896112" y="2331720"/>
+            <a:ext cx="3090672" cy="1371600"/>
+          </a:xfrm>
+          <a:prstGeom prst="roundRect">
+            <a:avLst>
+              <a:gd name="adj" fmla="val 6000"/>
+            </a:avLst>
           </a:prstGeom>
           <a:solidFill>
-            <a:srgbClr val="2E7B72"/>
+            <a:srgbClr val="FFFFFF"/>
+          </a:solidFill>
+          <a:ln w="12700">
+            <a:solidFill>
+              <a:srgbClr val="D3DFDC"/>
+            </a:solidFill>
+            <a:prstDash val="solid"/>
+          </a:ln>
+        </p:spPr>
+      </p:sp>
+      <p:sp>
+        <p:nvSpPr>
+          <p:cNvPr id="8" name="Text 6"/>
+          <p:cNvSpPr/>
+          <p:nvPr/>
+        </p:nvSpPr>
+        <p:spPr>
+          <a:xfrm>
+            <a:off x="1097280" y="2478024"/>
+            <a:ext cx="2267712" cy="219456"/>
+          </a:xfrm>
+          <a:prstGeom prst="rect">
+            <a:avLst/>
+          </a:prstGeom>
+          <a:noFill/>
+          <a:ln/>
+        </p:spPr>
+        <p:txBody>
+          <a:bodyPr wrap="square" lIns="0" tIns="0" rIns="0" bIns="0" rtlCol="0" anchor="ctr"/>
+          <a:lstStyle/>
+          <a:p>
+            <a:pPr indent="0" marL="0">
+              <a:buNone/>
+            </a:pPr>
+            <a:r>
+              <a:rPr lang="en-US" sz="900" b="1" spc="100" kern="0" dirty="0">
+                <a:solidFill>
+                  <a:srgbClr val="2E7B72"/>
+                </a:solidFill>
+                <a:latin typeface="Calibri" pitchFamily="34" charset="0"/>
+                <a:ea typeface="Calibri" pitchFamily="34" charset="-122"/>
+                <a:cs typeface="Calibri" pitchFamily="34" charset="-120"/>
+              </a:rPr>
+              <a:t>CATÁLOGO Y ASSETS</a:t>
+            </a:r>
+            <a:endParaRPr lang="en-US" sz="900" dirty="0"/>
+          </a:p>
+        </p:txBody>
+      </p:sp>
+      <p:sp>
+        <p:nvSpPr>
+          <p:cNvPr id="9" name="Text 7"/>
+          <p:cNvSpPr/>
+          <p:nvPr/>
+        </p:nvSpPr>
+        <p:spPr>
+          <a:xfrm>
+            <a:off x="3328416" y="2441448"/>
+            <a:ext cx="502920" cy="292608"/>
+          </a:xfrm>
+          <a:prstGeom prst="rect">
+            <a:avLst/>
+          </a:prstGeom>
+          <a:noFill/>
+          <a:ln/>
+        </p:spPr>
+        <p:txBody>
+          <a:bodyPr wrap="square" lIns="0" tIns="0" rIns="0" bIns="0" rtlCol="0" anchor="ctr"/>
+          <a:lstStyle/>
+          <a:p>
+            <a:pPr algn="r" indent="0" marL="0">
+              <a:buNone/>
+            </a:pPr>
+            <a:r>
+              <a:rPr lang="en-US" sz="1800" b="1" dirty="0">
+                <a:solidFill>
+                  <a:srgbClr val="12312F"/>
+                </a:solidFill>
+                <a:latin typeface="Cambria" pitchFamily="34" charset="0"/>
+                <a:ea typeface="Cambria" pitchFamily="34" charset="-122"/>
+                <a:cs typeface="Cambria" pitchFamily="34" charset="-120"/>
+              </a:rPr>
+              <a:t>11</a:t>
+            </a:r>
+            <a:endParaRPr lang="en-US" sz="1800" dirty="0"/>
+          </a:p>
+        </p:txBody>
+      </p:sp>
+      <p:sp>
+        <p:nvSpPr>
+          <p:cNvPr id="10" name="Text 8"/>
+          <p:cNvSpPr/>
+          <p:nvPr/>
+        </p:nvSpPr>
+        <p:spPr>
+          <a:xfrm>
+            <a:off x="1097280" y="2770632"/>
+            <a:ext cx="2688336" cy="822960"/>
+          </a:xfrm>
+          <a:prstGeom prst="rect">
+            <a:avLst/>
+          </a:prstGeom>
+          <a:noFill/>
+          <a:ln/>
+        </p:spPr>
+        <p:txBody>
+          <a:bodyPr wrap="square" lIns="0" tIns="0" rIns="0" bIns="0" rtlCol="0" anchor="t"/>
+          <a:lstStyle/>
+          <a:p>
+            <a:pPr indent="0" marL="0">
+              <a:lnSpc>
+                <a:spcPts val="1400"/>
+              </a:lnSpc>
+              <a:buNone/>
+            </a:pPr>
+            <a:r>
+              <a:rPr lang="en-US" sz="900" dirty="0">
+                <a:solidFill>
+                  <a:srgbClr val="5F706E"/>
+                </a:solidFill>
+                <a:latin typeface="Courier New" pitchFamily="34" charset="0"/>
+                <a:ea typeface="Courier New" pitchFamily="34" charset="-122"/>
+                <a:cs typeface="Courier New" pitchFamily="34" charset="-120"/>
+              </a:rPr>
+              <a:t>CreateArticle</a:t>
+            </a:r>
+            <a:endParaRPr lang="en-US" sz="900" dirty="0"/>
+          </a:p>
+          <a:p>
+            <a:pPr indent="0" marL="0">
+              <a:lnSpc>
+                <a:spcPts val="1400"/>
+              </a:lnSpc>
+              <a:buNone/>
+            </a:pPr>
+            <a:r>
+              <a:rPr lang="en-US" sz="900" dirty="0">
+                <a:solidFill>
+                  <a:srgbClr val="5F706E"/>
+                </a:solidFill>
+                <a:latin typeface="Courier New" pitchFamily="34" charset="0"/>
+                <a:ea typeface="Courier New" pitchFamily="34" charset="-122"/>
+                <a:cs typeface="Courier New" pitchFamily="34" charset="-120"/>
+              </a:rPr>
+              <a:t>RegisterConsumableIntake</a:t>
+            </a:r>
+            <a:endParaRPr lang="en-US" sz="900" dirty="0"/>
+          </a:p>
+          <a:p>
+            <a:pPr indent="0" marL="0">
+              <a:lnSpc>
+                <a:spcPts val="1400"/>
+              </a:lnSpc>
+              <a:buNone/>
+            </a:pPr>
+            <a:r>
+              <a:rPr lang="en-US" sz="900" dirty="0">
+                <a:solidFill>
+                  <a:srgbClr val="5F706E"/>
+                </a:solidFill>
+                <a:latin typeface="Courier New" pitchFamily="34" charset="0"/>
+                <a:ea typeface="Courier New" pitchFamily="34" charset="-122"/>
+                <a:cs typeface="Courier New" pitchFamily="34" charset="-120"/>
+              </a:rPr>
+              <a:t>MergeStockItems</a:t>
+            </a:r>
+            <a:endParaRPr lang="en-US" sz="900" dirty="0"/>
+          </a:p>
+        </p:txBody>
+      </p:sp>
+      <p:sp>
+        <p:nvSpPr>
+          <p:cNvPr id="11" name="Shape 9"/>
+          <p:cNvSpPr/>
+          <p:nvPr/>
+        </p:nvSpPr>
+        <p:spPr>
+          <a:xfrm>
+            <a:off x="4206240" y="2331720"/>
+            <a:ext cx="3090672" cy="1371600"/>
+          </a:xfrm>
+          <a:prstGeom prst="roundRect">
+            <a:avLst>
+              <a:gd name="adj" fmla="val 6000"/>
+            </a:avLst>
+          </a:prstGeom>
+          <a:solidFill>
+            <a:srgbClr val="FFFFFF"/>
+          </a:solidFill>
+          <a:ln w="12700">
+            <a:solidFill>
+              <a:srgbClr val="D3DFDC"/>
+            </a:solidFill>
+            <a:prstDash val="solid"/>
+          </a:ln>
+        </p:spPr>
+      </p:sp>
+      <p:sp>
+        <p:nvSpPr>
+          <p:cNvPr id="12" name="Text 10"/>
+          <p:cNvSpPr/>
+          <p:nvPr/>
+        </p:nvSpPr>
+        <p:spPr>
+          <a:xfrm>
+            <a:off x="4407408" y="2478024"/>
+            <a:ext cx="2267712" cy="219456"/>
+          </a:xfrm>
+          <a:prstGeom prst="rect">
+            <a:avLst/>
+          </a:prstGeom>
+          <a:noFill/>
+          <a:ln/>
+        </p:spPr>
+        <p:txBody>
+          <a:bodyPr wrap="square" lIns="0" tIns="0" rIns="0" bIns="0" rtlCol="0" anchor="ctr"/>
+          <a:lstStyle/>
+          <a:p>
+            <a:pPr indent="0" marL="0">
+              <a:buNone/>
+            </a:pPr>
+            <a:r>
+              <a:rPr lang="en-US" sz="900" b="1" spc="100" kern="0" dirty="0">
+                <a:solidFill>
+                  <a:srgbClr val="2E7B72"/>
+                </a:solidFill>
+                <a:latin typeface="Calibri" pitchFamily="34" charset="0"/>
+                <a:ea typeface="Calibri" pitchFamily="34" charset="-122"/>
+                <a:cs typeface="Calibri" pitchFamily="34" charset="-120"/>
+              </a:rPr>
+              <a:t>HOGAR, IDENTIDAD Y ACCESO</a:t>
+            </a:r>
+            <a:endParaRPr lang="en-US" sz="900" dirty="0"/>
+          </a:p>
+        </p:txBody>
+      </p:sp>
+      <p:sp>
+        <p:nvSpPr>
+          <p:cNvPr id="13" name="Text 11"/>
+          <p:cNvSpPr/>
+          <p:nvPr/>
+        </p:nvSpPr>
+        <p:spPr>
+          <a:xfrm>
+            <a:off x="6638544" y="2441448"/>
+            <a:ext cx="502920" cy="292608"/>
+          </a:xfrm>
+          <a:prstGeom prst="rect">
+            <a:avLst/>
+          </a:prstGeom>
+          <a:noFill/>
+          <a:ln/>
+        </p:spPr>
+        <p:txBody>
+          <a:bodyPr wrap="square" lIns="0" tIns="0" rIns="0" bIns="0" rtlCol="0" anchor="ctr"/>
+          <a:lstStyle/>
+          <a:p>
+            <a:pPr algn="r" indent="0" marL="0">
+              <a:buNone/>
+            </a:pPr>
+            <a:r>
+              <a:rPr lang="en-US" sz="1800" b="1" dirty="0">
+                <a:solidFill>
+                  <a:srgbClr val="12312F"/>
+                </a:solidFill>
+                <a:latin typeface="Cambria" pitchFamily="34" charset="0"/>
+                <a:ea typeface="Cambria" pitchFamily="34" charset="-122"/>
+                <a:cs typeface="Cambria" pitchFamily="34" charset="-120"/>
+              </a:rPr>
+              <a:t>11</a:t>
+            </a:r>
+            <a:endParaRPr lang="en-US" sz="1800" dirty="0"/>
+          </a:p>
+        </p:txBody>
+      </p:sp>
+      <p:sp>
+        <p:nvSpPr>
+          <p:cNvPr id="14" name="Text 12"/>
+          <p:cNvSpPr/>
+          <p:nvPr/>
+        </p:nvSpPr>
+        <p:spPr>
+          <a:xfrm>
+            <a:off x="4407408" y="2770632"/>
+            <a:ext cx="2688336" cy="822960"/>
+          </a:xfrm>
+          <a:prstGeom prst="rect">
+            <a:avLst/>
+          </a:prstGeom>
+          <a:noFill/>
+          <a:ln/>
+        </p:spPr>
+        <p:txBody>
+          <a:bodyPr wrap="square" lIns="0" tIns="0" rIns="0" bIns="0" rtlCol="0" anchor="t"/>
+          <a:lstStyle/>
+          <a:p>
+            <a:pPr indent="0" marL="0">
+              <a:lnSpc>
+                <a:spcPts val="1400"/>
+              </a:lnSpc>
+              <a:buNone/>
+            </a:pPr>
+            <a:r>
+              <a:rPr lang="en-US" sz="900" dirty="0">
+                <a:solidFill>
+                  <a:srgbClr val="5F706E"/>
+                </a:solidFill>
+                <a:latin typeface="Courier New" pitchFamily="34" charset="0"/>
+                <a:ea typeface="Courier New" pitchFamily="34" charset="-122"/>
+                <a:cs typeface="Courier New" pitchFamily="34" charset="-120"/>
+              </a:rPr>
+              <a:t>CreateHousehold</a:t>
+            </a:r>
+            <a:endParaRPr lang="en-US" sz="900" dirty="0"/>
+          </a:p>
+          <a:p>
+            <a:pPr indent="0" marL="0">
+              <a:lnSpc>
+                <a:spcPts val="1400"/>
+              </a:lnSpc>
+              <a:buNone/>
+            </a:pPr>
+            <a:r>
+              <a:rPr lang="en-US" sz="900" dirty="0">
+                <a:solidFill>
+                  <a:srgbClr val="5F706E"/>
+                </a:solidFill>
+                <a:latin typeface="Courier New" pitchFamily="34" charset="0"/>
+                <a:ea typeface="Courier New" pitchFamily="34" charset="-122"/>
+                <a:cs typeface="Courier New" pitchFamily="34" charset="-120"/>
+              </a:rPr>
+              <a:t>VerifyEmail</a:t>
+            </a:r>
+            <a:endParaRPr lang="en-US" sz="900" dirty="0"/>
+          </a:p>
+          <a:p>
+            <a:pPr indent="0" marL="0">
+              <a:lnSpc>
+                <a:spcPts val="1400"/>
+              </a:lnSpc>
+              <a:buNone/>
+            </a:pPr>
+            <a:r>
+              <a:rPr lang="en-US" sz="900" dirty="0">
+                <a:solidFill>
+                  <a:srgbClr val="5F706E"/>
+                </a:solidFill>
+                <a:latin typeface="Courier New" pitchFamily="34" charset="0"/>
+                <a:ea typeface="Courier New" pitchFamily="34" charset="-122"/>
+                <a:cs typeface="Courier New" pitchFamily="34" charset="-120"/>
+              </a:rPr>
+              <a:t>InviteUser</a:t>
+            </a:r>
+            <a:endParaRPr lang="en-US" sz="900" dirty="0"/>
+          </a:p>
+        </p:txBody>
+      </p:sp>
+      <p:sp>
+        <p:nvSpPr>
+          <p:cNvPr id="15" name="Shape 13"/>
+          <p:cNvSpPr/>
+          <p:nvPr/>
+        </p:nvSpPr>
+        <p:spPr>
+          <a:xfrm>
+            <a:off x="896112" y="3794760"/>
+            <a:ext cx="3090672" cy="1371600"/>
+          </a:xfrm>
+          <a:prstGeom prst="roundRect">
+            <a:avLst>
+              <a:gd name="adj" fmla="val 6000"/>
+            </a:avLst>
+          </a:prstGeom>
+          <a:solidFill>
+            <a:srgbClr val="FFFFFF"/>
+          </a:solidFill>
+          <a:ln w="12700">
+            <a:solidFill>
+              <a:srgbClr val="D3DFDC"/>
+            </a:solidFill>
+            <a:prstDash val="solid"/>
+          </a:ln>
+        </p:spPr>
+      </p:sp>
+      <p:sp>
+        <p:nvSpPr>
+          <p:cNvPr id="16" name="Text 14"/>
+          <p:cNvSpPr/>
+          <p:nvPr/>
+        </p:nvSpPr>
+        <p:spPr>
+          <a:xfrm>
+            <a:off x="1097280" y="3941064"/>
+            <a:ext cx="2267712" cy="219456"/>
+          </a:xfrm>
+          <a:prstGeom prst="rect">
+            <a:avLst/>
+          </a:prstGeom>
+          <a:noFill/>
+          <a:ln/>
+        </p:spPr>
+        <p:txBody>
+          <a:bodyPr wrap="square" lIns="0" tIns="0" rIns="0" bIns="0" rtlCol="0" anchor="ctr"/>
+          <a:lstStyle/>
+          <a:p>
+            <a:pPr indent="0" marL="0">
+              <a:buNone/>
+            </a:pPr>
+            <a:r>
+              <a:rPr lang="en-US" sz="900" b="1" spc="100" kern="0" dirty="0">
+                <a:solidFill>
+                  <a:srgbClr val="2E7B72"/>
+                </a:solidFill>
+                <a:latin typeface="Calibri" pitchFamily="34" charset="0"/>
+                <a:ea typeface="Calibri" pitchFamily="34" charset="-122"/>
+                <a:cs typeface="Calibri" pitchFamily="34" charset="-120"/>
+              </a:rPr>
+              <a:t>DOCUMENTOS Y FICHEROS</a:t>
+            </a:r>
+            <a:endParaRPr lang="en-US" sz="900" dirty="0"/>
+          </a:p>
+        </p:txBody>
+      </p:sp>
+      <p:sp>
+        <p:nvSpPr>
+          <p:cNvPr id="17" name="Text 15"/>
+          <p:cNvSpPr/>
+          <p:nvPr/>
+        </p:nvSpPr>
+        <p:spPr>
+          <a:xfrm>
+            <a:off x="3328416" y="3904488"/>
+            <a:ext cx="502920" cy="292608"/>
+          </a:xfrm>
+          <a:prstGeom prst="rect">
+            <a:avLst/>
+          </a:prstGeom>
+          <a:noFill/>
+          <a:ln/>
+        </p:spPr>
+        <p:txBody>
+          <a:bodyPr wrap="square" lIns="0" tIns="0" rIns="0" bIns="0" rtlCol="0" anchor="ctr"/>
+          <a:lstStyle/>
+          <a:p>
+            <a:pPr algn="r" indent="0" marL="0">
+              <a:buNone/>
+            </a:pPr>
+            <a:r>
+              <a:rPr lang="en-US" sz="1800" b="1" dirty="0">
+                <a:solidFill>
+                  <a:srgbClr val="12312F"/>
+                </a:solidFill>
+                <a:latin typeface="Cambria" pitchFamily="34" charset="0"/>
+                <a:ea typeface="Cambria" pitchFamily="34" charset="-122"/>
+                <a:cs typeface="Cambria" pitchFamily="34" charset="-120"/>
+              </a:rPr>
+              <a:t>5</a:t>
+            </a:r>
+            <a:endParaRPr lang="en-US" sz="1800" dirty="0"/>
+          </a:p>
+        </p:txBody>
+      </p:sp>
+      <p:sp>
+        <p:nvSpPr>
+          <p:cNvPr id="18" name="Text 16"/>
+          <p:cNvSpPr/>
+          <p:nvPr/>
+        </p:nvSpPr>
+        <p:spPr>
+          <a:xfrm>
+            <a:off x="1097280" y="4233672"/>
+            <a:ext cx="2688336" cy="822960"/>
+          </a:xfrm>
+          <a:prstGeom prst="rect">
+            <a:avLst/>
+          </a:prstGeom>
+          <a:noFill/>
+          <a:ln/>
+        </p:spPr>
+        <p:txBody>
+          <a:bodyPr wrap="square" lIns="0" tIns="0" rIns="0" bIns="0" rtlCol="0" anchor="t"/>
+          <a:lstStyle/>
+          <a:p>
+            <a:pPr indent="0" marL="0">
+              <a:lnSpc>
+                <a:spcPts val="1400"/>
+              </a:lnSpc>
+              <a:buNone/>
+            </a:pPr>
+            <a:r>
+              <a:rPr lang="en-US" sz="900" dirty="0">
+                <a:solidFill>
+                  <a:srgbClr val="5F706E"/>
+                </a:solidFill>
+                <a:latin typeface="Courier New" pitchFamily="34" charset="0"/>
+                <a:ea typeface="Courier New" pitchFamily="34" charset="-122"/>
+                <a:cs typeface="Courier New" pitchFamily="34" charset="-120"/>
+              </a:rPr>
+              <a:t>AttachDocument</a:t>
+            </a:r>
+            <a:endParaRPr lang="en-US" sz="900" dirty="0"/>
+          </a:p>
+          <a:p>
+            <a:pPr indent="0" marL="0">
+              <a:lnSpc>
+                <a:spcPts val="1400"/>
+              </a:lnSpc>
+              <a:buNone/>
+            </a:pPr>
+            <a:r>
+              <a:rPr lang="en-US" sz="900" dirty="0">
+                <a:solidFill>
+                  <a:srgbClr val="5F706E"/>
+                </a:solidFill>
+                <a:latin typeface="Courier New" pitchFamily="34" charset="0"/>
+                <a:ea typeface="Courier New" pitchFamily="34" charset="-122"/>
+                <a:cs typeface="Courier New" pitchFamily="34" charset="-120"/>
+              </a:rPr>
+              <a:t>UploadFile</a:t>
+            </a:r>
+            <a:endParaRPr lang="en-US" sz="900" dirty="0"/>
+          </a:p>
+          <a:p>
+            <a:pPr indent="0" marL="0">
+              <a:lnSpc>
+                <a:spcPts val="1400"/>
+              </a:lnSpc>
+              <a:buNone/>
+            </a:pPr>
+            <a:r>
+              <a:rPr lang="en-US" sz="900" dirty="0">
+                <a:solidFill>
+                  <a:srgbClr val="5F706E"/>
+                </a:solidFill>
+                <a:latin typeface="Courier New" pitchFamily="34" charset="0"/>
+                <a:ea typeface="Courier New" pitchFamily="34" charset="-122"/>
+                <a:cs typeface="Courier New" pitchFamily="34" charset="-120"/>
+              </a:rPr>
+              <a:t>SetIdentityAvatar</a:t>
+            </a:r>
+            <a:endParaRPr lang="en-US" sz="900" dirty="0"/>
+          </a:p>
+        </p:txBody>
+      </p:sp>
+      <p:sp>
+        <p:nvSpPr>
+          <p:cNvPr id="19" name="Shape 17"/>
+          <p:cNvSpPr/>
+          <p:nvPr/>
+        </p:nvSpPr>
+        <p:spPr>
+          <a:xfrm>
+            <a:off x="4206240" y="3794760"/>
+            <a:ext cx="3090672" cy="1371600"/>
+          </a:xfrm>
+          <a:prstGeom prst="roundRect">
+            <a:avLst>
+              <a:gd name="adj" fmla="val 6000"/>
+            </a:avLst>
+          </a:prstGeom>
+          <a:solidFill>
+            <a:srgbClr val="FFFFFF"/>
+          </a:solidFill>
+          <a:ln w="12700">
+            <a:solidFill>
+              <a:srgbClr val="D3DFDC"/>
+            </a:solidFill>
+            <a:prstDash val="solid"/>
+          </a:ln>
+        </p:spPr>
+      </p:sp>
+      <p:sp>
+        <p:nvSpPr>
+          <p:cNvPr id="20" name="Text 18"/>
+          <p:cNvSpPr/>
+          <p:nvPr/>
+        </p:nvSpPr>
+        <p:spPr>
+          <a:xfrm>
+            <a:off x="4407408" y="3941064"/>
+            <a:ext cx="2267712" cy="219456"/>
+          </a:xfrm>
+          <a:prstGeom prst="rect">
+            <a:avLst/>
+          </a:prstGeom>
+          <a:noFill/>
+          <a:ln/>
+        </p:spPr>
+        <p:txBody>
+          <a:bodyPr wrap="square" lIns="0" tIns="0" rIns="0" bIns="0" rtlCol="0" anchor="ctr"/>
+          <a:lstStyle/>
+          <a:p>
+            <a:pPr indent="0" marL="0">
+              <a:buNone/>
+            </a:pPr>
+            <a:r>
+              <a:rPr lang="en-US" sz="900" b="1" spc="100" kern="0" dirty="0">
+                <a:solidFill>
+                  <a:srgbClr val="2E7B72"/>
+                </a:solidFill>
+                <a:latin typeface="Calibri" pitchFamily="34" charset="0"/>
+                <a:ea typeface="Calibri" pitchFamily="34" charset="-122"/>
+                <a:cs typeface="Calibri" pitchFamily="34" charset="-120"/>
+              </a:rPr>
+              <a:t>PRÉSTAMOS</a:t>
+            </a:r>
+            <a:endParaRPr lang="en-US" sz="900" dirty="0"/>
+          </a:p>
+        </p:txBody>
+      </p:sp>
+      <p:sp>
+        <p:nvSpPr>
+          <p:cNvPr id="21" name="Text 19"/>
+          <p:cNvSpPr/>
+          <p:nvPr/>
+        </p:nvSpPr>
+        <p:spPr>
+          <a:xfrm>
+            <a:off x="6638544" y="3904488"/>
+            <a:ext cx="502920" cy="292608"/>
+          </a:xfrm>
+          <a:prstGeom prst="rect">
+            <a:avLst/>
+          </a:prstGeom>
+          <a:noFill/>
+          <a:ln/>
+        </p:spPr>
+        <p:txBody>
+          <a:bodyPr wrap="square" lIns="0" tIns="0" rIns="0" bIns="0" rtlCol="0" anchor="ctr"/>
+          <a:lstStyle/>
+          <a:p>
+            <a:pPr algn="r" indent="0" marL="0">
+              <a:buNone/>
+            </a:pPr>
+            <a:r>
+              <a:rPr lang="en-US" sz="1800" b="1" dirty="0">
+                <a:solidFill>
+                  <a:srgbClr val="12312F"/>
+                </a:solidFill>
+                <a:latin typeface="Cambria" pitchFamily="34" charset="0"/>
+                <a:ea typeface="Cambria" pitchFamily="34" charset="-122"/>
+                <a:cs typeface="Cambria" pitchFamily="34" charset="-120"/>
+              </a:rPr>
+              <a:t>3</a:t>
+            </a:r>
+            <a:endParaRPr lang="en-US" sz="1800" dirty="0"/>
+          </a:p>
+        </p:txBody>
+      </p:sp>
+      <p:sp>
+        <p:nvSpPr>
+          <p:cNvPr id="22" name="Text 20"/>
+          <p:cNvSpPr/>
+          <p:nvPr/>
+        </p:nvSpPr>
+        <p:spPr>
+          <a:xfrm>
+            <a:off x="4407408" y="4233672"/>
+            <a:ext cx="2688336" cy="822960"/>
+          </a:xfrm>
+          <a:prstGeom prst="rect">
+            <a:avLst/>
+          </a:prstGeom>
+          <a:noFill/>
+          <a:ln/>
+        </p:spPr>
+        <p:txBody>
+          <a:bodyPr wrap="square" lIns="0" tIns="0" rIns="0" bIns="0" rtlCol="0" anchor="t"/>
+          <a:lstStyle/>
+          <a:p>
+            <a:pPr indent="0" marL="0">
+              <a:lnSpc>
+                <a:spcPts val="1400"/>
+              </a:lnSpc>
+              <a:buNone/>
+            </a:pPr>
+            <a:r>
+              <a:rPr lang="en-US" sz="900" dirty="0">
+                <a:solidFill>
+                  <a:srgbClr val="5F706E"/>
+                </a:solidFill>
+                <a:latin typeface="Courier New" pitchFamily="34" charset="0"/>
+                <a:ea typeface="Courier New" pitchFamily="34" charset="-122"/>
+                <a:cs typeface="Courier New" pitchFamily="34" charset="-120"/>
+              </a:rPr>
+              <a:t>StartLoan</a:t>
+            </a:r>
+            <a:endParaRPr lang="en-US" sz="900" dirty="0"/>
+          </a:p>
+          <a:p>
+            <a:pPr indent="0" marL="0">
+              <a:lnSpc>
+                <a:spcPts val="1400"/>
+              </a:lnSpc>
+              <a:buNone/>
+            </a:pPr>
+            <a:r>
+              <a:rPr lang="en-US" sz="900" dirty="0">
+                <a:solidFill>
+                  <a:srgbClr val="5F706E"/>
+                </a:solidFill>
+                <a:latin typeface="Courier New" pitchFamily="34" charset="0"/>
+                <a:ea typeface="Courier New" pitchFamily="34" charset="-122"/>
+                <a:cs typeface="Courier New" pitchFamily="34" charset="-120"/>
+              </a:rPr>
+              <a:t>ConfirmReturn</a:t>
+            </a:r>
+            <a:endParaRPr lang="en-US" sz="900" dirty="0"/>
+          </a:p>
+          <a:p>
+            <a:pPr indent="0" marL="0">
+              <a:lnSpc>
+                <a:spcPts val="1400"/>
+              </a:lnSpc>
+              <a:buNone/>
+            </a:pPr>
+            <a:r>
+              <a:rPr lang="en-US" sz="900" dirty="0">
+                <a:solidFill>
+                  <a:srgbClr val="5F706E"/>
+                </a:solidFill>
+                <a:latin typeface="Courier New" pitchFamily="34" charset="0"/>
+                <a:ea typeface="Courier New" pitchFamily="34" charset="-122"/>
+                <a:cs typeface="Courier New" pitchFamily="34" charset="-120"/>
+              </a:rPr>
+              <a:t>GenerateExternalAccessToken</a:t>
+            </a:r>
+            <a:endParaRPr lang="en-US" sz="900" dirty="0"/>
+          </a:p>
+        </p:txBody>
+      </p:sp>
+      <p:sp>
+        <p:nvSpPr>
+          <p:cNvPr id="23" name="Shape 21"/>
+          <p:cNvSpPr/>
+          <p:nvPr/>
+        </p:nvSpPr>
+        <p:spPr>
+          <a:xfrm>
+            <a:off x="896112" y="5285232"/>
+            <a:ext cx="6254496" cy="457200"/>
+          </a:xfrm>
+          <a:prstGeom prst="roundRect">
+            <a:avLst>
+              <a:gd name="adj" fmla="val 18000"/>
+            </a:avLst>
+          </a:prstGeom>
+          <a:solidFill>
+            <a:srgbClr val="1C4644"/>
           </a:solidFill>
           <a:ln w="6350">
             <a:solidFill>
-              <a:srgbClr val="2E7B72"/>
+              <a:srgbClr val="1C4644"/>
             </a:solidFill>
             <a:prstDash val="solid"/>
           </a:ln>
@@ -9939,1424 +11109,46 @@
       </p:sp>
       <p:sp>
         <p:nvSpPr>
-          <p:cNvPr id="8" name="Text 6"/>
-          <p:cNvSpPr/>
-          <p:nvPr/>
-        </p:nvSpPr>
-        <p:spPr>
-          <a:xfrm>
-            <a:off x="1115568" y="2359152"/>
-            <a:ext cx="3017520" cy="237744"/>
-          </a:xfrm>
-          <a:prstGeom prst="rect">
-            <a:avLst/>
-          </a:prstGeom>
-          <a:noFill/>
-          <a:ln/>
-        </p:spPr>
-        <p:txBody>
-          <a:bodyPr wrap="square" lIns="0" tIns="0" rIns="0" bIns="0" rtlCol="0" anchor="ctr"/>
-          <a:lstStyle/>
-          <a:p>
-            <a:pPr indent="0" marL="0">
-              <a:buNone/>
-            </a:pPr>
-            <a:r>
-              <a:rPr lang="en-US" sz="1200" b="1" dirty="0">
-                <a:solidFill>
-                  <a:srgbClr val="12312F"/>
-                </a:solidFill>
-                <a:latin typeface="Calibri" pitchFamily="34" charset="0"/>
-                <a:ea typeface="Calibri" pitchFamily="34" charset="-122"/>
-                <a:cs typeface="Calibri" pitchFamily="34" charset="-120"/>
-              </a:rPr>
-              <a:t>CrearArticulo</a:t>
-            </a:r>
-            <a:endParaRPr lang="en-US" sz="1200" dirty="0"/>
-          </a:p>
-        </p:txBody>
-      </p:sp>
-      <p:sp>
-        <p:nvSpPr>
-          <p:cNvPr id="9" name="Text 7"/>
-          <p:cNvSpPr/>
-          <p:nvPr/>
-        </p:nvSpPr>
-        <p:spPr>
-          <a:xfrm>
-            <a:off x="1115568" y="2569464"/>
-            <a:ext cx="3017520" cy="219456"/>
-          </a:xfrm>
-          <a:prstGeom prst="rect">
-            <a:avLst/>
-          </a:prstGeom>
-          <a:noFill/>
-          <a:ln/>
-        </p:spPr>
-        <p:txBody>
-          <a:bodyPr wrap="square" lIns="0" tIns="0" rIns="0" bIns="0" rtlCol="0" anchor="ctr"/>
-          <a:lstStyle/>
-          <a:p>
-            <a:pPr indent="0" marL="0">
-              <a:buNone/>
-            </a:pPr>
-            <a:r>
-              <a:rPr lang="en-US" sz="950" dirty="0">
-                <a:solidFill>
-                  <a:srgbClr val="5F706E"/>
-                </a:solidFill>
-                <a:latin typeface="Courier New" pitchFamily="34" charset="0"/>
-                <a:ea typeface="Courier New" pitchFamily="34" charset="-122"/>
-                <a:cs typeface="Courier New" pitchFamily="34" charset="-120"/>
-              </a:rPr>
-              <a:t>CatalogItemCreated</a:t>
-            </a:r>
-            <a:endParaRPr lang="en-US" sz="950" dirty="0"/>
-          </a:p>
-        </p:txBody>
-      </p:sp>
-      <p:sp>
-        <p:nvSpPr>
-          <p:cNvPr id="10" name="Shape 8"/>
-          <p:cNvSpPr/>
-          <p:nvPr/>
-        </p:nvSpPr>
-        <p:spPr>
-          <a:xfrm>
-            <a:off x="4206240" y="2505456"/>
-            <a:ext cx="118872" cy="118872"/>
-          </a:xfrm>
-          <a:prstGeom prst="ellipse">
-            <a:avLst/>
-          </a:prstGeom>
-          <a:solidFill>
-            <a:srgbClr val="2E7B72"/>
-          </a:solidFill>
-          <a:ln w="6350">
-            <a:solidFill>
-              <a:srgbClr val="2E7B72"/>
-            </a:solidFill>
-            <a:prstDash val="solid"/>
-          </a:ln>
-        </p:spPr>
-      </p:sp>
-      <p:sp>
-        <p:nvSpPr>
-          <p:cNvPr id="11" name="Text 9"/>
-          <p:cNvSpPr/>
-          <p:nvPr/>
-        </p:nvSpPr>
-        <p:spPr>
-          <a:xfrm>
-            <a:off x="4425696" y="2359152"/>
-            <a:ext cx="3017520" cy="237744"/>
-          </a:xfrm>
-          <a:prstGeom prst="rect">
-            <a:avLst/>
-          </a:prstGeom>
-          <a:noFill/>
-          <a:ln/>
-        </p:spPr>
-        <p:txBody>
-          <a:bodyPr wrap="square" lIns="0" tIns="0" rIns="0" bIns="0" rtlCol="0" anchor="ctr"/>
-          <a:lstStyle/>
-          <a:p>
-            <a:pPr indent="0" marL="0">
-              <a:buNone/>
-            </a:pPr>
-            <a:r>
-              <a:rPr lang="en-US" sz="1200" b="1" dirty="0">
-                <a:solidFill>
-                  <a:srgbClr val="12312F"/>
-                </a:solidFill>
-                <a:latin typeface="Calibri" pitchFamily="34" charset="0"/>
-                <a:ea typeface="Calibri" pitchFamily="34" charset="-122"/>
-                <a:cs typeface="Calibri" pitchFamily="34" charset="-120"/>
-              </a:rPr>
-              <a:t>CrearAsset</a:t>
-            </a:r>
-            <a:endParaRPr lang="en-US" sz="1200" dirty="0"/>
-          </a:p>
-        </p:txBody>
-      </p:sp>
-      <p:sp>
-        <p:nvSpPr>
-          <p:cNvPr id="12" name="Text 10"/>
-          <p:cNvSpPr/>
-          <p:nvPr/>
-        </p:nvSpPr>
-        <p:spPr>
-          <a:xfrm>
-            <a:off x="4425696" y="2569464"/>
-            <a:ext cx="3017520" cy="219456"/>
-          </a:xfrm>
-          <a:prstGeom prst="rect">
-            <a:avLst/>
-          </a:prstGeom>
-          <a:noFill/>
-          <a:ln/>
-        </p:spPr>
-        <p:txBody>
-          <a:bodyPr wrap="square" lIns="0" tIns="0" rIns="0" bIns="0" rtlCol="0" anchor="ctr"/>
-          <a:lstStyle/>
-          <a:p>
-            <a:pPr indent="0" marL="0">
-              <a:buNone/>
-            </a:pPr>
-            <a:r>
-              <a:rPr lang="en-US" sz="950" dirty="0">
-                <a:solidFill>
-                  <a:srgbClr val="5F706E"/>
-                </a:solidFill>
-                <a:latin typeface="Courier New" pitchFamily="34" charset="0"/>
-                <a:ea typeface="Courier New" pitchFamily="34" charset="-122"/>
-                <a:cs typeface="Courier New" pitchFamily="34" charset="-120"/>
-              </a:rPr>
-              <a:t>AssetCreated</a:t>
-            </a:r>
-            <a:endParaRPr lang="en-US" sz="950" dirty="0"/>
-          </a:p>
-        </p:txBody>
-      </p:sp>
-      <p:sp>
-        <p:nvSpPr>
-          <p:cNvPr id="13" name="Shape 11"/>
-          <p:cNvSpPr/>
-          <p:nvPr/>
-        </p:nvSpPr>
-        <p:spPr>
-          <a:xfrm>
-            <a:off x="896112" y="2962656"/>
-            <a:ext cx="118872" cy="118872"/>
-          </a:xfrm>
-          <a:prstGeom prst="ellipse">
-            <a:avLst/>
-          </a:prstGeom>
-          <a:solidFill>
-            <a:srgbClr val="2E7B72"/>
-          </a:solidFill>
-          <a:ln w="6350">
-            <a:solidFill>
-              <a:srgbClr val="2E7B72"/>
-            </a:solidFill>
-            <a:prstDash val="solid"/>
-          </a:ln>
-        </p:spPr>
-      </p:sp>
-      <p:sp>
-        <p:nvSpPr>
-          <p:cNvPr id="14" name="Text 12"/>
-          <p:cNvSpPr/>
-          <p:nvPr/>
-        </p:nvSpPr>
-        <p:spPr>
-          <a:xfrm>
-            <a:off x="1115568" y="2816352"/>
-            <a:ext cx="3017520" cy="237744"/>
-          </a:xfrm>
-          <a:prstGeom prst="rect">
-            <a:avLst/>
-          </a:prstGeom>
-          <a:noFill/>
-          <a:ln/>
-        </p:spPr>
-        <p:txBody>
-          <a:bodyPr wrap="square" lIns="0" tIns="0" rIns="0" bIns="0" rtlCol="0" anchor="ctr"/>
-          <a:lstStyle/>
-          <a:p>
-            <a:pPr indent="0" marL="0">
-              <a:buNone/>
-            </a:pPr>
-            <a:r>
-              <a:rPr lang="en-US" sz="1200" b="1" dirty="0">
-                <a:solidFill>
-                  <a:srgbClr val="12312F"/>
-                </a:solidFill>
-                <a:latin typeface="Calibri" pitchFamily="34" charset="0"/>
-                <a:ea typeface="Calibri" pitchFamily="34" charset="-122"/>
-                <a:cs typeface="Calibri" pitchFamily="34" charset="-120"/>
-              </a:rPr>
-              <a:t>RegistrarEntradaConsumible</a:t>
-            </a:r>
-            <a:endParaRPr lang="en-US" sz="1200" dirty="0"/>
-          </a:p>
-        </p:txBody>
-      </p:sp>
-      <p:sp>
-        <p:nvSpPr>
-          <p:cNvPr id="15" name="Text 13"/>
-          <p:cNvSpPr/>
-          <p:nvPr/>
-        </p:nvSpPr>
-        <p:spPr>
-          <a:xfrm>
-            <a:off x="1115568" y="3026664"/>
-            <a:ext cx="3017520" cy="219456"/>
-          </a:xfrm>
-          <a:prstGeom prst="rect">
-            <a:avLst/>
-          </a:prstGeom>
-          <a:noFill/>
-          <a:ln/>
-        </p:spPr>
-        <p:txBody>
-          <a:bodyPr wrap="square" lIns="0" tIns="0" rIns="0" bIns="0" rtlCol="0" anchor="ctr"/>
-          <a:lstStyle/>
-          <a:p>
-            <a:pPr indent="0" marL="0">
-              <a:buNone/>
-            </a:pPr>
-            <a:r>
-              <a:rPr lang="en-US" sz="950" dirty="0">
-                <a:solidFill>
-                  <a:srgbClr val="5F706E"/>
-                </a:solidFill>
-                <a:latin typeface="Courier New" pitchFamily="34" charset="0"/>
-                <a:ea typeface="Courier New" pitchFamily="34" charset="-122"/>
-                <a:cs typeface="Courier New" pitchFamily="34" charset="-120"/>
-              </a:rPr>
-              <a:t>AssetCreated / QuantityChanged</a:t>
-            </a:r>
-            <a:endParaRPr lang="en-US" sz="950" dirty="0"/>
-          </a:p>
-        </p:txBody>
-      </p:sp>
-      <p:sp>
-        <p:nvSpPr>
-          <p:cNvPr id="16" name="Shape 14"/>
-          <p:cNvSpPr/>
-          <p:nvPr/>
-        </p:nvSpPr>
-        <p:spPr>
-          <a:xfrm>
-            <a:off x="4206240" y="2962656"/>
-            <a:ext cx="118872" cy="118872"/>
-          </a:xfrm>
-          <a:prstGeom prst="ellipse">
-            <a:avLst/>
-          </a:prstGeom>
-          <a:solidFill>
-            <a:srgbClr val="2E7B72"/>
-          </a:solidFill>
-          <a:ln w="6350">
-            <a:solidFill>
-              <a:srgbClr val="2E7B72"/>
-            </a:solidFill>
-            <a:prstDash val="solid"/>
-          </a:ln>
-        </p:spPr>
-      </p:sp>
-      <p:sp>
-        <p:nvSpPr>
-          <p:cNvPr id="17" name="Text 15"/>
-          <p:cNvSpPr/>
-          <p:nvPr/>
-        </p:nvSpPr>
-        <p:spPr>
-          <a:xfrm>
-            <a:off x="4425696" y="2816352"/>
-            <a:ext cx="3017520" cy="237744"/>
-          </a:xfrm>
-          <a:prstGeom prst="rect">
-            <a:avLst/>
-          </a:prstGeom>
-          <a:noFill/>
-          <a:ln/>
-        </p:spPr>
-        <p:txBody>
-          <a:bodyPr wrap="square" lIns="0" tIns="0" rIns="0" bIns="0" rtlCol="0" anchor="ctr"/>
-          <a:lstStyle/>
-          <a:p>
-            <a:pPr indent="0" marL="0">
-              <a:buNone/>
-            </a:pPr>
-            <a:r>
-              <a:rPr lang="en-US" sz="1200" b="1" dirty="0">
-                <a:solidFill>
-                  <a:srgbClr val="12312F"/>
-                </a:solidFill>
-                <a:latin typeface="Calibri" pitchFamily="34" charset="0"/>
-                <a:ea typeface="Calibri" pitchFamily="34" charset="-122"/>
-                <a:cs typeface="Calibri" pitchFamily="34" charset="-120"/>
-              </a:rPr>
-              <a:t>MoverAsset</a:t>
-            </a:r>
-            <a:endParaRPr lang="en-US" sz="1200" dirty="0"/>
-          </a:p>
-        </p:txBody>
-      </p:sp>
-      <p:sp>
-        <p:nvSpPr>
-          <p:cNvPr id="18" name="Text 16"/>
-          <p:cNvSpPr/>
-          <p:nvPr/>
-        </p:nvSpPr>
-        <p:spPr>
-          <a:xfrm>
-            <a:off x="4425696" y="3026664"/>
-            <a:ext cx="3017520" cy="219456"/>
-          </a:xfrm>
-          <a:prstGeom prst="rect">
-            <a:avLst/>
-          </a:prstGeom>
-          <a:noFill/>
-          <a:ln/>
-        </p:spPr>
-        <p:txBody>
-          <a:bodyPr wrap="square" lIns="0" tIns="0" rIns="0" bIns="0" rtlCol="0" anchor="ctr"/>
-          <a:lstStyle/>
-          <a:p>
-            <a:pPr indent="0" marL="0">
-              <a:buNone/>
-            </a:pPr>
-            <a:r>
-              <a:rPr lang="en-US" sz="950" dirty="0">
-                <a:solidFill>
-                  <a:srgbClr val="5F706E"/>
-                </a:solidFill>
-                <a:latin typeface="Courier New" pitchFamily="34" charset="0"/>
-                <a:ea typeface="Courier New" pitchFamily="34" charset="-122"/>
-                <a:cs typeface="Courier New" pitchFamily="34" charset="-120"/>
-              </a:rPr>
-              <a:t>AssetMoved / HierarchyChanged</a:t>
-            </a:r>
-            <a:endParaRPr lang="en-US" sz="950" dirty="0"/>
-          </a:p>
-        </p:txBody>
-      </p:sp>
-      <p:sp>
-        <p:nvSpPr>
-          <p:cNvPr id="19" name="Shape 17"/>
-          <p:cNvSpPr/>
-          <p:nvPr/>
-        </p:nvSpPr>
-        <p:spPr>
-          <a:xfrm>
-            <a:off x="896112" y="3419856"/>
-            <a:ext cx="118872" cy="118872"/>
-          </a:xfrm>
-          <a:prstGeom prst="ellipse">
-            <a:avLst/>
-          </a:prstGeom>
-          <a:solidFill>
-            <a:srgbClr val="2E7B72"/>
-          </a:solidFill>
-          <a:ln w="6350">
-            <a:solidFill>
-              <a:srgbClr val="2E7B72"/>
-            </a:solidFill>
-            <a:prstDash val="solid"/>
-          </a:ln>
-        </p:spPr>
-      </p:sp>
-      <p:sp>
-        <p:nvSpPr>
-          <p:cNvPr id="20" name="Text 18"/>
-          <p:cNvSpPr/>
-          <p:nvPr/>
-        </p:nvSpPr>
-        <p:spPr>
-          <a:xfrm>
-            <a:off x="1115568" y="3273552"/>
-            <a:ext cx="3017520" cy="237744"/>
-          </a:xfrm>
-          <a:prstGeom prst="rect">
-            <a:avLst/>
-          </a:prstGeom>
-          <a:noFill/>
-          <a:ln/>
-        </p:spPr>
-        <p:txBody>
-          <a:bodyPr wrap="square" lIns="0" tIns="0" rIns="0" bIns="0" rtlCol="0" anchor="ctr"/>
-          <a:lstStyle/>
-          <a:p>
-            <a:pPr indent="0" marL="0">
-              <a:buNone/>
-            </a:pPr>
-            <a:r>
-              <a:rPr lang="en-US" sz="1200" b="1" dirty="0">
-                <a:solidFill>
-                  <a:srgbClr val="12312F"/>
-                </a:solidFill>
-                <a:latin typeface="Calibri" pitchFamily="34" charset="0"/>
-                <a:ea typeface="Calibri" pitchFamily="34" charset="-122"/>
-                <a:cs typeface="Calibri" pitchFamily="34" charset="-120"/>
-              </a:rPr>
-              <a:t>FusionarExistencias</a:t>
-            </a:r>
-            <a:endParaRPr lang="en-US" sz="1200" dirty="0"/>
-          </a:p>
-        </p:txBody>
-      </p:sp>
-      <p:sp>
-        <p:nvSpPr>
-          <p:cNvPr id="21" name="Text 19"/>
-          <p:cNvSpPr/>
-          <p:nvPr/>
-        </p:nvSpPr>
-        <p:spPr>
-          <a:xfrm>
-            <a:off x="1115568" y="3483864"/>
-            <a:ext cx="3017520" cy="219456"/>
-          </a:xfrm>
-          <a:prstGeom prst="rect">
-            <a:avLst/>
-          </a:prstGeom>
-          <a:noFill/>
-          <a:ln/>
-        </p:spPr>
-        <p:txBody>
-          <a:bodyPr wrap="square" lIns="0" tIns="0" rIns="0" bIns="0" rtlCol="0" anchor="ctr"/>
-          <a:lstStyle/>
-          <a:p>
-            <a:pPr indent="0" marL="0">
-              <a:buNone/>
-            </a:pPr>
-            <a:r>
-              <a:rPr lang="en-US" sz="950" dirty="0">
-                <a:solidFill>
-                  <a:srgbClr val="5F706E"/>
-                </a:solidFill>
-                <a:latin typeface="Courier New" pitchFamily="34" charset="0"/>
-                <a:ea typeface="Courier New" pitchFamily="34" charset="-122"/>
-                <a:cs typeface="Courier New" pitchFamily="34" charset="-120"/>
-              </a:rPr>
-              <a:t>QuantityChanged + Deactivated</a:t>
-            </a:r>
-            <a:endParaRPr lang="en-US" sz="950" dirty="0"/>
-          </a:p>
-        </p:txBody>
-      </p:sp>
-      <p:sp>
-        <p:nvSpPr>
-          <p:cNvPr id="22" name="Shape 20"/>
-          <p:cNvSpPr/>
-          <p:nvPr/>
-        </p:nvSpPr>
-        <p:spPr>
-          <a:xfrm>
-            <a:off x="4206240" y="3419856"/>
-            <a:ext cx="118872" cy="118872"/>
-          </a:xfrm>
-          <a:prstGeom prst="ellipse">
-            <a:avLst/>
-          </a:prstGeom>
-          <a:solidFill>
-            <a:srgbClr val="2E7B72"/>
-          </a:solidFill>
-          <a:ln w="6350">
-            <a:solidFill>
-              <a:srgbClr val="2E7B72"/>
-            </a:solidFill>
-            <a:prstDash val="solid"/>
-          </a:ln>
-        </p:spPr>
-      </p:sp>
-      <p:sp>
-        <p:nvSpPr>
-          <p:cNvPr id="23" name="Text 21"/>
-          <p:cNvSpPr/>
-          <p:nvPr/>
-        </p:nvSpPr>
-        <p:spPr>
-          <a:xfrm>
-            <a:off x="4425696" y="3273552"/>
-            <a:ext cx="3017520" cy="237744"/>
-          </a:xfrm>
-          <a:prstGeom prst="rect">
-            <a:avLst/>
-          </a:prstGeom>
-          <a:noFill/>
-          <a:ln/>
-        </p:spPr>
-        <p:txBody>
-          <a:bodyPr wrap="square" lIns="0" tIns="0" rIns="0" bIns="0" rtlCol="0" anchor="ctr"/>
-          <a:lstStyle/>
-          <a:p>
-            <a:pPr indent="0" marL="0">
-              <a:buNone/>
-            </a:pPr>
-            <a:r>
-              <a:rPr lang="en-US" sz="1200" b="1" dirty="0">
-                <a:solidFill>
-                  <a:srgbClr val="12312F"/>
-                </a:solidFill>
-                <a:latin typeface="Calibri" pitchFamily="34" charset="0"/>
-                <a:ea typeface="Calibri" pitchFamily="34" charset="-122"/>
-                <a:cs typeface="Calibri" pitchFamily="34" charset="-120"/>
-              </a:rPr>
-              <a:t>AjustarCantidadAsset</a:t>
-            </a:r>
-            <a:endParaRPr lang="en-US" sz="1200" dirty="0"/>
-          </a:p>
-        </p:txBody>
-      </p:sp>
-      <p:sp>
-        <p:nvSpPr>
           <p:cNvPr id="24" name="Text 22"/>
           <p:cNvSpPr/>
           <p:nvPr/>
         </p:nvSpPr>
         <p:spPr>
           <a:xfrm>
-            <a:off x="4425696" y="3483864"/>
-            <a:ext cx="3017520" cy="219456"/>
-          </a:xfrm>
-          <a:prstGeom prst="rect">
-            <a:avLst/>
-          </a:prstGeom>
-          <a:noFill/>
-          <a:ln/>
-        </p:spPr>
-        <p:txBody>
-          <a:bodyPr wrap="square" lIns="0" tIns="0" rIns="0" bIns="0" rtlCol="0" anchor="ctr"/>
-          <a:lstStyle/>
-          <a:p>
-            <a:pPr indent="0" marL="0">
-              <a:buNone/>
-            </a:pPr>
-            <a:r>
-              <a:rPr lang="en-US" sz="950" dirty="0">
-                <a:solidFill>
-                  <a:srgbClr val="5F706E"/>
-                </a:solidFill>
-                <a:latin typeface="Courier New" pitchFamily="34" charset="0"/>
-                <a:ea typeface="Courier New" pitchFamily="34" charset="-122"/>
-                <a:cs typeface="Courier New" pitchFamily="34" charset="-120"/>
-              </a:rPr>
-              <a:t>AssetQuantityChanged</a:t>
-            </a:r>
-            <a:endParaRPr lang="en-US" sz="950" dirty="0"/>
+            <a:off x="896112" y="5285232"/>
+            <a:ext cx="6254496" cy="457200"/>
+          </a:xfrm>
+          <a:prstGeom prst="rect">
+            <a:avLst/>
+          </a:prstGeom>
+          <a:noFill/>
+          <a:ln/>
+        </p:spPr>
+        <p:txBody>
+          <a:bodyPr wrap="square" lIns="0" tIns="0" rIns="0" bIns="0" rtlCol="0" anchor="ctr"/>
+          <a:lstStyle/>
+          <a:p>
+            <a:pPr algn="ctr" indent="0" marL="0">
+              <a:buNone/>
+            </a:pPr>
+            <a:r>
+              <a:rPr lang="en-US" sz="1000" b="1" dirty="0">
+                <a:solidFill>
+                  <a:srgbClr val="CFE1DE"/>
+                </a:solidFill>
+                <a:latin typeface="Calibri" pitchFamily="34" charset="0"/>
+                <a:ea typeface="Calibri" pitchFamily="34" charset="-122"/>
+                <a:cs typeface="Calibri" pitchFamily="34" charset="-120"/>
+              </a:rPr>
+              <a:t>Comandos de sistema · 3 — PurgeUnverifiedHouseholds · PurgeUnusedFiles · MarkOverdueLoans</a:t>
+            </a:r>
+            <a:endParaRPr lang="en-US" sz="1000" dirty="0"/>
           </a:p>
         </p:txBody>
       </p:sp>
       <p:sp>
         <p:nvSpPr>
           <p:cNvPr id="25" name="Shape 23"/>
-          <p:cNvSpPr/>
-          <p:nvPr/>
-        </p:nvSpPr>
-        <p:spPr>
-          <a:xfrm>
-            <a:off x="896112" y="3877056"/>
-            <a:ext cx="118872" cy="118872"/>
-          </a:xfrm>
-          <a:prstGeom prst="ellipse">
-            <a:avLst/>
-          </a:prstGeom>
-          <a:solidFill>
-            <a:srgbClr val="2E7B72"/>
-          </a:solidFill>
-          <a:ln w="6350">
-            <a:solidFill>
-              <a:srgbClr val="2E7B72"/>
-            </a:solidFill>
-            <a:prstDash val="solid"/>
-          </a:ln>
-        </p:spPr>
-      </p:sp>
-      <p:sp>
-        <p:nvSpPr>
-          <p:cNvPr id="26" name="Text 24"/>
-          <p:cNvSpPr/>
-          <p:nvPr/>
-        </p:nvSpPr>
-        <p:spPr>
-          <a:xfrm>
-            <a:off x="1115568" y="3730752"/>
-            <a:ext cx="3017520" cy="237744"/>
-          </a:xfrm>
-          <a:prstGeom prst="rect">
-            <a:avLst/>
-          </a:prstGeom>
-          <a:noFill/>
-          <a:ln/>
-        </p:spPr>
-        <p:txBody>
-          <a:bodyPr wrap="square" lIns="0" tIns="0" rIns="0" bIns="0" rtlCol="0" anchor="ctr"/>
-          <a:lstStyle/>
-          <a:p>
-            <a:pPr indent="0" marL="0">
-              <a:buNone/>
-            </a:pPr>
-            <a:r>
-              <a:rPr lang="en-US" sz="1200" b="1" dirty="0">
-                <a:solidFill>
-                  <a:srgbClr val="12312F"/>
-                </a:solidFill>
-                <a:latin typeface="Calibri" pitchFamily="34" charset="0"/>
-                <a:ea typeface="Calibri" pitchFamily="34" charset="-122"/>
-                <a:cs typeface="Calibri" pitchFamily="34" charset="-120"/>
-              </a:rPr>
-              <a:t>DarDeBajaAsset</a:t>
-            </a:r>
-            <a:endParaRPr lang="en-US" sz="1200" dirty="0"/>
-          </a:p>
-        </p:txBody>
-      </p:sp>
-      <p:sp>
-        <p:nvSpPr>
-          <p:cNvPr id="27" name="Text 25"/>
-          <p:cNvSpPr/>
-          <p:nvPr/>
-        </p:nvSpPr>
-        <p:spPr>
-          <a:xfrm>
-            <a:off x="1115568" y="3941064"/>
-            <a:ext cx="3017520" cy="219456"/>
-          </a:xfrm>
-          <a:prstGeom prst="rect">
-            <a:avLst/>
-          </a:prstGeom>
-          <a:noFill/>
-          <a:ln/>
-        </p:spPr>
-        <p:txBody>
-          <a:bodyPr wrap="square" lIns="0" tIns="0" rIns="0" bIns="0" rtlCol="0" anchor="ctr"/>
-          <a:lstStyle/>
-          <a:p>
-            <a:pPr indent="0" marL="0">
-              <a:buNone/>
-            </a:pPr>
-            <a:r>
-              <a:rPr lang="en-US" sz="950" dirty="0">
-                <a:solidFill>
-                  <a:srgbClr val="5F706E"/>
-                </a:solidFill>
-                <a:latin typeface="Courier New" pitchFamily="34" charset="0"/>
-                <a:ea typeface="Courier New" pitchFamily="34" charset="-122"/>
-                <a:cs typeface="Courier New" pitchFamily="34" charset="-120"/>
-              </a:rPr>
-              <a:t>AssetDeactivated</a:t>
-            </a:r>
-            <a:endParaRPr lang="en-US" sz="950" dirty="0"/>
-          </a:p>
-        </p:txBody>
-      </p:sp>
-      <p:sp>
-        <p:nvSpPr>
-          <p:cNvPr id="28" name="Shape 26"/>
-          <p:cNvSpPr/>
-          <p:nvPr/>
-        </p:nvSpPr>
-        <p:spPr>
-          <a:xfrm>
-            <a:off x="4206240" y="3877056"/>
-            <a:ext cx="118872" cy="118872"/>
-          </a:xfrm>
-          <a:prstGeom prst="ellipse">
-            <a:avLst/>
-          </a:prstGeom>
-          <a:solidFill>
-            <a:srgbClr val="2E7B72"/>
-          </a:solidFill>
-          <a:ln w="6350">
-            <a:solidFill>
-              <a:srgbClr val="2E7B72"/>
-            </a:solidFill>
-            <a:prstDash val="solid"/>
-          </a:ln>
-        </p:spPr>
-      </p:sp>
-      <p:sp>
-        <p:nvSpPr>
-          <p:cNvPr id="29" name="Text 27"/>
-          <p:cNvSpPr/>
-          <p:nvPr/>
-        </p:nvSpPr>
-        <p:spPr>
-          <a:xfrm>
-            <a:off x="4425696" y="3730752"/>
-            <a:ext cx="3017520" cy="237744"/>
-          </a:xfrm>
-          <a:prstGeom prst="rect">
-            <a:avLst/>
-          </a:prstGeom>
-          <a:noFill/>
-          <a:ln/>
-        </p:spPr>
-        <p:txBody>
-          <a:bodyPr wrap="square" lIns="0" tIns="0" rIns="0" bIns="0" rtlCol="0" anchor="ctr"/>
-          <a:lstStyle/>
-          <a:p>
-            <a:pPr indent="0" marL="0">
-              <a:buNone/>
-            </a:pPr>
-            <a:r>
-              <a:rPr lang="en-US" sz="1200" b="1" dirty="0">
-                <a:solidFill>
-                  <a:srgbClr val="12312F"/>
-                </a:solidFill>
-                <a:latin typeface="Calibri" pitchFamily="34" charset="0"/>
-                <a:ea typeface="Calibri" pitchFamily="34" charset="-122"/>
-                <a:cs typeface="Calibri" pitchFamily="34" charset="-120"/>
-              </a:rPr>
-              <a:t>RetirarArticulo</a:t>
-            </a:r>
-            <a:endParaRPr lang="en-US" sz="1200" dirty="0"/>
-          </a:p>
-        </p:txBody>
-      </p:sp>
-      <p:sp>
-        <p:nvSpPr>
-          <p:cNvPr id="30" name="Text 28"/>
-          <p:cNvSpPr/>
-          <p:nvPr/>
-        </p:nvSpPr>
-        <p:spPr>
-          <a:xfrm>
-            <a:off x="4425696" y="3941064"/>
-            <a:ext cx="3017520" cy="219456"/>
-          </a:xfrm>
-          <a:prstGeom prst="rect">
-            <a:avLst/>
-          </a:prstGeom>
-          <a:noFill/>
-          <a:ln/>
-        </p:spPr>
-        <p:txBody>
-          <a:bodyPr wrap="square" lIns="0" tIns="0" rIns="0" bIns="0" rtlCol="0" anchor="ctr"/>
-          <a:lstStyle/>
-          <a:p>
-            <a:pPr indent="0" marL="0">
-              <a:buNone/>
-            </a:pPr>
-            <a:r>
-              <a:rPr lang="en-US" sz="950" dirty="0">
-                <a:solidFill>
-                  <a:srgbClr val="5F706E"/>
-                </a:solidFill>
-                <a:latin typeface="Courier New" pitchFamily="34" charset="0"/>
-                <a:ea typeface="Courier New" pitchFamily="34" charset="-122"/>
-                <a:cs typeface="Courier New" pitchFamily="34" charset="-120"/>
-              </a:rPr>
-              <a:t>—</a:t>
-            </a:r>
-            <a:endParaRPr lang="en-US" sz="950" dirty="0"/>
-          </a:p>
-        </p:txBody>
-      </p:sp>
-      <p:sp>
-        <p:nvSpPr>
-          <p:cNvPr id="31" name="Shape 29"/>
-          <p:cNvSpPr/>
-          <p:nvPr/>
-        </p:nvSpPr>
-        <p:spPr>
-          <a:xfrm>
-            <a:off x="896112" y="4334256"/>
-            <a:ext cx="118872" cy="118872"/>
-          </a:xfrm>
-          <a:prstGeom prst="ellipse">
-            <a:avLst/>
-          </a:prstGeom>
-          <a:solidFill>
-            <a:srgbClr val="2E7B72"/>
-          </a:solidFill>
-          <a:ln w="6350">
-            <a:solidFill>
-              <a:srgbClr val="2E7B72"/>
-            </a:solidFill>
-            <a:prstDash val="solid"/>
-          </a:ln>
-        </p:spPr>
-      </p:sp>
-      <p:sp>
-        <p:nvSpPr>
-          <p:cNvPr id="32" name="Text 30"/>
-          <p:cNvSpPr/>
-          <p:nvPr/>
-        </p:nvSpPr>
-        <p:spPr>
-          <a:xfrm>
-            <a:off x="1115568" y="4187952"/>
-            <a:ext cx="3017520" cy="237744"/>
-          </a:xfrm>
-          <a:prstGeom prst="rect">
-            <a:avLst/>
-          </a:prstGeom>
-          <a:noFill/>
-          <a:ln/>
-        </p:spPr>
-        <p:txBody>
-          <a:bodyPr wrap="square" lIns="0" tIns="0" rIns="0" bIns="0" rtlCol="0" anchor="ctr"/>
-          <a:lstStyle/>
-          <a:p>
-            <a:pPr indent="0" marL="0">
-              <a:buNone/>
-            </a:pPr>
-            <a:r>
-              <a:rPr lang="en-US" sz="1200" b="1" dirty="0">
-                <a:solidFill>
-                  <a:srgbClr val="12312F"/>
-                </a:solidFill>
-                <a:latin typeface="Calibri" pitchFamily="34" charset="0"/>
-                <a:ea typeface="Calibri" pitchFamily="34" charset="-122"/>
-                <a:cs typeface="Calibri" pitchFamily="34" charset="-120"/>
-              </a:rPr>
-              <a:t>CrearLocation</a:t>
-            </a:r>
-            <a:endParaRPr lang="en-US" sz="1200" dirty="0"/>
-          </a:p>
-        </p:txBody>
-      </p:sp>
-      <p:sp>
-        <p:nvSpPr>
-          <p:cNvPr id="33" name="Text 31"/>
-          <p:cNvSpPr/>
-          <p:nvPr/>
-        </p:nvSpPr>
-        <p:spPr>
-          <a:xfrm>
-            <a:off x="1115568" y="4398264"/>
-            <a:ext cx="3017520" cy="219456"/>
-          </a:xfrm>
-          <a:prstGeom prst="rect">
-            <a:avLst/>
-          </a:prstGeom>
-          <a:noFill/>
-          <a:ln/>
-        </p:spPr>
-        <p:txBody>
-          <a:bodyPr wrap="square" lIns="0" tIns="0" rIns="0" bIns="0" rtlCol="0" anchor="ctr"/>
-          <a:lstStyle/>
-          <a:p>
-            <a:pPr indent="0" marL="0">
-              <a:buNone/>
-            </a:pPr>
-            <a:r>
-              <a:rPr lang="en-US" sz="950" dirty="0">
-                <a:solidFill>
-                  <a:srgbClr val="5F706E"/>
-                </a:solidFill>
-                <a:latin typeface="Courier New" pitchFamily="34" charset="0"/>
-                <a:ea typeface="Courier New" pitchFamily="34" charset="-122"/>
-                <a:cs typeface="Courier New" pitchFamily="34" charset="-120"/>
-              </a:rPr>
-              <a:t>LocationCreated</a:t>
-            </a:r>
-            <a:endParaRPr lang="en-US" sz="950" dirty="0"/>
-          </a:p>
-        </p:txBody>
-      </p:sp>
-      <p:sp>
-        <p:nvSpPr>
-          <p:cNvPr id="34" name="Shape 32"/>
-          <p:cNvSpPr/>
-          <p:nvPr/>
-        </p:nvSpPr>
-        <p:spPr>
-          <a:xfrm>
-            <a:off x="4206240" y="4334256"/>
-            <a:ext cx="118872" cy="118872"/>
-          </a:xfrm>
-          <a:prstGeom prst="ellipse">
-            <a:avLst/>
-          </a:prstGeom>
-          <a:solidFill>
-            <a:srgbClr val="2E7B72"/>
-          </a:solidFill>
-          <a:ln w="6350">
-            <a:solidFill>
-              <a:srgbClr val="2E7B72"/>
-            </a:solidFill>
-            <a:prstDash val="solid"/>
-          </a:ln>
-        </p:spPr>
-      </p:sp>
-      <p:sp>
-        <p:nvSpPr>
-          <p:cNvPr id="35" name="Text 33"/>
-          <p:cNvSpPr/>
-          <p:nvPr/>
-        </p:nvSpPr>
-        <p:spPr>
-          <a:xfrm>
-            <a:off x="4425696" y="4187952"/>
-            <a:ext cx="3017520" cy="237744"/>
-          </a:xfrm>
-          <a:prstGeom prst="rect">
-            <a:avLst/>
-          </a:prstGeom>
-          <a:noFill/>
-          <a:ln/>
-        </p:spPr>
-        <p:txBody>
-          <a:bodyPr wrap="square" lIns="0" tIns="0" rIns="0" bIns="0" rtlCol="0" anchor="ctr"/>
-          <a:lstStyle/>
-          <a:p>
-            <a:pPr indent="0" marL="0">
-              <a:buNone/>
-            </a:pPr>
-            <a:r>
-              <a:rPr lang="en-US" sz="1200" b="1" dirty="0">
-                <a:solidFill>
-                  <a:srgbClr val="12312F"/>
-                </a:solidFill>
-                <a:latin typeface="Calibri" pitchFamily="34" charset="0"/>
-                <a:ea typeface="Calibri" pitchFamily="34" charset="-122"/>
-                <a:cs typeface="Calibri" pitchFamily="34" charset="-120"/>
-              </a:rPr>
-              <a:t>CrearUsuario</a:t>
-            </a:r>
-            <a:endParaRPr lang="en-US" sz="1200" dirty="0"/>
-          </a:p>
-        </p:txBody>
-      </p:sp>
-      <p:sp>
-        <p:nvSpPr>
-          <p:cNvPr id="36" name="Text 34"/>
-          <p:cNvSpPr/>
-          <p:nvPr/>
-        </p:nvSpPr>
-        <p:spPr>
-          <a:xfrm>
-            <a:off x="4425696" y="4398264"/>
-            <a:ext cx="3017520" cy="219456"/>
-          </a:xfrm>
-          <a:prstGeom prst="rect">
-            <a:avLst/>
-          </a:prstGeom>
-          <a:noFill/>
-          <a:ln/>
-        </p:spPr>
-        <p:txBody>
-          <a:bodyPr wrap="square" lIns="0" tIns="0" rIns="0" bIns="0" rtlCol="0" anchor="ctr"/>
-          <a:lstStyle/>
-          <a:p>
-            <a:pPr indent="0" marL="0">
-              <a:buNone/>
-            </a:pPr>
-            <a:r>
-              <a:rPr lang="en-US" sz="950" dirty="0">
-                <a:solidFill>
-                  <a:srgbClr val="5F706E"/>
-                </a:solidFill>
-                <a:latin typeface="Courier New" pitchFamily="34" charset="0"/>
-                <a:ea typeface="Courier New" pitchFamily="34" charset="-122"/>
-                <a:cs typeface="Courier New" pitchFamily="34" charset="-120"/>
-              </a:rPr>
-              <a:t>—</a:t>
-            </a:r>
-            <a:endParaRPr lang="en-US" sz="950" dirty="0"/>
-          </a:p>
-        </p:txBody>
-      </p:sp>
-      <p:sp>
-        <p:nvSpPr>
-          <p:cNvPr id="37" name="Shape 35"/>
-          <p:cNvSpPr/>
-          <p:nvPr/>
-        </p:nvSpPr>
-        <p:spPr>
-          <a:xfrm>
-            <a:off x="896112" y="4791456"/>
-            <a:ext cx="118872" cy="118872"/>
-          </a:xfrm>
-          <a:prstGeom prst="ellipse">
-            <a:avLst/>
-          </a:prstGeom>
-          <a:solidFill>
-            <a:srgbClr val="2E7B72"/>
-          </a:solidFill>
-          <a:ln w="6350">
-            <a:solidFill>
-              <a:srgbClr val="2E7B72"/>
-            </a:solidFill>
-            <a:prstDash val="solid"/>
-          </a:ln>
-        </p:spPr>
-      </p:sp>
-      <p:sp>
-        <p:nvSpPr>
-          <p:cNvPr id="38" name="Text 36"/>
-          <p:cNvSpPr/>
-          <p:nvPr/>
-        </p:nvSpPr>
-        <p:spPr>
-          <a:xfrm>
-            <a:off x="1115568" y="4645152"/>
-            <a:ext cx="3017520" cy="237744"/>
-          </a:xfrm>
-          <a:prstGeom prst="rect">
-            <a:avLst/>
-          </a:prstGeom>
-          <a:noFill/>
-          <a:ln/>
-        </p:spPr>
-        <p:txBody>
-          <a:bodyPr wrap="square" lIns="0" tIns="0" rIns="0" bIns="0" rtlCol="0" anchor="ctr"/>
-          <a:lstStyle/>
-          <a:p>
-            <a:pPr indent="0" marL="0">
-              <a:buNone/>
-            </a:pPr>
-            <a:r>
-              <a:rPr lang="en-US" sz="1200" b="1" dirty="0">
-                <a:solidFill>
-                  <a:srgbClr val="12312F"/>
-                </a:solidFill>
-                <a:latin typeface="Calibri" pitchFamily="34" charset="0"/>
-                <a:ea typeface="Calibri" pitchFamily="34" charset="-122"/>
-                <a:cs typeface="Calibri" pitchFamily="34" charset="-120"/>
-              </a:rPr>
-              <a:t>ModificarRolUsuario</a:t>
-            </a:r>
-            <a:endParaRPr lang="en-US" sz="1200" dirty="0"/>
-          </a:p>
-        </p:txBody>
-      </p:sp>
-      <p:sp>
-        <p:nvSpPr>
-          <p:cNvPr id="39" name="Text 37"/>
-          <p:cNvSpPr/>
-          <p:nvPr/>
-        </p:nvSpPr>
-        <p:spPr>
-          <a:xfrm>
-            <a:off x="1115568" y="4855464"/>
-            <a:ext cx="3017520" cy="219456"/>
-          </a:xfrm>
-          <a:prstGeom prst="rect">
-            <a:avLst/>
-          </a:prstGeom>
-          <a:noFill/>
-          <a:ln/>
-        </p:spPr>
-        <p:txBody>
-          <a:bodyPr wrap="square" lIns="0" tIns="0" rIns="0" bIns="0" rtlCol="0" anchor="ctr"/>
-          <a:lstStyle/>
-          <a:p>
-            <a:pPr indent="0" marL="0">
-              <a:buNone/>
-            </a:pPr>
-            <a:r>
-              <a:rPr lang="en-US" sz="950" dirty="0">
-                <a:solidFill>
-                  <a:srgbClr val="5F706E"/>
-                </a:solidFill>
-                <a:latin typeface="Courier New" pitchFamily="34" charset="0"/>
-                <a:ea typeface="Courier New" pitchFamily="34" charset="-122"/>
-                <a:cs typeface="Courier New" pitchFamily="34" charset="-120"/>
-              </a:rPr>
-              <a:t>—</a:t>
-            </a:r>
-            <a:endParaRPr lang="en-US" sz="950" dirty="0"/>
-          </a:p>
-        </p:txBody>
-      </p:sp>
-      <p:sp>
-        <p:nvSpPr>
-          <p:cNvPr id="40" name="Shape 38"/>
-          <p:cNvSpPr/>
-          <p:nvPr/>
-        </p:nvSpPr>
-        <p:spPr>
-          <a:xfrm>
-            <a:off x="4206240" y="4791456"/>
-            <a:ext cx="118872" cy="118872"/>
-          </a:xfrm>
-          <a:prstGeom prst="ellipse">
-            <a:avLst/>
-          </a:prstGeom>
-          <a:solidFill>
-            <a:srgbClr val="2E7B72"/>
-          </a:solidFill>
-          <a:ln w="6350">
-            <a:solidFill>
-              <a:srgbClr val="2E7B72"/>
-            </a:solidFill>
-            <a:prstDash val="solid"/>
-          </a:ln>
-        </p:spPr>
-      </p:sp>
-      <p:sp>
-        <p:nvSpPr>
-          <p:cNvPr id="41" name="Text 39"/>
-          <p:cNvSpPr/>
-          <p:nvPr/>
-        </p:nvSpPr>
-        <p:spPr>
-          <a:xfrm>
-            <a:off x="4425696" y="4645152"/>
-            <a:ext cx="3017520" cy="237744"/>
-          </a:xfrm>
-          <a:prstGeom prst="rect">
-            <a:avLst/>
-          </a:prstGeom>
-          <a:noFill/>
-          <a:ln/>
-        </p:spPr>
-        <p:txBody>
-          <a:bodyPr wrap="square" lIns="0" tIns="0" rIns="0" bIns="0" rtlCol="0" anchor="ctr"/>
-          <a:lstStyle/>
-          <a:p>
-            <a:pPr indent="0" marL="0">
-              <a:buNone/>
-            </a:pPr>
-            <a:r>
-              <a:rPr lang="en-US" sz="1200" b="1" dirty="0">
-                <a:solidFill>
-                  <a:srgbClr val="12312F"/>
-                </a:solidFill>
-                <a:latin typeface="Calibri" pitchFamily="34" charset="0"/>
-                <a:ea typeface="Calibri" pitchFamily="34" charset="-122"/>
-                <a:cs typeface="Calibri" pitchFamily="34" charset="-120"/>
-              </a:rPr>
-              <a:t>IniciarPrestamo</a:t>
-            </a:r>
-            <a:endParaRPr lang="en-US" sz="1200" dirty="0"/>
-          </a:p>
-        </p:txBody>
-      </p:sp>
-      <p:sp>
-        <p:nvSpPr>
-          <p:cNvPr id="42" name="Text 40"/>
-          <p:cNvSpPr/>
-          <p:nvPr/>
-        </p:nvSpPr>
-        <p:spPr>
-          <a:xfrm>
-            <a:off x="4425696" y="4855464"/>
-            <a:ext cx="3017520" cy="219456"/>
-          </a:xfrm>
-          <a:prstGeom prst="rect">
-            <a:avLst/>
-          </a:prstGeom>
-          <a:noFill/>
-          <a:ln/>
-        </p:spPr>
-        <p:txBody>
-          <a:bodyPr wrap="square" lIns="0" tIns="0" rIns="0" bIns="0" rtlCol="0" anchor="ctr"/>
-          <a:lstStyle/>
-          <a:p>
-            <a:pPr indent="0" marL="0">
-              <a:buNone/>
-            </a:pPr>
-            <a:r>
-              <a:rPr lang="en-US" sz="950" dirty="0">
-                <a:solidFill>
-                  <a:srgbClr val="5F706E"/>
-                </a:solidFill>
-                <a:latin typeface="Courier New" pitchFamily="34" charset="0"/>
-                <a:ea typeface="Courier New" pitchFamily="34" charset="-122"/>
-                <a:cs typeface="Courier New" pitchFamily="34" charset="-120"/>
-              </a:rPr>
-              <a:t>LoanStarted</a:t>
-            </a:r>
-            <a:endParaRPr lang="en-US" sz="950" dirty="0"/>
-          </a:p>
-        </p:txBody>
-      </p:sp>
-      <p:sp>
-        <p:nvSpPr>
-          <p:cNvPr id="43" name="Shape 41"/>
-          <p:cNvSpPr/>
-          <p:nvPr/>
-        </p:nvSpPr>
-        <p:spPr>
-          <a:xfrm>
-            <a:off x="896112" y="5248656"/>
-            <a:ext cx="118872" cy="118872"/>
-          </a:xfrm>
-          <a:prstGeom prst="ellipse">
-            <a:avLst/>
-          </a:prstGeom>
-          <a:solidFill>
-            <a:srgbClr val="2E7B72"/>
-          </a:solidFill>
-          <a:ln w="6350">
-            <a:solidFill>
-              <a:srgbClr val="2E7B72"/>
-            </a:solidFill>
-            <a:prstDash val="solid"/>
-          </a:ln>
-        </p:spPr>
-      </p:sp>
-      <p:sp>
-        <p:nvSpPr>
-          <p:cNvPr id="44" name="Text 42"/>
-          <p:cNvSpPr/>
-          <p:nvPr/>
-        </p:nvSpPr>
-        <p:spPr>
-          <a:xfrm>
-            <a:off x="1115568" y="5102352"/>
-            <a:ext cx="3017520" cy="237744"/>
-          </a:xfrm>
-          <a:prstGeom prst="rect">
-            <a:avLst/>
-          </a:prstGeom>
-          <a:noFill/>
-          <a:ln/>
-        </p:spPr>
-        <p:txBody>
-          <a:bodyPr wrap="square" lIns="0" tIns="0" rIns="0" bIns="0" rtlCol="0" anchor="ctr"/>
-          <a:lstStyle/>
-          <a:p>
-            <a:pPr indent="0" marL="0">
-              <a:buNone/>
-            </a:pPr>
-            <a:r>
-              <a:rPr lang="en-US" sz="1200" b="1" dirty="0">
-                <a:solidFill>
-                  <a:srgbClr val="12312F"/>
-                </a:solidFill>
-                <a:latin typeface="Calibri" pitchFamily="34" charset="0"/>
-                <a:ea typeface="Calibri" pitchFamily="34" charset="-122"/>
-                <a:cs typeface="Calibri" pitchFamily="34" charset="-120"/>
-              </a:rPr>
-              <a:t>ConfirmarDevolucion</a:t>
-            </a:r>
-            <a:endParaRPr lang="en-US" sz="1200" dirty="0"/>
-          </a:p>
-        </p:txBody>
-      </p:sp>
-      <p:sp>
-        <p:nvSpPr>
-          <p:cNvPr id="45" name="Text 43"/>
-          <p:cNvSpPr/>
-          <p:nvPr/>
-        </p:nvSpPr>
-        <p:spPr>
-          <a:xfrm>
-            <a:off x="1115568" y="5312664"/>
-            <a:ext cx="3017520" cy="219456"/>
-          </a:xfrm>
-          <a:prstGeom prst="rect">
-            <a:avLst/>
-          </a:prstGeom>
-          <a:noFill/>
-          <a:ln/>
-        </p:spPr>
-        <p:txBody>
-          <a:bodyPr wrap="square" lIns="0" tIns="0" rIns="0" bIns="0" rtlCol="0" anchor="ctr"/>
-          <a:lstStyle/>
-          <a:p>
-            <a:pPr indent="0" marL="0">
-              <a:buNone/>
-            </a:pPr>
-            <a:r>
-              <a:rPr lang="en-US" sz="950" dirty="0">
-                <a:solidFill>
-                  <a:srgbClr val="5F706E"/>
-                </a:solidFill>
-                <a:latin typeface="Courier New" pitchFamily="34" charset="0"/>
-                <a:ea typeface="Courier New" pitchFamily="34" charset="-122"/>
-                <a:cs typeface="Courier New" pitchFamily="34" charset="-120"/>
-              </a:rPr>
-              <a:t>LoanReturned</a:t>
-            </a:r>
-            <a:endParaRPr lang="en-US" sz="950" dirty="0"/>
-          </a:p>
-        </p:txBody>
-      </p:sp>
-      <p:sp>
-        <p:nvSpPr>
-          <p:cNvPr id="46" name="Shape 44"/>
-          <p:cNvSpPr/>
-          <p:nvPr/>
-        </p:nvSpPr>
-        <p:spPr>
-          <a:xfrm>
-            <a:off x="4206240" y="5248656"/>
-            <a:ext cx="118872" cy="118872"/>
-          </a:xfrm>
-          <a:prstGeom prst="ellipse">
-            <a:avLst/>
-          </a:prstGeom>
-          <a:solidFill>
-            <a:srgbClr val="2E7B72"/>
-          </a:solidFill>
-          <a:ln w="6350">
-            <a:solidFill>
-              <a:srgbClr val="2E7B72"/>
-            </a:solidFill>
-            <a:prstDash val="solid"/>
-          </a:ln>
-        </p:spPr>
-      </p:sp>
-      <p:sp>
-        <p:nvSpPr>
-          <p:cNvPr id="47" name="Text 45"/>
-          <p:cNvSpPr/>
-          <p:nvPr/>
-        </p:nvSpPr>
-        <p:spPr>
-          <a:xfrm>
-            <a:off x="4425696" y="5102352"/>
-            <a:ext cx="3017520" cy="237744"/>
-          </a:xfrm>
-          <a:prstGeom prst="rect">
-            <a:avLst/>
-          </a:prstGeom>
-          <a:noFill/>
-          <a:ln/>
-        </p:spPr>
-        <p:txBody>
-          <a:bodyPr wrap="square" lIns="0" tIns="0" rIns="0" bIns="0" rtlCol="0" anchor="ctr"/>
-          <a:lstStyle/>
-          <a:p>
-            <a:pPr indent="0" marL="0">
-              <a:buNone/>
-            </a:pPr>
-            <a:r>
-              <a:rPr lang="en-US" sz="1200" b="1" dirty="0">
-                <a:solidFill>
-                  <a:srgbClr val="12312F"/>
-                </a:solidFill>
-                <a:latin typeface="Calibri" pitchFamily="34" charset="0"/>
-                <a:ea typeface="Calibri" pitchFamily="34" charset="-122"/>
-                <a:cs typeface="Calibri" pitchFamily="34" charset="-120"/>
-              </a:rPr>
-              <a:t>GenerarTokenAccesoExterno</a:t>
-            </a:r>
-            <a:endParaRPr lang="en-US" sz="1200" dirty="0"/>
-          </a:p>
-        </p:txBody>
-      </p:sp>
-      <p:sp>
-        <p:nvSpPr>
-          <p:cNvPr id="48" name="Text 46"/>
-          <p:cNvSpPr/>
-          <p:nvPr/>
-        </p:nvSpPr>
-        <p:spPr>
-          <a:xfrm>
-            <a:off x="4425696" y="5312664"/>
-            <a:ext cx="3017520" cy="219456"/>
-          </a:xfrm>
-          <a:prstGeom prst="rect">
-            <a:avLst/>
-          </a:prstGeom>
-          <a:noFill/>
-          <a:ln/>
-        </p:spPr>
-        <p:txBody>
-          <a:bodyPr wrap="square" lIns="0" tIns="0" rIns="0" bIns="0" rtlCol="0" anchor="ctr"/>
-          <a:lstStyle/>
-          <a:p>
-            <a:pPr indent="0" marL="0">
-              <a:buNone/>
-            </a:pPr>
-            <a:r>
-              <a:rPr lang="en-US" sz="950" dirty="0">
-                <a:solidFill>
-                  <a:srgbClr val="5F706E"/>
-                </a:solidFill>
-                <a:latin typeface="Courier New" pitchFamily="34" charset="0"/>
-                <a:ea typeface="Courier New" pitchFamily="34" charset="-122"/>
-                <a:cs typeface="Courier New" pitchFamily="34" charset="-120"/>
-              </a:rPr>
-              <a:t>—</a:t>
-            </a:r>
-            <a:endParaRPr lang="en-US" sz="950" dirty="0"/>
-          </a:p>
-        </p:txBody>
-      </p:sp>
-      <p:sp>
-        <p:nvSpPr>
-          <p:cNvPr id="49" name="Shape 47"/>
           <p:cNvSpPr/>
           <p:nvPr/>
         </p:nvSpPr>
@@ -11390,7 +11182,7 @@
       </p:sp>
       <p:sp>
         <p:nvSpPr>
-          <p:cNvPr id="50" name="Text 48"/>
+          <p:cNvPr id="26" name="Text 24"/>
           <p:cNvSpPr/>
           <p:nvPr/>
         </p:nvSpPr>
@@ -11421,7 +11213,7 @@
                 <a:ea typeface="Cambria" pitchFamily="34" charset="-122"/>
                 <a:cs typeface="Cambria" pitchFamily="34" charset="-120"/>
               </a:rPr>
-              <a:t>Consultas · 6</a:t>
+              <a:t>Consultas · 12</a:t>
             </a:r>
             <a:endParaRPr lang="en-US" sz="1800" dirty="0"/>
           </a:p>
@@ -11429,7 +11221,7 @@
       </p:sp>
       <p:sp>
         <p:nvSpPr>
-          <p:cNvPr id="51" name="Text 49"/>
+          <p:cNvPr id="27" name="Text 25"/>
           <p:cNvSpPr/>
           <p:nvPr/>
         </p:nvSpPr>
@@ -11468,14 +11260,14 @@
       </p:sp>
       <p:sp>
         <p:nvSpPr>
-          <p:cNvPr id="52" name="Text 50"/>
-          <p:cNvSpPr/>
-          <p:nvPr/>
-        </p:nvSpPr>
-        <p:spPr>
-          <a:xfrm>
-            <a:off x="8156448" y="2395728"/>
-            <a:ext cx="3102559" cy="2084832"/>
+          <p:cNvPr id="28" name="Text 26"/>
+          <p:cNvSpPr/>
+          <p:nvPr/>
+        </p:nvSpPr>
+        <p:spPr>
+          <a:xfrm>
+            <a:off x="8156448" y="2377440"/>
+            <a:ext cx="3102559" cy="2377440"/>
           </a:xfrm>
           <a:prstGeom prst="rect">
             <a:avLst/>
@@ -11489,159 +11281,267 @@
           <a:p>
             <a:pPr marL="342900" indent="-342900">
               <a:lnSpc>
-                <a:spcPts val="1800"/>
+                <a:spcPts val="1500"/>
               </a:lnSpc>
-              <a:spcAft>
-                <a:spcPts val="800"/>
-              </a:spcAft>
               <a:buSzPct val="100000"/>
               <a:buChar char="•"/>
             </a:pPr>
             <a:r>
-              <a:rPr lang="en-US" sz="1250" b="1" dirty="0">
+              <a:rPr lang="en-US" sz="1100" b="1" dirty="0">
                 <a:solidFill>
                   <a:srgbClr val="12312F"/>
                 </a:solidFill>
-                <a:latin typeface="Calibri" pitchFamily="34" charset="0"/>
-                <a:ea typeface="Calibri" pitchFamily="34" charset="-122"/>
-                <a:cs typeface="Calibri" pitchFamily="34" charset="-120"/>
-              </a:rPr>
-              <a:t>ListarArticulos</a:t>
-            </a:r>
-            <a:endParaRPr lang="en-US" sz="1250" dirty="0"/>
+                <a:latin typeface="Courier New" pitchFamily="34" charset="0"/>
+                <a:ea typeface="Courier New" pitchFamily="34" charset="-122"/>
+                <a:cs typeface="Courier New" pitchFamily="34" charset="-120"/>
+              </a:rPr>
+              <a:t>ListArticles</a:t>
+            </a:r>
+            <a:endParaRPr lang="en-US" sz="1100" dirty="0"/>
           </a:p>
           <a:p>
             <a:pPr marL="342900" indent="-342900">
               <a:lnSpc>
-                <a:spcPts val="1800"/>
+                <a:spcPts val="1500"/>
               </a:lnSpc>
-              <a:spcAft>
-                <a:spcPts val="800"/>
-              </a:spcAft>
               <a:buSzPct val="100000"/>
               <a:buChar char="•"/>
             </a:pPr>
             <a:r>
-              <a:rPr lang="en-US" sz="1250" b="1" dirty="0">
+              <a:rPr lang="en-US" sz="1100" b="1" dirty="0">
                 <a:solidFill>
                   <a:srgbClr val="12312F"/>
                 </a:solidFill>
-                <a:latin typeface="Calibri" pitchFamily="34" charset="0"/>
-                <a:ea typeface="Calibri" pitchFamily="34" charset="-122"/>
-                <a:cs typeface="Calibri" pitchFamily="34" charset="-120"/>
-              </a:rPr>
-              <a:t>ListarAssets</a:t>
-            </a:r>
-            <a:endParaRPr lang="en-US" sz="1250" dirty="0"/>
+                <a:latin typeface="Courier New" pitchFamily="34" charset="0"/>
+                <a:ea typeface="Courier New" pitchFamily="34" charset="-122"/>
+                <a:cs typeface="Courier New" pitchFamily="34" charset="-120"/>
+              </a:rPr>
+              <a:t>ListAssets</a:t>
+            </a:r>
+            <a:endParaRPr lang="en-US" sz="1100" dirty="0"/>
           </a:p>
           <a:p>
             <a:pPr marL="342900" indent="-342900">
               <a:lnSpc>
-                <a:spcPts val="1800"/>
+                <a:spcPts val="1500"/>
               </a:lnSpc>
-              <a:spcAft>
-                <a:spcPts val="800"/>
-              </a:spcAft>
               <a:buSzPct val="100000"/>
               <a:buChar char="•"/>
             </a:pPr>
             <a:r>
-              <a:rPr lang="en-US" sz="1250" b="1" dirty="0">
+              <a:rPr lang="en-US" sz="1100" b="1" dirty="0">
                 <a:solidFill>
                   <a:srgbClr val="12312F"/>
                 </a:solidFill>
-                <a:latin typeface="Calibri" pitchFamily="34" charset="0"/>
-                <a:ea typeface="Calibri" pitchFamily="34" charset="-122"/>
-                <a:cs typeface="Calibri" pitchFamily="34" charset="-120"/>
-              </a:rPr>
-              <a:t>ObtenerAsset / ListarHijosDeAsset</a:t>
-            </a:r>
-            <a:endParaRPr lang="en-US" sz="1250" dirty="0"/>
+                <a:latin typeface="Courier New" pitchFamily="34" charset="0"/>
+                <a:ea typeface="Courier New" pitchFamily="34" charset="-122"/>
+                <a:cs typeface="Courier New" pitchFamily="34" charset="-120"/>
+              </a:rPr>
+              <a:t>GetAsset</a:t>
+            </a:r>
+            <a:endParaRPr lang="en-US" sz="1100" dirty="0"/>
           </a:p>
           <a:p>
             <a:pPr marL="342900" indent="-342900">
               <a:lnSpc>
-                <a:spcPts val="1800"/>
+                <a:spcPts val="1500"/>
               </a:lnSpc>
-              <a:spcAft>
-                <a:spcPts val="800"/>
-              </a:spcAft>
               <a:buSzPct val="100000"/>
               <a:buChar char="•"/>
             </a:pPr>
             <a:r>
-              <a:rPr lang="en-US" sz="1250" b="1" dirty="0">
+              <a:rPr lang="en-US" sz="1100" b="1" dirty="0">
                 <a:solidFill>
                   <a:srgbClr val="12312F"/>
                 </a:solidFill>
-                <a:latin typeface="Calibri" pitchFamily="34" charset="0"/>
-                <a:ea typeface="Calibri" pitchFamily="34" charset="-122"/>
-                <a:cs typeface="Calibri" pitchFamily="34" charset="-120"/>
-              </a:rPr>
-              <a:t>ListarLocations / ObtenerLocation</a:t>
-            </a:r>
-            <a:endParaRPr lang="en-US" sz="1250" dirty="0"/>
+                <a:latin typeface="Courier New" pitchFamily="34" charset="0"/>
+                <a:ea typeface="Courier New" pitchFamily="34" charset="-122"/>
+                <a:cs typeface="Courier New" pitchFamily="34" charset="-120"/>
+              </a:rPr>
+              <a:t>ListCategories</a:t>
+            </a:r>
+            <a:endParaRPr lang="en-US" sz="1100" dirty="0"/>
           </a:p>
           <a:p>
             <a:pPr marL="342900" indent="-342900">
               <a:lnSpc>
-                <a:spcPts val="1800"/>
+                <a:spcPts val="1500"/>
               </a:lnSpc>
-              <a:spcAft>
-                <a:spcPts val="800"/>
-              </a:spcAft>
               <a:buSzPct val="100000"/>
               <a:buChar char="•"/>
             </a:pPr>
             <a:r>
-              <a:rPr lang="en-US" sz="1250" b="1" dirty="0">
+              <a:rPr lang="en-US" sz="1100" b="1" dirty="0">
                 <a:solidFill>
                   <a:srgbClr val="12312F"/>
                 </a:solidFill>
-                <a:latin typeface="Calibri" pitchFamily="34" charset="0"/>
-                <a:ea typeface="Calibri" pitchFamily="34" charset="-122"/>
-                <a:cs typeface="Calibri" pitchFamily="34" charset="-120"/>
-              </a:rPr>
-              <a:t>ListarUsuarios</a:t>
-            </a:r>
-            <a:endParaRPr lang="en-US" sz="1250" dirty="0"/>
+                <a:latin typeface="Courier New" pitchFamily="34" charset="0"/>
+                <a:ea typeface="Courier New" pitchFamily="34" charset="-122"/>
+                <a:cs typeface="Courier New" pitchFamily="34" charset="-120"/>
+              </a:rPr>
+              <a:t>ListLocations</a:t>
+            </a:r>
+            <a:endParaRPr lang="en-US" sz="1100" dirty="0"/>
           </a:p>
           <a:p>
             <a:pPr marL="342900" indent="-342900">
               <a:lnSpc>
-                <a:spcPts val="1800"/>
+                <a:spcPts val="1500"/>
               </a:lnSpc>
-              <a:spcAft>
-                <a:spcPts val="800"/>
-              </a:spcAft>
               <a:buSzPct val="100000"/>
               <a:buChar char="•"/>
             </a:pPr>
             <a:r>
-              <a:rPr lang="en-US" sz="1250" b="1" dirty="0">
+              <a:rPr lang="en-US" sz="1100" b="1" dirty="0">
                 <a:solidFill>
                   <a:srgbClr val="12312F"/>
                 </a:solidFill>
-                <a:latin typeface="Calibri" pitchFamily="34" charset="0"/>
-                <a:ea typeface="Calibri" pitchFamily="34" charset="-122"/>
-                <a:cs typeface="Calibri" pitchFamily="34" charset="-120"/>
-              </a:rPr>
-              <a:t>ObtenerPrestamo</a:t>
-            </a:r>
-            <a:endParaRPr lang="en-US" sz="1250" dirty="0"/>
-          </a:p>
-        </p:txBody>
-      </p:sp>
-      <p:sp>
-        <p:nvSpPr>
-          <p:cNvPr id="53" name="Text 51"/>
-          <p:cNvSpPr/>
-          <p:nvPr/>
-        </p:nvSpPr>
-        <p:spPr>
-          <a:xfrm>
-            <a:off x="8156448" y="4526280"/>
-            <a:ext cx="3102559" cy="1005840"/>
+                <a:latin typeface="Courier New" pitchFamily="34" charset="0"/>
+                <a:ea typeface="Courier New" pitchFamily="34" charset="-122"/>
+                <a:cs typeface="Courier New" pitchFamily="34" charset="-120"/>
+              </a:rPr>
+              <a:t>ListUsers</a:t>
+            </a:r>
+            <a:endParaRPr lang="en-US" sz="1100" dirty="0"/>
+          </a:p>
+          <a:p>
+            <a:pPr marL="342900" indent="-342900">
+              <a:lnSpc>
+                <a:spcPts val="1500"/>
+              </a:lnSpc>
+              <a:buSzPct val="100000"/>
+              <a:buChar char="•"/>
+            </a:pPr>
+            <a:r>
+              <a:rPr lang="en-US" sz="1100" b="1" dirty="0">
+                <a:solidFill>
+                  <a:srgbClr val="12312F"/>
+                </a:solidFill>
+                <a:latin typeface="Courier New" pitchFamily="34" charset="0"/>
+                <a:ea typeface="Courier New" pitchFamily="34" charset="-122"/>
+                <a:cs typeface="Courier New" pitchFamily="34" charset="-120"/>
+              </a:rPr>
+              <a:t>ListInvitations</a:t>
+            </a:r>
+            <a:endParaRPr lang="en-US" sz="1100" dirty="0"/>
+          </a:p>
+          <a:p>
+            <a:pPr marL="342900" indent="-342900">
+              <a:lnSpc>
+                <a:spcPts val="1500"/>
+              </a:lnSpc>
+              <a:buSzPct val="100000"/>
+              <a:buChar char="•"/>
+            </a:pPr>
+            <a:r>
+              <a:rPr lang="en-US" sz="1100" b="1" dirty="0">
+                <a:solidFill>
+                  <a:srgbClr val="12312F"/>
+                </a:solidFill>
+                <a:latin typeface="Courier New" pitchFamily="34" charset="0"/>
+                <a:ea typeface="Courier New" pitchFamily="34" charset="-122"/>
+                <a:cs typeface="Courier New" pitchFamily="34" charset="-120"/>
+              </a:rPr>
+              <a:t>GetLoan</a:t>
+            </a:r>
+            <a:endParaRPr lang="en-US" sz="1100" dirty="0"/>
+          </a:p>
+          <a:p>
+            <a:pPr marL="342900" indent="-342900">
+              <a:lnSpc>
+                <a:spcPts val="1500"/>
+              </a:lnSpc>
+              <a:buSzPct val="100000"/>
+              <a:buChar char="•"/>
+            </a:pPr>
+            <a:r>
+              <a:rPr lang="en-US" sz="1100" b="1" dirty="0">
+                <a:solidFill>
+                  <a:srgbClr val="12312F"/>
+                </a:solidFill>
+                <a:latin typeface="Courier New" pitchFamily="34" charset="0"/>
+                <a:ea typeface="Courier New" pitchFamily="34" charset="-122"/>
+                <a:cs typeface="Courier New" pitchFamily="34" charset="-120"/>
+              </a:rPr>
+              <a:t>ListDocuments</a:t>
+            </a:r>
+            <a:endParaRPr lang="en-US" sz="1100" dirty="0"/>
+          </a:p>
+          <a:p>
+            <a:pPr marL="342900" indent="-342900">
+              <a:lnSpc>
+                <a:spcPts val="1500"/>
+              </a:lnSpc>
+              <a:buSzPct val="100000"/>
+              <a:buChar char="•"/>
+            </a:pPr>
+            <a:r>
+              <a:rPr lang="en-US" sz="1100" b="1" dirty="0">
+                <a:solidFill>
+                  <a:srgbClr val="12312F"/>
+                </a:solidFill>
+                <a:latin typeface="Courier New" pitchFamily="34" charset="0"/>
+                <a:ea typeface="Courier New" pitchFamily="34" charset="-122"/>
+                <a:cs typeface="Courier New" pitchFamily="34" charset="-120"/>
+              </a:rPr>
+              <a:t>ListFiles</a:t>
+            </a:r>
+            <a:endParaRPr lang="en-US" sz="1100" dirty="0"/>
+          </a:p>
+          <a:p>
+            <a:pPr marL="342900" indent="-342900">
+              <a:lnSpc>
+                <a:spcPts val="1500"/>
+              </a:lnSpc>
+              <a:buSzPct val="100000"/>
+              <a:buChar char="•"/>
+            </a:pPr>
+            <a:r>
+              <a:rPr lang="en-US" sz="1100" b="1" dirty="0">
+                <a:solidFill>
+                  <a:srgbClr val="12312F"/>
+                </a:solidFill>
+                <a:latin typeface="Courier New" pitchFamily="34" charset="0"/>
+                <a:ea typeface="Courier New" pitchFamily="34" charset="-122"/>
+                <a:cs typeface="Courier New" pitchFamily="34" charset="-120"/>
+              </a:rPr>
+              <a:t>DownloadFile</a:t>
+            </a:r>
+            <a:endParaRPr lang="en-US" sz="1100" dirty="0"/>
+          </a:p>
+          <a:p>
+            <a:pPr marL="342900" indent="-342900">
+              <a:lnSpc>
+                <a:spcPts val="1500"/>
+              </a:lnSpc>
+              <a:buSzPct val="100000"/>
+              <a:buChar char="•"/>
+            </a:pPr>
+            <a:r>
+              <a:rPr lang="en-US" sz="1100" b="1" dirty="0">
+                <a:solidFill>
+                  <a:srgbClr val="12312F"/>
+                </a:solidFill>
+                <a:latin typeface="Courier New" pitchFamily="34" charset="0"/>
+                <a:ea typeface="Courier New" pitchFamily="34" charset="-122"/>
+                <a:cs typeface="Courier New" pitchFamily="34" charset="-120"/>
+              </a:rPr>
+              <a:t>GetStorageUsage</a:t>
+            </a:r>
+            <a:endParaRPr lang="en-US" sz="1100" dirty="0"/>
+          </a:p>
+        </p:txBody>
+      </p:sp>
+      <p:sp>
+        <p:nvSpPr>
+          <p:cNvPr id="29" name="Text 27"/>
+          <p:cNvSpPr/>
+          <p:nvPr/>
+        </p:nvSpPr>
+        <p:spPr>
+          <a:xfrm>
+            <a:off x="8156448" y="4800600"/>
+            <a:ext cx="3102559" cy="914400"/>
           </a:xfrm>
           <a:prstGeom prst="rect">
             <a:avLst/>
@@ -11676,7 +11576,7 @@
       </p:sp>
       <p:sp>
         <p:nvSpPr>
-          <p:cNvPr id="54" name="Text 52"/>
+          <p:cNvPr id="30" name="Text 28"/>
           <p:cNvSpPr/>
           <p:nvPr/>
         </p:nvSpPr>
@@ -11715,7 +11615,7 @@
       </p:sp>
       <p:sp>
         <p:nvSpPr>
-          <p:cNvPr id="55" name="Text 53"/>
+          <p:cNvPr id="31" name="Text 29"/>
           <p:cNvSpPr/>
           <p:nvPr/>
         </p:nvSpPr>
@@ -13170,7 +13070,7 @@
               <a:buNone/>
             </a:pPr>
             <a:r>
-              <a:rPr lang="en-US" sz="1250" dirty="0">
+              <a:rPr lang="en-US" sz="1200" dirty="0">
                 <a:solidFill>
                   <a:srgbClr val="CFE1DE"/>
                 </a:solidFill>
@@ -13178,9 +13078,9 @@
                 <a:ea typeface="Calibri" pitchFamily="34" charset="-122"/>
                 <a:cs typeface="Calibri" pitchFamily="34" charset="-120"/>
               </a:rPr>
-              <a:t>Cuatro ADR recogen el porqué y las alternativas descartadas: monolito modular · Kotlin + Spring Boot · Row-Level Security · Flyway</a:t>
-            </a:r>
-            <a:endParaRPr lang="en-US" sz="1250" dirty="0"/>
+              <a:t>Cinco ADR recogen el porqué y las alternativas descartadas: monolito modular · Kotlin + Spring Boot · Row-Level Security · Flyway · almacenamiento local de ficheros</a:t>
+            </a:r>
+            <a:endParaRPr lang="en-US" sz="1200" dirty="0"/>
           </a:p>
         </p:txBody>
       </p:sp>
@@ -13676,7 +13576,7 @@
                 <a:ea typeface="Calibri" pitchFamily="34" charset="-122"/>
                 <a:cs typeface="Calibri" pitchFamily="34" charset="-120"/>
               </a:rPr>
-              <a:t>Orquestación completa con dependencias reales o en memoria. Ej.: CrearAsset persiste y publica AssetCreated.</a:t>
+              <a:t>Orquestación completa con dependencias reales o en memoria. Ej.: CreateAsset persiste y publica AssetCreated.</a:t>
             </a:r>
             <a:endParaRPr lang="en-US" sz="1150" dirty="0"/>
           </a:p>
@@ -19916,7 +19816,7 @@
                 <a:ea typeface="Calibri" pitchFamily="34" charset="-122"/>
                 <a:cs typeface="Calibri" pitchFamily="34" charset="-120"/>
               </a:rPr>
-              <a:t>DURADERO</a:t>
+              <a:t>DURABLE</a:t>
             </a:r>
             <a:endParaRPr lang="en-US" sz="1300" dirty="0"/>
           </a:p>
@@ -20301,7 +20201,7 @@
                 <a:ea typeface="Calibri" pitchFamily="34" charset="-122"/>
                 <a:cs typeface="Calibri" pitchFamily="34" charset="-120"/>
               </a:rPr>
-              <a:t>CONSUMIBLE</a:t>
+              <a:t>CONSUMABLE</a:t>
             </a:r>
             <a:endParaRPr lang="en-US" sz="1300" dirty="0"/>
           </a:p>
@@ -20586,7 +20486,7 @@
                 <a:ea typeface="Calibri" pitchFamily="34" charset="-122"/>
                 <a:cs typeface="Calibri" pitchFamily="34" charset="-120"/>
               </a:rPr>
-              <a:t>Nunca está PRESTADO; llegar a cantidad 0 no lo da de baja.</a:t>
+              <a:t>Nunca está LENT; llegar a cantidad 0 no lo da de baja.</a:t>
             </a:r>
             <a:endParaRPr lang="en-US" sz="1200" dirty="0"/>
           </a:p>
@@ -20875,7 +20775,7 @@
                 <a:ea typeface="Calibri" pitchFamily="34" charset="-122"/>
                 <a:cs typeface="Calibri" pitchFamily="34" charset="-120"/>
               </a:rPr>
-              <a:t>Un artículo no es un asset: no ocupa sitio, no tiene cantidad y no se presta. Es obligatorio en un CONSUMIBLE y opcional en un DURADERO, donde permite compartir modelo y documentación entre unidades idénticas.</a:t>
+              <a:t>Un artículo no es un asset: no ocupa sitio, no tiene cantidad y no se presta. Es obligatorio en un CONSUMABLE y opcional en un DURABLE, donde permite compartir modelo y documentación entre unidades idénticas.</a:t>
             </a:r>
             <a:endParaRPr lang="en-US" sz="1400" dirty="0"/>
           </a:p>
@@ -20948,7 +20848,7 @@
                 <a:ea typeface="Cambria" pitchFamily="34" charset="-122"/>
                 <a:cs typeface="Cambria" pitchFamily="34" charset="-120"/>
               </a:rPr>
-              <a:t>Articulo</a:t>
+              <a:t>Artículo</a:t>
             </a:r>
             <a:endParaRPr lang="en-US" sz="1900" dirty="0"/>
           </a:p>
@@ -20987,7 +20887,7 @@
                 <a:ea typeface="Courier New" pitchFamily="34" charset="-122"/>
                 <a:cs typeface="Courier New" pitchFamily="34" charset="-120"/>
               </a:rPr>
-              <a:t>tabla catalog_items</a:t>
+              <a:t>tabla articles</a:t>
             </a:r>
             <a:endParaRPr lang="en-US" sz="1050" dirty="0"/>
           </a:p>
@@ -21029,7 +20929,7 @@
                 <a:ea typeface="Calibri" pitchFamily="34" charset="-122"/>
                 <a:cs typeface="Calibri" pitchFamily="34" charset="-120"/>
               </a:rPr>
-              <a:t>nombre · Azúcar</a:t>
+              <a:t>name · Azúcar</a:t>
             </a:r>
             <a:endParaRPr lang="en-US" sz="1250" dirty="0"/>
           </a:p>
@@ -21049,7 +20949,7 @@
                 <a:ea typeface="Calibri" pitchFamily="34" charset="-122"/>
                 <a:cs typeface="Calibri" pitchFamily="34" charset="-120"/>
               </a:rPr>
-              <a:t>categoria · ALIMENTACION</a:t>
+              <a:t>categoryId · Alimentación</a:t>
             </a:r>
             <a:endParaRPr lang="en-US" sz="1250" dirty="0"/>
           </a:p>
@@ -21069,7 +20969,7 @@
                 <a:ea typeface="Calibri" pitchFamily="34" charset="-122"/>
                 <a:cs typeface="Calibri" pitchFamily="34" charset="-120"/>
               </a:rPr>
-              <a:t>unidad · GRAMO</a:t>
+              <a:t>unit · GRAM</a:t>
             </a:r>
             <a:endParaRPr lang="en-US" sz="1250" dirty="0"/>
           </a:p>
@@ -21089,7 +20989,7 @@
                 <a:ea typeface="Calibri" pitchFamily="34" charset="-122"/>
                 <a:cs typeface="Calibri" pitchFamily="34" charset="-120"/>
               </a:rPr>
-              <a:t>marca, codigoBarras (opcionales)</a:t>
+              <a:t>brand, barcode (opcionales)</a:t>
             </a:r>
             <a:endParaRPr lang="en-US" sz="1250" dirty="0"/>
           </a:p>
@@ -21226,7 +21126,7 @@
                 <a:ea typeface="Calibri" pitchFamily="34" charset="-122"/>
                 <a:cs typeface="Calibri" pitchFamily="34" charset="-120"/>
               </a:rPr>
-              <a:t>Asset CONSUMIBLE</a:t>
+              <a:t>Asset CONSUMABLE</a:t>
             </a:r>
             <a:endParaRPr lang="en-US" sz="1000" dirty="0"/>
           </a:p>
@@ -21433,7 +21333,7 @@
                 <a:ea typeface="Calibri" pitchFamily="34" charset="-122"/>
                 <a:cs typeface="Calibri" pitchFamily="34" charset="-120"/>
               </a:rPr>
-              <a:t>Asset CONSUMIBLE</a:t>
+              <a:t>Asset CONSUMABLE</a:t>
             </a:r>
             <a:endParaRPr lang="en-US" sz="1000" dirty="0"/>
           </a:p>
@@ -21789,7 +21689,7 @@
                 <a:ea typeface="Calibri" pitchFamily="34" charset="-122"/>
                 <a:cs typeface="Calibri" pitchFamily="34" charset="-120"/>
               </a:rPr>
-              <a:t>Índice único parcial con NULLS NOT DISTINCT que excluye estado = BAJA.</a:t>
+              <a:t>Índice único parcial con NULLS NOT DISTINCT que excluye status = DECOMMISSIONED.</a:t>
             </a:r>
             <a:endParaRPr lang="en-US" sz="1150" dirty="0"/>
           </a:p>
@@ -21900,7 +21800,7 @@
                 <a:ea typeface="Calibri" pitchFamily="34" charset="-122"/>
                 <a:cs typeface="Calibri" pitchFamily="34" charset="-120"/>
               </a:rPr>
-              <a:t>RegistrarEntradaConsumible acumula; la cantidad del PATCH es absoluta.</a:t>
+              <a:t>RegisterConsumableIntake acumula; la cantidad del PATCH es absoluta.</a:t>
             </a:r>
             <a:endParaRPr lang="en-US" sz="1150" dirty="0"/>
           </a:p>
@@ -22604,7 +22504,7 @@
                 <a:ea typeface="Calibri" pitchFamily="34" charset="-122"/>
                 <a:cs typeface="Calibri" pitchFamily="34" charset="-120"/>
               </a:rPr>
-              <a:t>estado = BAJA; nada se borra. No se da de baja con hijos o préstamo activo.</a:t>
+              <a:t>status = DECOMMISSIONED; nada se borra. No se da de baja con hijos o préstamo abierto.</a:t>
             </a:r>
             <a:endParaRPr lang="en-US" sz="1200" dirty="0"/>
           </a:p>
@@ -22734,7 +22634,7 @@
                 <a:ea typeface="Calibri" pitchFamily="34" charset="-122"/>
                 <a:cs typeface="Calibri" pitchFamily="34" charset="-120"/>
               </a:rPr>
-              <a:t>Solo un DURADERO ubica y se presta</a:t>
+              <a:t>Solo un DURABLE ubica y se presta</a:t>
             </a:r>
             <a:endParaRPr lang="en-US" sz="1450" dirty="0"/>
           </a:p>
@@ -23134,8 +23034,8 @@
         </p:nvSpPr>
         <p:spPr>
           <a:xfrm>
-            <a:off x="548640" y="5669280"/>
-            <a:ext cx="11094415" cy="411480"/>
+            <a:off x="548640" y="5632704"/>
+            <a:ext cx="11094415" cy="512064"/>
           </a:xfrm>
           <a:prstGeom prst="rect">
             <a:avLst/>
@@ -23162,7 +23062,7 @@
                 <a:ea typeface="Calibri" pitchFamily="34" charset="-122"/>
                 <a:cs typeface="Calibri" pitchFamily="34" charset="-120"/>
               </a:rPr>
-              <a:t>Juntar dos existencias del mismo artículo creadas por separado es FusionarExistencias, no un MoverAsset: la fusión decide qué ubicación y qué propietario sobreviven, y eso lo elige el usuario.</a:t>
+              <a:t>Juntar dos existencias del mismo artículo creadas por separado es MergeStockItems, no un MoveAsset: la fusión decide qué ubicación y qué propietario sobreviven, y eso lo elige el usuario.</a:t>
             </a:r>
             <a:endParaRPr lang="en-US" sz="1250" dirty="0"/>
           </a:p>

--- a/docs/common/marketing/DRP-resumen.pptx
+++ b/docs/common/marketing/DRP-resumen.pptx
@@ -796,7 +796,7 @@
           <a:p>
             <a:r>
               <a:rPr lang="en-US" dirty="0"/>
-              <a:t>Portada. Resumen del README.md de DRP (estado 2026-08-07): Fase 0 completada, sin decisiones de diseño abiertas.</a:t>
+              <a:t>Portada. Resumen del README.md de DRP (estado 2026-08-10): Fase 0 cerrada y Fase 1 (Core MVP) en curso.</a:t>
             </a:r>
             <a:endParaRPr lang="en-US" dirty="0"/>
           </a:p>
@@ -1324,7 +1324,7 @@
           <a:p>
             <a:r>
               <a:rPr lang="en-US" dirty="0"/>
-              <a:t>README §6 y ADR-001 a ADR-004.</a:t>
+              <a:t>README §6 y ADR-001 a ADR-009.</a:t>
             </a:r>
             <a:endParaRPr lang="en-US" dirty="0"/>
           </a:p>
@@ -1500,7 +1500,7 @@
           <a:p>
             <a:r>
               <a:rPr lang="en-US" dirty="0"/>
-              <a:t>README §8: roadmap y estado. Fase 0 cerrada el 2026-08-07.</a:t>
+              <a:t>README §8: roadmap y estado. Fase 0 cerrada el 2026-08-07; Fase 1 arrancada el 2026-08-10, con su alcance y sus cinco hitos en la §8.2.</a:t>
             </a:r>
             <a:endParaRPr lang="en-US" dirty="0"/>
           </a:p>
@@ -1588,7 +1588,7 @@
           <a:p>
             <a:r>
               <a:rPr lang="en-US" dirty="0"/>
-              <a:t>README §8, §9 y §11: cierre de la Fase 0 y arranque de la Fase 1.</a:t>
+              <a:t>README §8.2: alcance, hitos y criterio de aceptación de la Fase 1.</a:t>
             </a:r>
             <a:endParaRPr lang="en-US" dirty="0"/>
           </a:p>
@@ -2794,7 +2794,7 @@
         <p:spPr>
           <a:xfrm>
             <a:off x="868680" y="4526280"/>
-            <a:ext cx="1732788" cy="384048"/>
+            <a:ext cx="1559052" cy="384048"/>
           </a:xfrm>
           <a:prstGeom prst="roundRect">
             <a:avLst>
@@ -2821,7 +2821,7 @@
         <p:spPr>
           <a:xfrm>
             <a:off x="868680" y="4526280"/>
-            <a:ext cx="1732788" cy="384048"/>
+            <a:ext cx="1559052" cy="384048"/>
           </a:xfrm>
           <a:prstGeom prst="rect">
             <a:avLst/>
@@ -2845,7 +2845,7 @@
                 <a:ea typeface="Calibri" pitchFamily="34" charset="-122"/>
                 <a:cs typeface="Calibri" pitchFamily="34" charset="-120"/>
               </a:rPr>
-              <a:t>Fase 0 completada</a:t>
+              <a:t>Fase 1 en curso</a:t>
             </a:r>
             <a:endParaRPr lang="en-US" sz="1150" dirty="0"/>
           </a:p>
@@ -2859,8 +2859,8 @@
         </p:nvSpPr>
         <p:spPr>
           <a:xfrm>
-            <a:off x="2766060" y="4526280"/>
-            <a:ext cx="1732788" cy="384048"/>
+            <a:off x="2592324" y="4526280"/>
+            <a:ext cx="950976" cy="384048"/>
           </a:xfrm>
           <a:prstGeom prst="roundRect">
             <a:avLst>
@@ -2886,8 +2886,8 @@
         </p:nvSpPr>
         <p:spPr>
           <a:xfrm>
-            <a:off x="2766060" y="4526280"/>
-            <a:ext cx="1732788" cy="384048"/>
+            <a:off x="2592324" y="4526280"/>
+            <a:ext cx="950976" cy="384048"/>
           </a:xfrm>
           <a:prstGeom prst="rect">
             <a:avLst/>
@@ -2911,7 +2911,7 @@
                 <a:ea typeface="Calibri" pitchFamily="34" charset="-122"/>
                 <a:cs typeface="Calibri" pitchFamily="34" charset="-120"/>
               </a:rPr>
-              <a:t>Fase 1 · Core MVP</a:t>
+              <a:t>Core MVP</a:t>
             </a:r>
             <a:endParaRPr lang="en-US" sz="1150" dirty="0"/>
           </a:p>
@@ -2925,7 +2925,7 @@
         </p:nvSpPr>
         <p:spPr>
           <a:xfrm>
-            <a:off x="4663440" y="4526280"/>
+            <a:off x="3707892" y="4526280"/>
             <a:ext cx="1124712" cy="384048"/>
           </a:xfrm>
           <a:prstGeom prst="roundRect">
@@ -2952,7 +2952,7 @@
         </p:nvSpPr>
         <p:spPr>
           <a:xfrm>
-            <a:off x="4663440" y="4526280"/>
+            <a:off x="3707892" y="4526280"/>
             <a:ext cx="1124712" cy="384048"/>
           </a:xfrm>
           <a:prstGeom prst="rect">
@@ -2977,7 +2977,7 @@
                 <a:ea typeface="Calibri" pitchFamily="34" charset="-122"/>
                 <a:cs typeface="Calibri" pitchFamily="34" charset="-120"/>
               </a:rPr>
-              <a:t>2026-08-07</a:t>
+              <a:t>2026-08-10</a:t>
             </a:r>
             <a:endParaRPr lang="en-US" sz="1150" dirty="0"/>
           </a:p>
@@ -4487,7 +4487,7 @@
                 <a:ea typeface="Calibri" pitchFamily="34" charset="-122"/>
                 <a:cs typeface="Calibri" pitchFamily="34" charset="-120"/>
               </a:rPr>
-              <a:t>Frontend Web · TypeScript + React · mobile-first, de 375 px a ultrawide</a:t>
+              <a:t>Frontend Web · React sobre Vite · mobile-first, de 375 px a ultrawide</a:t>
             </a:r>
             <a:endParaRPr lang="en-US" sz="1500" dirty="0"/>
           </a:p>
@@ -4811,7 +4811,7 @@
                 <a:ea typeface="Calibri" pitchFamily="34" charset="-122"/>
                 <a:cs typeface="Calibri" pitchFamily="34" charset="-120"/>
               </a:rPr>
-              <a:t>Eventos temporales</a:t>
+              <a:t>Warehouse</a:t>
             </a:r>
             <a:endParaRPr lang="en-US" sz="1350" dirty="0"/>
           </a:p>
@@ -4939,7 +4939,7 @@
                 <a:ea typeface="Calibri" pitchFamily="34" charset="-122"/>
                 <a:cs typeface="Calibri" pitchFamily="34" charset="-120"/>
               </a:rPr>
-              <a:t>CMMS</a:t>
+              <a:t>Mantenimiento</a:t>
             </a:r>
             <a:endParaRPr lang="en-US" sz="1350" dirty="0"/>
           </a:p>
@@ -5067,7 +5067,7 @@
                 <a:ea typeface="Calibri" pitchFamily="34" charset="-122"/>
                 <a:cs typeface="Calibri" pitchFamily="34" charset="-120"/>
               </a:rPr>
-              <a:t>Warehouse</a:t>
+              <a:t>Compras</a:t>
             </a:r>
             <a:endParaRPr lang="en-US" sz="1350" dirty="0"/>
           </a:p>
@@ -5195,7 +5195,7 @@
                 <a:ea typeface="Calibri" pitchFamily="34" charset="-122"/>
                 <a:cs typeface="Calibri" pitchFamily="34" charset="-120"/>
               </a:rPr>
-              <a:t>Planificador</a:t>
+              <a:t>Proveedores</a:t>
             </a:r>
             <a:endParaRPr lang="en-US" sz="1350" dirty="0"/>
           </a:p>
@@ -10709,7 +10709,7 @@
                 <a:ea typeface="Calibri" pitchFamily="34" charset="-122"/>
                 <a:cs typeface="Calibri" pitchFamily="34" charset="-120"/>
               </a:rPr>
-              <a:t>Contrato definido; librería por definir</a:t>
+              <a:t>Puerto propio sobre Spring, sin dependencia añadida</a:t>
             </a:r>
             <a:endParaRPr lang="en-US" sz="1100" dirty="0"/>
           </a:p>
@@ -11023,7 +11023,7 @@
                 <a:ea typeface="Calibri" pitchFamily="34" charset="-122"/>
                 <a:cs typeface="Calibri" pitchFamily="34" charset="-120"/>
               </a:rPr>
-              <a:t>openapi.yaml + ejemplos en el README</a:t>
+              <a:t>openapi.yaml es la fuente de verdad de la API</a:t>
             </a:r>
             <a:endParaRPr lang="en-US" sz="1100" dirty="0"/>
           </a:p>
@@ -11138,7 +11138,7 @@
                 <a:ea typeface="Cambria" pitchFamily="34" charset="-122"/>
                 <a:cs typeface="Cambria" pitchFamily="34" charset="-120"/>
               </a:rPr>
-              <a:t>TypeScript + React</a:t>
+              <a:t>React sobre Vite</a:t>
             </a:r>
             <a:endParaRPr lang="en-US" sz="1550" dirty="0"/>
           </a:p>
@@ -11180,7 +11180,7 @@
                 <a:ea typeface="Calibri" pitchFamily="34" charset="-122"/>
                 <a:cs typeface="Calibri" pitchFamily="34" charset="-120"/>
               </a:rPr>
-              <a:t>Mobile-first, de 375 px a ultrawide</a:t>
+              <a:t>Mobile-first, de 375 px a ultrawide; WCAG 2.2 AA</a:t>
             </a:r>
             <a:endParaRPr lang="en-US" sz="1100" dirty="0"/>
           </a:p>
@@ -11295,7 +11295,7 @@
                 <a:ea typeface="Cambria" pitchFamily="34" charset="-122"/>
                 <a:cs typeface="Cambria" pitchFamily="34" charset="-120"/>
               </a:rPr>
-              <a:t>Por definir</a:t>
+              <a:t>JUnit 5 + Testcontainers</a:t>
             </a:r>
             <a:endParaRPr lang="en-US" sz="1550" dirty="0"/>
           </a:p>
@@ -11337,7 +11337,7 @@
                 <a:ea typeface="Calibri" pitchFamily="34" charset="-122"/>
                 <a:cs typeface="Calibri" pitchFamily="34" charset="-120"/>
               </a:rPr>
-              <a:t>Kotest/JUnit5 + Testcontainers, Vitest/Jest</a:t>
+              <a:t>Vitest y Playwright en el frontend</a:t>
             </a:r>
             <a:endParaRPr lang="en-US" sz="1100" dirty="0"/>
           </a:p>
@@ -11395,7 +11395,7 @@
               <a:buNone/>
             </a:pPr>
             <a:r>
-              <a:rPr lang="en-US" sz="1250" dirty="0">
+              <a:rPr lang="en-US" sz="1100" dirty="0">
                 <a:solidFill>
                   <a:srgbClr val="CFE1DE"/>
                 </a:solidFill>
@@ -11403,9 +11403,9 @@
                 <a:ea typeface="Calibri" pitchFamily="34" charset="-122"/>
                 <a:cs typeface="Calibri" pitchFamily="34" charset="-120"/>
               </a:rPr>
-              <a:t>Cuatro ADR recogen el porqué y las alternativas descartadas: monolito modular · Kotlin + Spring Boot · Row-Level Security · Flyway</a:t>
-            </a:r>
-            <a:endParaRPr lang="en-US" sz="1250" dirty="0"/>
+              <a:t>Nueve ADR recogen el porqué y las alternativas descartadas: monolito modular · Spring Boot · Row-Level Security · Flyway · ficheros en disco · React + Vite · contrato como fuente de verdad · monorepo · correo saliente</a:t>
+            </a:r>
+            <a:endParaRPr lang="en-US" sz="1100" dirty="0"/>
           </a:p>
         </p:txBody>
       </p:sp>
@@ -12744,7 +12744,7 @@
                 <a:ea typeface="Calibri" pitchFamily="34" charset="-122"/>
                 <a:cs typeface="Calibri" pitchFamily="34" charset="-120"/>
               </a:rPr>
-              <a:t>Assets, autenticación, API REST, event bus y FE responsive básico</a:t>
+              <a:t>Assets, autenticación, API REST, event bus y cliente web completo del core</a:t>
             </a:r>
             <a:endParaRPr lang="en-US" sz="1200" dirty="0"/>
           </a:p>
@@ -12810,7 +12810,7 @@
                 <a:ea typeface="Calibri" pitchFamily="34" charset="-122"/>
                 <a:cs typeface="Calibri" pitchFamily="34" charset="-120"/>
               </a:rPr>
-              <a:t>Siguiente</a:t>
+              <a:t>En curso</a:t>
             </a:r>
             <a:endParaRPr lang="en-US" sz="1050" dirty="0"/>
           </a:p>
@@ -13024,7 +13024,7 @@
                 <a:ea typeface="Calibri" pitchFamily="34" charset="-122"/>
                 <a:cs typeface="Calibri" pitchFamily="34" charset="-120"/>
               </a:rPr>
-              <a:t>Candidato por definir: CMMS o Warehouse</a:t>
+              <a:t>Candidato a definir entre los cuatro de prioridad alta</a:t>
             </a:r>
             <a:endParaRPr lang="en-US" sz="1200" dirty="0"/>
           </a:p>
@@ -13600,7 +13600,7 @@
                 <a:ea typeface="Cambria" pitchFamily="34" charset="-122"/>
                 <a:cs typeface="Cambria" pitchFamily="34" charset="-120"/>
               </a:rPr>
-              <a:t>La Fase 0 queda cerrada</a:t>
+              <a:t>La Fase 1 está en marcha</a:t>
             </a:r>
             <a:endParaRPr lang="en-US" sz="3200" dirty="0"/>
           </a:p>
@@ -13642,7 +13642,7 @@
                 <a:ea typeface="Calibri" pitchFamily="34" charset="-122"/>
                 <a:cs typeface="Calibri" pitchFamily="34" charset="-120"/>
               </a:rPr>
-              <a:t>No hay decisiones de diseño abiertas: modelo de datos, casos de uso, autenticación y contratos de API están definidos.</a:t>
+              <a:t>Con la definición cerrada y el andamiaje en pie, lo que queda es construir: el core completo, entregado en hitos que atraviesan las capas en vertical.</a:t>
             </a:r>
             <a:endParaRPr lang="en-US" sz="1500" dirty="0"/>
           </a:p>
@@ -14177,7 +14177,7 @@
                 <a:ea typeface="Cambria" pitchFamily="34" charset="-122"/>
                 <a:cs typeface="Cambria" pitchFamily="34" charset="-120"/>
               </a:rPr>
-              <a:t>Primera tarea de la Fase 1</a:t>
+              <a:t>Hito 0, ya cerrado</a:t>
             </a:r>
             <a:endParaRPr lang="en-US" sz="1700" dirty="0"/>
           </a:p>
@@ -14219,7 +14219,7 @@
                 <a:ea typeface="Calibri" pitchFamily="34" charset="-122"/>
                 <a:cs typeface="Calibri" pitchFamily="34" charset="-120"/>
               </a:rPr>
-              <a:t>Repartir a docs/ las secciones del README que corresponden por ámbito: 4.1.x, 5.4.3, 5.6 y 5.7, dejando aquí un resumen y el enlace.</a:t>
+              <a:t>Monorepo, integración continua, contrato saneado y el reparto del README a docs/, que la Fase 0 había aplazado a propósito.</a:t>
             </a:r>
             <a:endParaRPr lang="en-US" sz="1250" dirty="0"/>
           </a:p>
@@ -14327,7 +14327,7 @@
                 <a:ea typeface="Calibri" pitchFamily="34" charset="-122"/>
                 <a:cs typeface="Calibri" pitchFamily="34" charset="-120"/>
               </a:rPr>
-              <a:t>CMMS doméstico y Warehouse, ambos por diseñar. El resto queda en backlog abierto.</a:t>
+              <a:t>Warehouse, mantenimiento (CMMS), compras y proveedores, los cuatro por diseñar. El resto queda en backlog abierto.</a:t>
             </a:r>
             <a:endParaRPr lang="en-US" sz="1250" dirty="0"/>
           </a:p>
@@ -14366,7 +14366,7 @@
                 <a:ea typeface="Calibri" pitchFamily="34" charset="-122"/>
                 <a:cs typeface="Calibri" pitchFamily="34" charset="-120"/>
               </a:rPr>
-              <a:t>Fuente: README.md · documento vivo, última actualización 2026-08-07</a:t>
+              <a:t>Fuente: README.md · documento vivo, última actualización 2026-08-10</a:t>
             </a:r>
             <a:endParaRPr lang="en-US" sz="1100" dirty="0"/>
           </a:p>
@@ -22352,7 +22352,7 @@
                 <a:ea typeface="Calibri" pitchFamily="34" charset="-122"/>
                 <a:cs typeface="Calibri" pitchFamily="34" charset="-120"/>
               </a:rPr>
-              <a:t>Si se informa capacidad, el sistema debería avisar al superarla (bloquear o no, por definir)</a:t>
+              <a:t>Si se informa capacidad, superarla advierte pero no bloquea: el sistema solo cuenta unidades con certeza</a:t>
             </a:r>
             <a:endParaRPr lang="en-US" sz="1300" dirty="0"/>
           </a:p>

--- a/docs/common/marketing/DRP-resumen.pptx
+++ b/docs/common/marketing/DRP-resumen.pptx
@@ -797,7 +797,7 @@
           <a:p>
             <a:r>
               <a:rPr lang="en-US" dirty="0"/>
-              <a:t>Portada. Resumen del README.md de DRP (estado 2026-08-10): Fase 0 cerrada y Fase 1 (Core MVP) en curso, con el Hito 0 completado.</a:t>
+              <a:t>Portada. Resumen del README.md de DRP (estado 2026-08-19): Fases 0, 1 y 2 cerradas. El core completo y los cuatro módulos de prioridad alta, activables hogar por hogar.</a:t>
             </a:r>
             <a:endParaRPr lang="en-US" dirty="0"/>
           </a:p>
@@ -973,7 +973,7 @@
           <a:p>
             <a:r>
               <a:rPr lang="en-US" dirty="0"/>
-              <a:t>README §4.2: módulos futuros activables, cada uno con estado y prioridad. Trece filas, sin fila de backlog.</a:t>
+              <a:t>README §4.2: módulos activables, cada uno con estado y prioridad. Trece filas, sin fila de backlog. Los cuatro de prioridad alta se construyeron en la Fase 2 y están en desarrollo; los nueve restantes siguen por diseñar.</a:t>
             </a:r>
             <a:endParaRPr lang="en-US" dirty="0"/>
           </a:p>
@@ -1061,7 +1061,7 @@
           <a:p>
             <a:r>
               <a:rPr lang="en-US" dirty="0"/>
-              <a:t>README §5.1: visión de componentes. Los módulos punteados son opcionales y van agrupados por prioridad, como en el diagrama del README; el detalle de los trece está en la diapositiva anterior.</a:t>
+              <a:t>README §5.1: visión de componentes. Los módulos punteados siguen por diseñar; los de trazo continuo están construidos. El detalle de los trece está en la diapositiva anterior. La Fase 2 añadió las fronteras de paquete por módulo y la activación por hogar (ADR-010).</a:t>
             </a:r>
             <a:endParaRPr lang="en-US" dirty="0"/>
           </a:p>
@@ -1413,7 +1413,7 @@
           <a:p>
             <a:r>
               <a:rPr lang="en-US" dirty="0"/>
-              <a:t>README §6 y ADR-001 a ADR-009.</a:t>
+              <a:t>README §6 y ADR-001 a ADR-011. Las dos últimas llegaron con la Fase 2: fronteras de módulo y activación por hogar, y programación de comprobaciones y entrega de avisos.</a:t>
             </a:r>
             <a:endParaRPr lang="en-US" dirty="0"/>
           </a:p>
@@ -1589,7 +1589,7 @@
           <a:p>
             <a:r>
               <a:rPr lang="en-US" dirty="0"/>
-              <a:t>README §8: roadmap y estado. Fase 0 cerrada el 2026-08-07; Fase 1 arrancada el 2026-08-10, con sus cinco hitos en docs/common/product/roadmap.md.</a:t>
+              <a:t>README §8: roadmap y estado. Fase 0 cerrada el 2026-08-07, Fase 1 el 2026-08-17 y Fase 2 el 2026-08-19. El detalle de cada una vive en su propio roadmap, en docs/common/product/.</a:t>
             </a:r>
             <a:endParaRPr lang="en-US" dirty="0"/>
           </a:p>
@@ -1677,7 +1677,7 @@
           <a:p>
             <a:r>
               <a:rPr lang="en-US" dirty="0"/>
-              <a:t>README §8, §9 y §11: cierre de la Fase 0 y arranque de la Fase 1.</a:t>
+              <a:t>README §8, §9 y §11: cierre de la Fase 2 y lo que queda para la Fase 3, que todavía no está planificada.</a:t>
             </a:r>
             <a:endParaRPr lang="en-US" dirty="0"/>
           </a:p>
@@ -2883,7 +2883,7 @@
         <p:spPr>
           <a:xfrm>
             <a:off x="868680" y="4526280"/>
-            <a:ext cx="1559052" cy="384048"/>
+            <a:ext cx="1993392" cy="384048"/>
           </a:xfrm>
           <a:prstGeom prst="roundRect">
             <a:avLst>
@@ -2910,7 +2910,7 @@
         <p:spPr>
           <a:xfrm>
             <a:off x="868680" y="4526280"/>
-            <a:ext cx="1559052" cy="384048"/>
+            <a:ext cx="1993392" cy="384048"/>
           </a:xfrm>
           <a:prstGeom prst="rect">
             <a:avLst/>
@@ -2934,7 +2934,7 @@
                 <a:ea typeface="Calibri" pitchFamily="34" charset="-122"/>
                 <a:cs typeface="Calibri" pitchFamily="34" charset="-120"/>
               </a:rPr>
-              <a:t>Fase 1 en curso</a:t>
+              <a:t>Fases 1 y 2 cerradas</a:t>
             </a:r>
             <a:endParaRPr lang="en-US" sz="1150" dirty="0"/>
           </a:p>
@@ -2948,8 +2948,8 @@
         </p:nvSpPr>
         <p:spPr>
           <a:xfrm>
-            <a:off x="2592324" y="4526280"/>
-            <a:ext cx="950976" cy="384048"/>
+            <a:off x="3026664" y="4526280"/>
+            <a:ext cx="1645920" cy="384048"/>
           </a:xfrm>
           <a:prstGeom prst="roundRect">
             <a:avLst>
@@ -2975,8 +2975,8 @@
         </p:nvSpPr>
         <p:spPr>
           <a:xfrm>
-            <a:off x="2592324" y="4526280"/>
-            <a:ext cx="950976" cy="384048"/>
+            <a:off x="3026664" y="4526280"/>
+            <a:ext cx="1645920" cy="384048"/>
           </a:xfrm>
           <a:prstGeom prst="rect">
             <a:avLst/>
@@ -3000,7 +3000,7 @@
                 <a:ea typeface="Calibri" pitchFamily="34" charset="-122"/>
                 <a:cs typeface="Calibri" pitchFamily="34" charset="-120"/>
               </a:rPr>
-              <a:t>Core MVP</a:t>
+              <a:t>Core + 4 módulos</a:t>
             </a:r>
             <a:endParaRPr lang="en-US" sz="1150" dirty="0"/>
           </a:p>
@@ -3014,7 +3014,7 @@
         </p:nvSpPr>
         <p:spPr>
           <a:xfrm>
-            <a:off x="3707892" y="4526280"/>
+            <a:off x="4837176" y="4526280"/>
             <a:ext cx="1124712" cy="384048"/>
           </a:xfrm>
           <a:prstGeom prst="roundRect">
@@ -3041,7 +3041,7 @@
         </p:nvSpPr>
         <p:spPr>
           <a:xfrm>
-            <a:off x="3707892" y="4526280"/>
+            <a:off x="4837176" y="4526280"/>
             <a:ext cx="1124712" cy="384048"/>
           </a:xfrm>
           <a:prstGeom prst="rect">
@@ -3066,7 +3066,7 @@
                 <a:ea typeface="Calibri" pitchFamily="34" charset="-122"/>
                 <a:cs typeface="Calibri" pitchFamily="34" charset="-120"/>
               </a:rPr>
-              <a:t>2026-08-10</a:t>
+              <a:t>2026-08-19</a:t>
             </a:r>
             <a:endParaRPr lang="en-US" sz="1150" dirty="0"/>
           </a:p>
@@ -4479,7 +4479,7 @@
                 <a:ea typeface="Calibri" pitchFamily="34" charset="-122"/>
                 <a:cs typeface="Calibri" pitchFamily="34" charset="-120"/>
               </a:rPr>
-              <a:t>MÓDULOS FUTUROS</a:t>
+              <a:t>MÓDULOS</a:t>
             </a:r>
             <a:endParaRPr lang="en-US" sz="1100" dirty="0"/>
           </a:p>
@@ -4518,7 +4518,7 @@
                 <a:ea typeface="Cambria" pitchFamily="34" charset="-122"/>
                 <a:cs typeface="Cambria" pitchFamily="34" charset="-120"/>
               </a:rPr>
-              <a:t>Trece módulos, activables por prioridad</a:t>
+              <a:t>Trece, activables por hogar — cuatro ya construidos</a:t>
             </a:r>
             <a:endParaRPr lang="en-US" sz="3200" dirty="0"/>
           </a:p>
@@ -4557,7 +4557,7 @@
                 <a:ea typeface="Calibri" pitchFamily="34" charset="-122"/>
                 <a:cs typeface="Calibri" pitchFamily="34" charset="-120"/>
               </a:rPr>
-              <a:t>Ninguno es obligatorio: el core funciona con todos desactivados. Cada uno se activa cuando el hogar lo necesita.</a:t>
+              <a:t>Ninguno es obligatorio: el core funciona con todos apagados. Los enciende el administrador de su hogar, y apagarlos conserva los datos.</a:t>
             </a:r>
             <a:endParaRPr lang="en-US" sz="1400" dirty="0"/>
           </a:p>
@@ -4623,7 +4623,7 @@
                 <a:ea typeface="Calibri" pitchFamily="34" charset="-122"/>
                 <a:cs typeface="Calibri" pitchFamily="34" charset="-120"/>
               </a:rPr>
-              <a:t>PRIORIDAD ALTA</a:t>
+              <a:t>ALTA · HECHOS</a:t>
             </a:r>
             <a:endParaRPr lang="en-US" sz="1050" dirty="0"/>
           </a:p>
@@ -5064,7 +5064,7 @@
                 <a:ea typeface="Calibri" pitchFamily="34" charset="-122"/>
                 <a:cs typeface="Calibri" pitchFamily="34" charset="-120"/>
               </a:rPr>
-              <a:t>CMMS doméstico</a:t>
+              <a:t>Mantenimiento (CMMS)</a:t>
             </a:r>
             <a:endParaRPr lang="en-US" sz="1250" dirty="0"/>
           </a:p>
@@ -5106,7 +5106,7 @@
                 <a:ea typeface="Calibri" pitchFamily="34" charset="-122"/>
                 <a:cs typeface="Calibri" pitchFamily="34" charset="-120"/>
               </a:rPr>
-              <a:t>Mantenimiento preventivo y correctivo: planes, avisos e histórico.</a:t>
+              <a:t>Preventivo y correctivo: planes, avisos que se rearman e histórico.</a:t>
             </a:r>
             <a:endParaRPr lang="en-US" sz="1050" dirty="0"/>
           </a:p>
@@ -6105,7 +6105,7 @@
                 <a:ea typeface="Calibri" pitchFamily="34" charset="-122"/>
                 <a:cs typeface="Calibri" pitchFamily="34" charset="-120"/>
               </a:rPr>
-              <a:t>La lista no está cerrada, pero ya no hay cajón de sastre: un candidato entra con estado y prioridad propios, o no entra.</a:t>
+              <a:t>Los cuatro de prioridad alta son el alcance entero de la Fase 2 y siguen en desarrollo: el código está, el despliegue todavía no. La lista no está cerrada, pero no hay cajón de sastre.</a:t>
             </a:r>
             <a:endParaRPr lang="en-US" sz="1300" dirty="0"/>
           </a:p>
@@ -6640,11 +6640,11 @@
             </a:avLst>
           </a:prstGeom>
           <a:solidFill>
-            <a:srgbClr val="163A38"/>
+            <a:srgbClr val="1C4644"/>
           </a:solidFill>
           <a:ln w="12700">
             <a:solidFill>
-              <a:srgbClr val="2F5754"/>
+              <a:srgbClr val="7FC8BE"/>
             </a:solidFill>
             <a:prstDash val="solid"/>
           </a:ln>
@@ -6677,7 +6677,7 @@
             <a:r>
               <a:rPr lang="en-US" sz="1350" b="1" dirty="0">
                 <a:solidFill>
-                  <a:srgbClr val="BFD3D0"/>
+                  <a:srgbClr val="FFFFFF"/>
                 </a:solidFill>
                 <a:latin typeface="Calibri" pitchFamily="34" charset="0"/>
                 <a:ea typeface="Calibri" pitchFamily="34" charset="-122"/>
@@ -6714,15 +6714,15 @@
               <a:buNone/>
             </a:pPr>
             <a:r>
-              <a:rPr lang="en-US" sz="1050" i="1" dirty="0">
-                <a:solidFill>
-                  <a:srgbClr val="7E9B98"/>
-                </a:solidFill>
-                <a:latin typeface="Calibri" pitchFamily="34" charset="0"/>
-                <a:ea typeface="Calibri" pitchFamily="34" charset="-122"/>
-                <a:cs typeface="Calibri" pitchFamily="34" charset="-120"/>
-              </a:rPr>
-              <a:t>4 módulos · opcionales</a:t>
+              <a:rPr lang="en-US" sz="1050" dirty="0">
+                <a:solidFill>
+                  <a:srgbClr val="7FC8BE"/>
+                </a:solidFill>
+                <a:latin typeface="Calibri" pitchFamily="34" charset="0"/>
+                <a:ea typeface="Calibri" pitchFamily="34" charset="-122"/>
+                <a:cs typeface="Calibri" pitchFamily="34" charset="-120"/>
+              </a:rPr>
+              <a:t>4 módulos · construidos</a:t>
             </a:r>
             <a:endParaRPr lang="en-US" sz="1050" dirty="0"/>
           </a:p>
@@ -6747,7 +6747,7 @@
             <a:solidFill>
               <a:srgbClr val="3C6663"/>
             </a:solidFill>
-            <a:prstDash val="dash"/>
+            <a:prstDash val="solid"/>
           </a:ln>
         </p:spPr>
       </p:sp>
@@ -12698,7 +12698,7 @@
                 <a:ea typeface="Calibri" pitchFamily="34" charset="-122"/>
                 <a:cs typeface="Calibri" pitchFamily="34" charset="-120"/>
               </a:rPr>
-              <a:t>openapi.yaml es la fuente de verdad de la API</a:t>
+              <a:t>openapi.yaml, 98 operaciones, fuente de verdad</a:t>
             </a:r>
             <a:endParaRPr lang="en-US" sz="1100" dirty="0"/>
           </a:p>
@@ -13078,7 +13078,7 @@
                 <a:ea typeface="Calibri" pitchFamily="34" charset="-122"/>
                 <a:cs typeface="Calibri" pitchFamily="34" charset="-120"/>
               </a:rPr>
-              <a:t>Nueve ADR recogen el porqué y las alternativas descartadas: monolito modular · Spring Boot · Row-Level Security · Flyway · ficheros en disco · React + Vite · contrato como fuente de verdad · monorepo · correo saliente</a:t>
+              <a:t>Once ADR recogen el porqué y lo descartado: monolito modular · Spring Boot · Row-Level Security · Flyway · ficheros en disco · React + Vite · contrato como fuente de verdad · monorepo · correo saliente · fronteras de módulo · comprobaciones periódicas y avisos</a:t>
             </a:r>
             <a:endParaRPr lang="en-US" sz="1100" dirty="0"/>
           </a:p>
@@ -14253,11 +14253,11 @@
             <a:avLst/>
           </a:prstGeom>
           <a:solidFill>
-            <a:srgbClr val="C25A32"/>
+            <a:srgbClr val="2E7B72"/>
           </a:solidFill>
           <a:ln w="6350">
             <a:solidFill>
-              <a:srgbClr val="C25A32"/>
+              <a:srgbClr val="2E7B72"/>
             </a:solidFill>
             <a:prstDash val="solid"/>
           </a:ln>
@@ -14442,11 +14442,11 @@
             </a:avLst>
           </a:prstGeom>
           <a:solidFill>
-            <a:srgbClr val="C25A32"/>
+            <a:srgbClr val="2E7B72"/>
           </a:solidFill>
           <a:ln w="6350">
             <a:solidFill>
-              <a:srgbClr val="C25A32"/>
+              <a:srgbClr val="2E7B72"/>
             </a:solidFill>
             <a:prstDash val="solid"/>
           </a:ln>
@@ -14485,7 +14485,7 @@
                 <a:ea typeface="Calibri" pitchFamily="34" charset="-122"/>
                 <a:cs typeface="Calibri" pitchFamily="34" charset="-120"/>
               </a:rPr>
-              <a:t>En curso</a:t>
+              <a:t>Completada</a:t>
             </a:r>
             <a:endParaRPr lang="en-US" sz="1050" dirty="0"/>
           </a:p>
@@ -14500,6 +14500,293 @@
         <p:spPr>
           <a:xfrm>
             <a:off x="6181344" y="1691640"/>
+            <a:ext cx="2651760" cy="3246120"/>
+          </a:xfrm>
+          <a:prstGeom prst="roundRect">
+            <a:avLst>
+              <a:gd name="adj" fmla="val 3103"/>
+            </a:avLst>
+          </a:prstGeom>
+          <a:solidFill>
+            <a:srgbClr val="EFF4F2"/>
+          </a:solidFill>
+          <a:ln w="6350">
+            <a:solidFill>
+              <a:srgbClr val="EFF4F2"/>
+            </a:solidFill>
+            <a:prstDash val="solid"/>
+          </a:ln>
+          <a:effectLst>
+            <a:outerShdw sx="100000" sy="100000" kx="0" ky="0" algn="bl" rotWithShape="0" blurRad="127000" dist="25400" dir="5400000">
+              <a:srgbClr val="0B1F1E">
+                <a:alpha val="10000"/>
+              </a:srgbClr>
+            </a:outerShdw>
+          </a:effectLst>
+        </p:spPr>
+      </p:sp>
+      <p:sp>
+        <p:nvSpPr>
+          <p:cNvPr id="21" name="Shape 19"/>
+          <p:cNvSpPr/>
+          <p:nvPr/>
+        </p:nvSpPr>
+        <p:spPr>
+          <a:xfrm>
+            <a:off x="6437376" y="1965960"/>
+            <a:ext cx="512064" cy="512064"/>
+          </a:xfrm>
+          <a:prstGeom prst="ellipse">
+            <a:avLst/>
+          </a:prstGeom>
+          <a:solidFill>
+            <a:srgbClr val="2E7B72"/>
+          </a:solidFill>
+          <a:ln w="6350">
+            <a:solidFill>
+              <a:srgbClr val="2E7B72"/>
+            </a:solidFill>
+            <a:prstDash val="solid"/>
+          </a:ln>
+        </p:spPr>
+      </p:sp>
+      <p:sp>
+        <p:nvSpPr>
+          <p:cNvPr id="22" name="Text 20"/>
+          <p:cNvSpPr/>
+          <p:nvPr/>
+        </p:nvSpPr>
+        <p:spPr>
+          <a:xfrm>
+            <a:off x="6437376" y="1965960"/>
+            <a:ext cx="512064" cy="512064"/>
+          </a:xfrm>
+          <a:prstGeom prst="rect">
+            <a:avLst/>
+          </a:prstGeom>
+          <a:noFill/>
+          <a:ln/>
+        </p:spPr>
+        <p:txBody>
+          <a:bodyPr wrap="square" lIns="0" tIns="0" rIns="0" bIns="0" rtlCol="0" anchor="ctr"/>
+          <a:lstStyle/>
+          <a:p>
+            <a:pPr algn="ctr" indent="0" marL="0">
+              <a:buNone/>
+            </a:pPr>
+            <a:r>
+              <a:rPr lang="en-US" sz="1500" b="1" dirty="0">
+                <a:solidFill>
+                  <a:srgbClr val="FFFFFF"/>
+                </a:solidFill>
+                <a:latin typeface="Calibri" pitchFamily="34" charset="0"/>
+                <a:ea typeface="Calibri" pitchFamily="34" charset="-122"/>
+                <a:cs typeface="Calibri" pitchFamily="34" charset="-120"/>
+              </a:rPr>
+              <a:t>2</a:t>
+            </a:r>
+            <a:endParaRPr lang="en-US" sz="1500" dirty="0"/>
+          </a:p>
+        </p:txBody>
+      </p:sp>
+      <p:sp>
+        <p:nvSpPr>
+          <p:cNvPr id="23" name="Text 21"/>
+          <p:cNvSpPr/>
+          <p:nvPr/>
+        </p:nvSpPr>
+        <p:spPr>
+          <a:xfrm>
+            <a:off x="7095744" y="1984248"/>
+            <a:ext cx="1463040" cy="475488"/>
+          </a:xfrm>
+          <a:prstGeom prst="rect">
+            <a:avLst/>
+          </a:prstGeom>
+          <a:noFill/>
+          <a:ln/>
+        </p:spPr>
+        <p:txBody>
+          <a:bodyPr wrap="square" lIns="0" tIns="0" rIns="0" bIns="0" rtlCol="0" anchor="ctr"/>
+          <a:lstStyle/>
+          <a:p>
+            <a:pPr indent="0" marL="0">
+              <a:buNone/>
+            </a:pPr>
+            <a:r>
+              <a:rPr lang="en-US" sz="1200" b="1" spc="100" kern="0" dirty="0">
+                <a:solidFill>
+                  <a:srgbClr val="5F706E"/>
+                </a:solidFill>
+                <a:latin typeface="Calibri" pitchFamily="34" charset="0"/>
+                <a:ea typeface="Calibri" pitchFamily="34" charset="-122"/>
+                <a:cs typeface="Calibri" pitchFamily="34" charset="-120"/>
+              </a:rPr>
+              <a:t>Fase 2</a:t>
+            </a:r>
+            <a:endParaRPr lang="en-US" sz="1200" dirty="0"/>
+          </a:p>
+        </p:txBody>
+      </p:sp>
+      <p:sp>
+        <p:nvSpPr>
+          <p:cNvPr id="24" name="Text 22"/>
+          <p:cNvSpPr/>
+          <p:nvPr/>
+        </p:nvSpPr>
+        <p:spPr>
+          <a:xfrm>
+            <a:off x="6437376" y="2606040"/>
+            <a:ext cx="2139696" cy="731520"/>
+          </a:xfrm>
+          <a:prstGeom prst="rect">
+            <a:avLst/>
+          </a:prstGeom>
+          <a:noFill/>
+          <a:ln/>
+        </p:spPr>
+        <p:txBody>
+          <a:bodyPr wrap="square" lIns="0" tIns="0" rIns="0" bIns="0" rtlCol="0" anchor="t"/>
+          <a:lstStyle/>
+          <a:p>
+            <a:pPr indent="0" marL="0">
+              <a:lnSpc>
+                <a:spcPts val="2300"/>
+              </a:lnSpc>
+              <a:buNone/>
+            </a:pPr>
+            <a:r>
+              <a:rPr lang="en-US" sz="1800" b="1" dirty="0">
+                <a:solidFill>
+                  <a:srgbClr val="12312F"/>
+                </a:solidFill>
+                <a:latin typeface="Cambria" pitchFamily="34" charset="0"/>
+                <a:ea typeface="Cambria" pitchFamily="34" charset="-122"/>
+                <a:cs typeface="Cambria" pitchFamily="34" charset="-120"/>
+              </a:rPr>
+              <a:t>Módulos activables</a:t>
+            </a:r>
+            <a:endParaRPr lang="en-US" sz="1800" dirty="0"/>
+          </a:p>
+        </p:txBody>
+      </p:sp>
+      <p:sp>
+        <p:nvSpPr>
+          <p:cNvPr id="25" name="Text 23"/>
+          <p:cNvSpPr/>
+          <p:nvPr/>
+        </p:nvSpPr>
+        <p:spPr>
+          <a:xfrm>
+            <a:off x="6437376" y="3383280"/>
+            <a:ext cx="2139696" cy="960120"/>
+          </a:xfrm>
+          <a:prstGeom prst="rect">
+            <a:avLst/>
+          </a:prstGeom>
+          <a:noFill/>
+          <a:ln/>
+        </p:spPr>
+        <p:txBody>
+          <a:bodyPr wrap="square" lIns="0" tIns="0" rIns="0" bIns="0" rtlCol="0" anchor="t"/>
+          <a:lstStyle/>
+          <a:p>
+            <a:pPr indent="0" marL="0">
+              <a:lnSpc>
+                <a:spcPts val="1700"/>
+              </a:lnSpc>
+              <a:buNone/>
+            </a:pPr>
+            <a:r>
+              <a:rPr lang="en-US" sz="1200" dirty="0">
+                <a:solidFill>
+                  <a:srgbClr val="5F706E"/>
+                </a:solidFill>
+                <a:latin typeface="Calibri" pitchFamily="34" charset="0"/>
+                <a:ea typeface="Calibri" pitchFamily="34" charset="-122"/>
+                <a:cs typeface="Calibri" pitchFamily="34" charset="-120"/>
+              </a:rPr>
+              <a:t>Activación por hogar, plataforma de avisos y los cuatro módulos de prioridad alta</a:t>
+            </a:r>
+            <a:endParaRPr lang="en-US" sz="1200" dirty="0"/>
+          </a:p>
+        </p:txBody>
+      </p:sp>
+      <p:sp>
+        <p:nvSpPr>
+          <p:cNvPr id="26" name="Shape 24"/>
+          <p:cNvSpPr/>
+          <p:nvPr/>
+        </p:nvSpPr>
+        <p:spPr>
+          <a:xfrm>
+            <a:off x="6437376" y="4389120"/>
+            <a:ext cx="1417320" cy="329184"/>
+          </a:xfrm>
+          <a:prstGeom prst="roundRect">
+            <a:avLst>
+              <a:gd name="adj" fmla="val 50000"/>
+            </a:avLst>
+          </a:prstGeom>
+          <a:solidFill>
+            <a:srgbClr val="2E7B72"/>
+          </a:solidFill>
+          <a:ln w="6350">
+            <a:solidFill>
+              <a:srgbClr val="2E7B72"/>
+            </a:solidFill>
+            <a:prstDash val="solid"/>
+          </a:ln>
+        </p:spPr>
+      </p:sp>
+      <p:sp>
+        <p:nvSpPr>
+          <p:cNvPr id="27" name="Text 25"/>
+          <p:cNvSpPr/>
+          <p:nvPr/>
+        </p:nvSpPr>
+        <p:spPr>
+          <a:xfrm>
+            <a:off x="6437376" y="4389120"/>
+            <a:ext cx="1417320" cy="329184"/>
+          </a:xfrm>
+          <a:prstGeom prst="rect">
+            <a:avLst/>
+          </a:prstGeom>
+          <a:noFill/>
+          <a:ln/>
+        </p:spPr>
+        <p:txBody>
+          <a:bodyPr wrap="square" lIns="0" tIns="0" rIns="0" bIns="0" rtlCol="0" anchor="ctr"/>
+          <a:lstStyle/>
+          <a:p>
+            <a:pPr algn="ctr" indent="0" marL="0">
+              <a:buNone/>
+            </a:pPr>
+            <a:r>
+              <a:rPr lang="en-US" sz="1050" b="1" dirty="0">
+                <a:solidFill>
+                  <a:srgbClr val="FFFFFF"/>
+                </a:solidFill>
+                <a:latin typeface="Calibri" pitchFamily="34" charset="0"/>
+                <a:ea typeface="Calibri" pitchFamily="34" charset="-122"/>
+                <a:cs typeface="Calibri" pitchFamily="34" charset="-120"/>
+              </a:rPr>
+              <a:t>Completada</a:t>
+            </a:r>
+            <a:endParaRPr lang="en-US" sz="1050" dirty="0"/>
+          </a:p>
+        </p:txBody>
+      </p:sp>
+      <p:sp>
+        <p:nvSpPr>
+          <p:cNvPr id="28" name="Shape 26"/>
+          <p:cNvSpPr/>
+          <p:nvPr/>
+        </p:nvSpPr>
+        <p:spPr>
+          <a:xfrm>
+            <a:off x="8997696" y="1691640"/>
             <a:ext cx="2651760" cy="3246120"/>
           </a:xfrm>
           <a:prstGeom prst="roundRect">
@@ -14520,13 +14807,13 @@
       </p:sp>
       <p:sp>
         <p:nvSpPr>
-          <p:cNvPr id="21" name="Shape 19"/>
-          <p:cNvSpPr/>
-          <p:nvPr/>
-        </p:nvSpPr>
-        <p:spPr>
-          <a:xfrm>
-            <a:off x="6437376" y="1965960"/>
+          <p:cNvPr id="29" name="Shape 27"/>
+          <p:cNvSpPr/>
+          <p:nvPr/>
+        </p:nvSpPr>
+        <p:spPr>
+          <a:xfrm>
+            <a:off x="9253728" y="1965960"/>
             <a:ext cx="512064" cy="512064"/>
           </a:xfrm>
           <a:prstGeom prst="ellipse">
@@ -14545,13 +14832,13 @@
       </p:sp>
       <p:sp>
         <p:nvSpPr>
-          <p:cNvPr id="22" name="Text 20"/>
-          <p:cNvSpPr/>
-          <p:nvPr/>
-        </p:nvSpPr>
-        <p:spPr>
-          <a:xfrm>
-            <a:off x="6437376" y="1965960"/>
+          <p:cNvPr id="30" name="Text 28"/>
+          <p:cNvSpPr/>
+          <p:nvPr/>
+        </p:nvSpPr>
+        <p:spPr>
+          <a:xfrm>
+            <a:off x="9253728" y="1965960"/>
             <a:ext cx="512064" cy="512064"/>
           </a:xfrm>
           <a:prstGeom prst="rect">
@@ -14576,7 +14863,7 @@
                 <a:ea typeface="Calibri" pitchFamily="34" charset="-122"/>
                 <a:cs typeface="Calibri" pitchFamily="34" charset="-120"/>
               </a:rPr>
-              <a:t>2</a:t>
+              <a:t>3</a:t>
             </a:r>
             <a:endParaRPr lang="en-US" sz="1500" dirty="0"/>
           </a:p>
@@ -14584,13 +14871,13 @@
       </p:sp>
       <p:sp>
         <p:nvSpPr>
-          <p:cNvPr id="23" name="Text 21"/>
-          <p:cNvSpPr/>
-          <p:nvPr/>
-        </p:nvSpPr>
-        <p:spPr>
-          <a:xfrm>
-            <a:off x="7095744" y="1984248"/>
+          <p:cNvPr id="31" name="Text 29"/>
+          <p:cNvSpPr/>
+          <p:nvPr/>
+        </p:nvSpPr>
+        <p:spPr>
+          <a:xfrm>
+            <a:off x="9912096" y="1984248"/>
             <a:ext cx="1463040" cy="475488"/>
           </a:xfrm>
           <a:prstGeom prst="rect">
@@ -14615,7 +14902,7 @@
                 <a:ea typeface="Calibri" pitchFamily="34" charset="-122"/>
                 <a:cs typeface="Calibri" pitchFamily="34" charset="-120"/>
               </a:rPr>
-              <a:t>Fase 2</a:t>
+              <a:t>Fase 3</a:t>
             </a:r>
             <a:endParaRPr lang="en-US" sz="1200" dirty="0"/>
           </a:p>
@@ -14623,13 +14910,13 @@
       </p:sp>
       <p:sp>
         <p:nvSpPr>
-          <p:cNvPr id="24" name="Text 22"/>
-          <p:cNvSpPr/>
-          <p:nvPr/>
-        </p:nvSpPr>
-        <p:spPr>
-          <a:xfrm>
-            <a:off x="6437376" y="2606040"/>
+          <p:cNvPr id="32" name="Text 30"/>
+          <p:cNvSpPr/>
+          <p:nvPr/>
+        </p:nvSpPr>
+        <p:spPr>
+          <a:xfrm>
+            <a:off x="9253728" y="2606040"/>
             <a:ext cx="2139696" cy="731520"/>
           </a:xfrm>
           <a:prstGeom prst="rect">
@@ -14657,7 +14944,7 @@
                 <a:ea typeface="Cambria" pitchFamily="34" charset="-122"/>
                 <a:cs typeface="Cambria" pitchFamily="34" charset="-120"/>
               </a:rPr>
-              <a:t>Primer módulo</a:t>
+              <a:t>Módulos adicionales</a:t>
             </a:r>
             <a:endParaRPr lang="en-US" sz="1800" dirty="0"/>
           </a:p>
@@ -14665,13 +14952,13 @@
       </p:sp>
       <p:sp>
         <p:nvSpPr>
-          <p:cNvPr id="25" name="Text 23"/>
-          <p:cNvSpPr/>
-          <p:nvPr/>
-        </p:nvSpPr>
-        <p:spPr>
-          <a:xfrm>
-            <a:off x="6437376" y="3383280"/>
+          <p:cNvPr id="33" name="Text 31"/>
+          <p:cNvSpPr/>
+          <p:nvPr/>
+        </p:nvSpPr>
+        <p:spPr>
+          <a:xfrm>
+            <a:off x="9253728" y="3383280"/>
             <a:ext cx="2139696" cy="960120"/>
           </a:xfrm>
           <a:prstGeom prst="rect">
@@ -14699,7 +14986,7 @@
                 <a:ea typeface="Calibri" pitchFamily="34" charset="-122"/>
                 <a:cs typeface="Calibri" pitchFamily="34" charset="-120"/>
               </a:rPr>
-              <a:t>Candidato a definir entre los cuatro de prioridad alta</a:t>
+              <a:t>Los nueve restantes, por orden de prioridad (sección 4.2)</a:t>
             </a:r>
             <a:endParaRPr lang="en-US" sz="1200" dirty="0"/>
           </a:p>
@@ -14707,13 +14994,13 @@
       </p:sp>
       <p:sp>
         <p:nvSpPr>
-          <p:cNvPr id="26" name="Shape 24"/>
-          <p:cNvSpPr/>
-          <p:nvPr/>
-        </p:nvSpPr>
-        <p:spPr>
-          <a:xfrm>
-            <a:off x="6437376" y="4389120"/>
+          <p:cNvPr id="34" name="Shape 32"/>
+          <p:cNvSpPr/>
+          <p:nvPr/>
+        </p:nvSpPr>
+        <p:spPr>
+          <a:xfrm>
+            <a:off x="9253728" y="4389120"/>
             <a:ext cx="1417320" cy="329184"/>
           </a:xfrm>
           <a:prstGeom prst="roundRect">
@@ -14734,286 +15021,6 @@
       </p:sp>
       <p:sp>
         <p:nvSpPr>
-          <p:cNvPr id="27" name="Text 25"/>
-          <p:cNvSpPr/>
-          <p:nvPr/>
-        </p:nvSpPr>
-        <p:spPr>
-          <a:xfrm>
-            <a:off x="6437376" y="4389120"/>
-            <a:ext cx="1417320" cy="329184"/>
-          </a:xfrm>
-          <a:prstGeom prst="rect">
-            <a:avLst/>
-          </a:prstGeom>
-          <a:noFill/>
-          <a:ln/>
-        </p:spPr>
-        <p:txBody>
-          <a:bodyPr wrap="square" lIns="0" tIns="0" rIns="0" bIns="0" rtlCol="0" anchor="ctr"/>
-          <a:lstStyle/>
-          <a:p>
-            <a:pPr algn="ctr" indent="0" marL="0">
-              <a:buNone/>
-            </a:pPr>
-            <a:r>
-              <a:rPr lang="en-US" sz="1050" b="1" dirty="0">
-                <a:solidFill>
-                  <a:srgbClr val="5F706E"/>
-                </a:solidFill>
-                <a:latin typeface="Calibri" pitchFamily="34" charset="0"/>
-                <a:ea typeface="Calibri" pitchFamily="34" charset="-122"/>
-                <a:cs typeface="Calibri" pitchFamily="34" charset="-120"/>
-              </a:rPr>
-              <a:t>Pendiente</a:t>
-            </a:r>
-            <a:endParaRPr lang="en-US" sz="1050" dirty="0"/>
-          </a:p>
-        </p:txBody>
-      </p:sp>
-      <p:sp>
-        <p:nvSpPr>
-          <p:cNvPr id="28" name="Shape 26"/>
-          <p:cNvSpPr/>
-          <p:nvPr/>
-        </p:nvSpPr>
-        <p:spPr>
-          <a:xfrm>
-            <a:off x="8997696" y="1691640"/>
-            <a:ext cx="2651760" cy="3246120"/>
-          </a:xfrm>
-          <a:prstGeom prst="roundRect">
-            <a:avLst>
-              <a:gd name="adj" fmla="val 3103"/>
-            </a:avLst>
-          </a:prstGeom>
-          <a:solidFill>
-            <a:srgbClr val="FFFFFF"/>
-          </a:solidFill>
-          <a:ln w="12700">
-            <a:solidFill>
-              <a:srgbClr val="D3DFDC"/>
-            </a:solidFill>
-            <a:prstDash val="solid"/>
-          </a:ln>
-        </p:spPr>
-      </p:sp>
-      <p:sp>
-        <p:nvSpPr>
-          <p:cNvPr id="29" name="Shape 27"/>
-          <p:cNvSpPr/>
-          <p:nvPr/>
-        </p:nvSpPr>
-        <p:spPr>
-          <a:xfrm>
-            <a:off x="9253728" y="1965960"/>
-            <a:ext cx="512064" cy="512064"/>
-          </a:xfrm>
-          <a:prstGeom prst="ellipse">
-            <a:avLst/>
-          </a:prstGeom>
-          <a:solidFill>
-            <a:srgbClr val="C3D2CF"/>
-          </a:solidFill>
-          <a:ln w="6350">
-            <a:solidFill>
-              <a:srgbClr val="C3D2CF"/>
-            </a:solidFill>
-            <a:prstDash val="solid"/>
-          </a:ln>
-        </p:spPr>
-      </p:sp>
-      <p:sp>
-        <p:nvSpPr>
-          <p:cNvPr id="30" name="Text 28"/>
-          <p:cNvSpPr/>
-          <p:nvPr/>
-        </p:nvSpPr>
-        <p:spPr>
-          <a:xfrm>
-            <a:off x="9253728" y="1965960"/>
-            <a:ext cx="512064" cy="512064"/>
-          </a:xfrm>
-          <a:prstGeom prst="rect">
-            <a:avLst/>
-          </a:prstGeom>
-          <a:noFill/>
-          <a:ln/>
-        </p:spPr>
-        <p:txBody>
-          <a:bodyPr wrap="square" lIns="0" tIns="0" rIns="0" bIns="0" rtlCol="0" anchor="ctr"/>
-          <a:lstStyle/>
-          <a:p>
-            <a:pPr algn="ctr" indent="0" marL="0">
-              <a:buNone/>
-            </a:pPr>
-            <a:r>
-              <a:rPr lang="en-US" sz="1500" b="1" dirty="0">
-                <a:solidFill>
-                  <a:srgbClr val="12312F"/>
-                </a:solidFill>
-                <a:latin typeface="Calibri" pitchFamily="34" charset="0"/>
-                <a:ea typeface="Calibri" pitchFamily="34" charset="-122"/>
-                <a:cs typeface="Calibri" pitchFamily="34" charset="-120"/>
-              </a:rPr>
-              <a:t>3</a:t>
-            </a:r>
-            <a:endParaRPr lang="en-US" sz="1500" dirty="0"/>
-          </a:p>
-        </p:txBody>
-      </p:sp>
-      <p:sp>
-        <p:nvSpPr>
-          <p:cNvPr id="31" name="Text 29"/>
-          <p:cNvSpPr/>
-          <p:nvPr/>
-        </p:nvSpPr>
-        <p:spPr>
-          <a:xfrm>
-            <a:off x="9912096" y="1984248"/>
-            <a:ext cx="1463040" cy="475488"/>
-          </a:xfrm>
-          <a:prstGeom prst="rect">
-            <a:avLst/>
-          </a:prstGeom>
-          <a:noFill/>
-          <a:ln/>
-        </p:spPr>
-        <p:txBody>
-          <a:bodyPr wrap="square" lIns="0" tIns="0" rIns="0" bIns="0" rtlCol="0" anchor="ctr"/>
-          <a:lstStyle/>
-          <a:p>
-            <a:pPr indent="0" marL="0">
-              <a:buNone/>
-            </a:pPr>
-            <a:r>
-              <a:rPr lang="en-US" sz="1200" b="1" spc="100" kern="0" dirty="0">
-                <a:solidFill>
-                  <a:srgbClr val="5F706E"/>
-                </a:solidFill>
-                <a:latin typeface="Calibri" pitchFamily="34" charset="0"/>
-                <a:ea typeface="Calibri" pitchFamily="34" charset="-122"/>
-                <a:cs typeface="Calibri" pitchFamily="34" charset="-120"/>
-              </a:rPr>
-              <a:t>Fase 3</a:t>
-            </a:r>
-            <a:endParaRPr lang="en-US" sz="1200" dirty="0"/>
-          </a:p>
-        </p:txBody>
-      </p:sp>
-      <p:sp>
-        <p:nvSpPr>
-          <p:cNvPr id="32" name="Text 30"/>
-          <p:cNvSpPr/>
-          <p:nvPr/>
-        </p:nvSpPr>
-        <p:spPr>
-          <a:xfrm>
-            <a:off x="9253728" y="2606040"/>
-            <a:ext cx="2139696" cy="731520"/>
-          </a:xfrm>
-          <a:prstGeom prst="rect">
-            <a:avLst/>
-          </a:prstGeom>
-          <a:noFill/>
-          <a:ln/>
-        </p:spPr>
-        <p:txBody>
-          <a:bodyPr wrap="square" lIns="0" tIns="0" rIns="0" bIns="0" rtlCol="0" anchor="t"/>
-          <a:lstStyle/>
-          <a:p>
-            <a:pPr indent="0" marL="0">
-              <a:lnSpc>
-                <a:spcPts val="2300"/>
-              </a:lnSpc>
-              <a:buNone/>
-            </a:pPr>
-            <a:r>
-              <a:rPr lang="en-US" sz="1800" b="1" dirty="0">
-                <a:solidFill>
-                  <a:srgbClr val="12312F"/>
-                </a:solidFill>
-                <a:latin typeface="Cambria" pitchFamily="34" charset="0"/>
-                <a:ea typeface="Cambria" pitchFamily="34" charset="-122"/>
-                <a:cs typeface="Cambria" pitchFamily="34" charset="-120"/>
-              </a:rPr>
-              <a:t>Módulos adicionales</a:t>
-            </a:r>
-            <a:endParaRPr lang="en-US" sz="1800" dirty="0"/>
-          </a:p>
-        </p:txBody>
-      </p:sp>
-      <p:sp>
-        <p:nvSpPr>
-          <p:cNvPr id="33" name="Text 31"/>
-          <p:cNvSpPr/>
-          <p:nvPr/>
-        </p:nvSpPr>
-        <p:spPr>
-          <a:xfrm>
-            <a:off x="9253728" y="3383280"/>
-            <a:ext cx="2139696" cy="960120"/>
-          </a:xfrm>
-          <a:prstGeom prst="rect">
-            <a:avLst/>
-          </a:prstGeom>
-          <a:noFill/>
-          <a:ln/>
-        </p:spPr>
-        <p:txBody>
-          <a:bodyPr wrap="square" lIns="0" tIns="0" rIns="0" bIns="0" rtlCol="0" anchor="t"/>
-          <a:lstStyle/>
-          <a:p>
-            <a:pPr indent="0" marL="0">
-              <a:lnSpc>
-                <a:spcPts val="1700"/>
-              </a:lnSpc>
-              <a:buNone/>
-            </a:pPr>
-            <a:r>
-              <a:rPr lang="en-US" sz="1200" dirty="0">
-                <a:solidFill>
-                  <a:srgbClr val="5F706E"/>
-                </a:solidFill>
-                <a:latin typeface="Calibri" pitchFamily="34" charset="0"/>
-                <a:ea typeface="Calibri" pitchFamily="34" charset="-122"/>
-                <a:cs typeface="Calibri" pitchFamily="34" charset="-120"/>
-              </a:rPr>
-              <a:t>Los nueve restantes, por orden de prioridad (sección 4.2)</a:t>
-            </a:r>
-            <a:endParaRPr lang="en-US" sz="1200" dirty="0"/>
-          </a:p>
-        </p:txBody>
-      </p:sp>
-      <p:sp>
-        <p:nvSpPr>
-          <p:cNvPr id="34" name="Shape 32"/>
-          <p:cNvSpPr/>
-          <p:nvPr/>
-        </p:nvSpPr>
-        <p:spPr>
-          <a:xfrm>
-            <a:off x="9253728" y="4389120"/>
-            <a:ext cx="1417320" cy="329184"/>
-          </a:xfrm>
-          <a:prstGeom prst="roundRect">
-            <a:avLst>
-              <a:gd name="adj" fmla="val 50000"/>
-            </a:avLst>
-          </a:prstGeom>
-          <a:solidFill>
-            <a:srgbClr val="E7EDEB"/>
-          </a:solidFill>
-          <a:ln w="6350">
-            <a:solidFill>
-              <a:srgbClr val="D3DFDC"/>
-            </a:solidFill>
-            <a:prstDash val="solid"/>
-          </a:ln>
-        </p:spPr>
-      </p:sp>
-      <p:sp>
-        <p:nvSpPr>
           <p:cNvPr id="35" name="Text 33"/>
           <p:cNvSpPr/>
           <p:nvPr/>
@@ -15087,7 +15094,7 @@
                 <a:ea typeface="Calibri" pitchFamily="34" charset="-122"/>
                 <a:cs typeface="Calibri" pitchFamily="34" charset="-120"/>
               </a:rPr>
-              <a:t>Criterio de validación de la Fase 1 (ADR-001): un recorrido vertical que atraviese frontend, API autenticada, aplicación, dominio y PostgreSQL, con pruebas en los tres niveles.</a:t>
+              <a:t>Criterio de validación (ADR-001), cumplido en las dos fases entregadas: un recorrido vertical que atraviesa frontend, API autenticada, aplicación, dominio y PostgreSQL. Hoy son siete, en un navegador de verdad.</a:t>
             </a:r>
             <a:endParaRPr lang="en-US" sz="1300" dirty="0"/>
           </a:p>
@@ -15275,7 +15282,7 @@
                 <a:ea typeface="Cambria" pitchFamily="34" charset="-122"/>
                 <a:cs typeface="Cambria" pitchFamily="34" charset="-120"/>
               </a:rPr>
-              <a:t>La Fase 1 está en marcha</a:t>
+              <a:t>El core y los cuatro primeros módulos, entregados</a:t>
             </a:r>
             <a:endParaRPr lang="en-US" sz="3200" dirty="0"/>
           </a:p>
@@ -15317,7 +15324,7 @@
                 <a:ea typeface="Calibri" pitchFamily="34" charset="-122"/>
                 <a:cs typeface="Calibri" pitchFamily="34" charset="-120"/>
               </a:rPr>
-              <a:t>Con la definición cerrada y el andamiaje en pie, lo que queda es construir: el core completo, entregado en hitos que atraviesan las capas en vertical.</a:t>
+              <a:t>Lo que queda es la Fase 3: los nueve módulos restantes de la sección 4.2, sobre un mecanismo de activación que ya existe y una plataforma de avisos que ya entrega.</a:t>
             </a:r>
             <a:endParaRPr lang="en-US" sz="1500" dirty="0"/>
           </a:p>
@@ -15356,7 +15363,7 @@
                 <a:ea typeface="Calibri" pitchFamily="34" charset="-122"/>
                 <a:cs typeface="Calibri" pitchFamily="34" charset="-120"/>
               </a:rPr>
-              <a:t>EL RECORRIDO VERTICAL QUE VALIDA LA FASE 1</a:t>
+              <a:t>EL RECORRIDO VERTICAL QUE VALIDA CADA ENTREGA</a:t>
             </a:r>
             <a:endParaRPr lang="en-US" sz="1100" dirty="0"/>
           </a:p>
@@ -15852,7 +15859,7 @@
                 <a:ea typeface="Cambria" pitchFamily="34" charset="-122"/>
                 <a:cs typeface="Cambria" pitchFamily="34" charset="-120"/>
               </a:rPr>
-              <a:t>Hito 0, ya cerrado</a:t>
+              <a:t>Lo entregado</a:t>
             </a:r>
             <a:endParaRPr lang="en-US" sz="1700" dirty="0"/>
           </a:p>
@@ -15894,7 +15901,7 @@
                 <a:ea typeface="Calibri" pitchFamily="34" charset="-122"/>
                 <a:cs typeface="Calibri" pitchFamily="34" charset="-120"/>
               </a:rPr>
-              <a:t>Monorepo, integración continua, contrato saneado y el reparto del README a docs/, que la Fase 0 había aplazado a propósito.</a:t>
+              <a:t>El core completo y cuatro módulos, sobre activación por hogar y avisos programados. 98 operaciones en el contrato, 28 tablas con Row-Level Security y siete recorridos verticales.</a:t>
             </a:r>
             <a:endParaRPr lang="en-US" sz="1250" dirty="0"/>
           </a:p>
@@ -15960,7 +15967,7 @@
                 <a:ea typeface="Cambria" pitchFamily="34" charset="-122"/>
                 <a:cs typeface="Cambria" pitchFamily="34" charset="-120"/>
               </a:rPr>
-              <a:t>Módulos con prioridad alta</a:t>
+              <a:t>Lo que queda</a:t>
             </a:r>
             <a:endParaRPr lang="en-US" sz="1700" dirty="0"/>
           </a:p>
@@ -16002,7 +16009,7 @@
                 <a:ea typeface="Calibri" pitchFamily="34" charset="-122"/>
                 <a:cs typeface="Calibri" pitchFamily="34" charset="-120"/>
               </a:rPr>
-              <a:t>Cuatro, todos por diseñar: proveedores y contactos de servicio, compras y lista de la compra, Warehouse y mantenimiento (CMMS).</a:t>
+              <a:t>Los nueve módulos restantes, por orden de prioridad. Ninguno pide arquitectura nueva: el camino de un módulo está recorrido cuatro veces.</a:t>
             </a:r>
             <a:endParaRPr lang="en-US" sz="1250" dirty="0"/>
           </a:p>
@@ -16041,7 +16048,7 @@
                 <a:ea typeface="Calibri" pitchFamily="34" charset="-122"/>
                 <a:cs typeface="Calibri" pitchFamily="34" charset="-120"/>
               </a:rPr>
-              <a:t>Fuente: README.md · documento vivo, última actualización 2026-08-10</a:t>
+              <a:t>Fuente: README.md · documento vivo, última actualización 2026-08-19</a:t>
             </a:r>
             <a:endParaRPr lang="en-US" sz="1100" dirty="0"/>
           </a:p>
